--- a/presentation-deck.pptx
+++ b/presentation-deck.pptx
@@ -9,15 +9,15 @@
   </p:notesMasterIdLst>
   <p:sldIdLst>
     <p:sldId id="256" r:id="rId2"/>
-    <p:sldId id="257" r:id="rId3"/>
-    <p:sldId id="258" r:id="rId4"/>
-    <p:sldId id="259" r:id="rId5"/>
-    <p:sldId id="260" r:id="rId6"/>
-    <p:sldId id="261" r:id="rId7"/>
-    <p:sldId id="262" r:id="rId8"/>
-    <p:sldId id="263" r:id="rId9"/>
-    <p:sldId id="264" r:id="rId10"/>
-    <p:sldId id="265" r:id="rId11"/>
+    <p:sldId id="265" r:id="rId3"/>
+    <p:sldId id="257" r:id="rId4"/>
+    <p:sldId id="258" r:id="rId5"/>
+    <p:sldId id="259" r:id="rId6"/>
+    <p:sldId id="260" r:id="rId7"/>
+    <p:sldId id="261" r:id="rId8"/>
+    <p:sldId id="262" r:id="rId9"/>
+    <p:sldId id="263" r:id="rId10"/>
+    <p:sldId id="264" r:id="rId11"/>
   </p:sldIdLst>
   <p:sldSz cx="12192000" cy="6858000"/>
   <p:notesSz cx="6858000" cy="9144000"/>
@@ -516,6 +516,7 @@
     </c:plotArea>
     <c:legend>
       <c:legendPos val="b"/>
+      <c:layout/>
       <c:overlay val="0"/>
       <c:txPr>
         <a:bodyPr/>
@@ -697,6 +698,7 @@
             <c:showLeaderLines val="0"/>
             <c:extLst>
               <c:ext xmlns:c15="http://schemas.microsoft.com/office/drawing/2012/chart" uri="{CE6537A1-D6FC-4f65-9D91-7224C49458BB}">
+                <c15:layout/>
                 <c15:showLeaderLines val="0"/>
               </c:ext>
             </c:extLst>
@@ -1122,6 +1124,7 @@
     </c:plotArea>
     <c:legend>
       <c:legendPos val="b"/>
+      <c:layout/>
       <c:overlay val="0"/>
       <c:txPr>
         <a:bodyPr/>
@@ -1285,6 +1288,7 @@
             <c:showLeaderLines val="0"/>
             <c:extLst>
               <c:ext xmlns:c15="http://schemas.microsoft.com/office/drawing/2012/chart" uri="{CE6537A1-D6FC-4f65-9D91-7224C49458BB}">
+                <c15:layout/>
                 <c15:showLeaderLines val="0"/>
               </c:ext>
             </c:extLst>
@@ -1967,7 +1971,7 @@
           <a:lstStyle/>
           <a:p>
             <a:r>
-              <a:t>Two editable circular demo portraits with placeholder names and suggested roles. The user requested demo details to replace manually. These are not verified repository contributor identities. Use Change Picture, and crop replacement photos to oval. The delivery diagram connects AI/backend work to frontend/UX work.</a:t>
+              <a:t>The animation demonstrates the existing permission matrix: a parent may see balances and tuition while transaction descriptions remain hidden. It does not imply a specific demo account has these permissions. Encrypted-key handling is for AI API keys, not a claim that all financial data is encrypted. User closure revokes access but is not an erasure promise. Fields sent through AI tools may reach the configured provider. Controls are implemented; no independent certification is claimed.</a:t>
             </a:r>
           </a:p>
           <a:p>
@@ -1975,7 +1979,7 @@
           </a:p>
           <a:p>
             <a:r>
-              <a:t>These are demo avatars and suggested role placeholders, explicitly requested by the user. They do not identify actual repository contributors and must not be presented as verified authorship. To replace a portrait, select the circular picture and use Change Picture. The PNG contains a circular portrait with transparent corners; apply Crop to Shape &gt; Oval to any replacement photo. All name and role fields are normal editable PowerPoint text boxes.</a:t>
+              <a:t>Security claims are code-level controls, not a certification. session.ts uses HS256, 8-hour JWT expiry, httpOnly, SameSite lax and production secure cookies; auth.ts verifies session_version. Passwords use bcrypt. secrets.ts encrypts AI keys using AES-256-GCM. Parent permissions govern disclosure. Avatar validation in current src/lib/avatar.ts accepts PNG/JPEG/WebP data URLs, checks signatures and enforces 300,000 bytes; README describes a different limit, so the slide deliberately makes no size claim. Profile export is capped per table and is not an exhaustive privacy portability certification. Account closure changes status and revokes sessions/links; it is not an erasure promise. AI adapters send selected conversational/tool context to the configured provider. No claim is made that all financial data is encrypted at rest. Legacy sandbox transfer uses locked quotes and single-use execution tokens. Unified payment path uses idempotency, transactional locking and policy checks. No fresh audit was run for this deck.</a:t>
             </a:r>
           </a:p>
           <a:p>
@@ -1983,7 +1987,7 @@
           </a:p>
           <a:p>
             <a:r>
-              <a:t>Repository evidence: User instruction: keep developer details demo for manual replacement; README.md project identity</a:t>
+              <a:t>Repository evidence: src/lib/session.ts; src/lib/auth.ts; src/lib/secrets.ts; src/lib/avatar.ts; src/lib/permissions.ts; src/lib/risk-engine.ts; src/actions/user.actions.ts; src/services/sandbox-payment.service.ts; src/services/payment.service.ts; src/ai/</a:t>
             </a:r>
           </a:p>
           <a:p>
@@ -2061,7 +2065,7 @@
           <a:lstStyle/>
           <a:p>
             <a:r>
-              <a:t>Example is proportional to the tuition-gap unit test: available CNY 27,500 + two months of CNY 5,000 income - two months of CNY 2,125 living costs = CNY 33,250. Tuition CNY 40,000 leaves CNY 6,750 gap and CNY 3,375 per-month additional target. The readiness figure is 83.125%, displayed as 83%. Formula: src/lib/money.ts fundingGap; tests/finance.test.ts. No real-person outcome is claimed.</a:t>
+              <a:t>Two editable circular demo portraits with placeholder names and suggested roles. The user requested demo details to replace manually. These are not verified repository contributor identities. Use Change Picture, and crop replacement photos to oval. The delivery diagram connects AI/backend work to frontend/UX work.</a:t>
             </a:r>
           </a:p>
           <a:p>
@@ -2069,7 +2073,7 @@
           </a:p>
           <a:p>
             <a:r>
-              <a:t>Frame the problem using the workflows implemented in this repository rather than unsourced market statistics. The project targets international students, parents and educational sponsors.</a:t>
+              <a:t>These are demo avatars and suggested role placeholders, explicitly requested by the user. They do not identify actual repository contributors and must not be presented as verified authorship. To replace a portrait, select the circular picture and use Change Picture. The PNG contains a circular portrait with transparent corners; apply Crop to Shape &gt; Oval to any replacement photo. All name and role fields are normal editable PowerPoint text boxes.</a:t>
             </a:r>
           </a:p>
           <a:p>
@@ -2077,7 +2081,7 @@
           </a:p>
           <a:p>
             <a:r>
-              <a:t>Repository evidence: README.md; src/services/tuition.service.ts; src/services/remittance.service.ts; src/services/parent-controls.service.ts</a:t>
+              <a:t>Repository evidence: User instruction: keep developer details demo for manual replacement; README.md project identity</a:t>
             </a:r>
           </a:p>
           <a:p>
@@ -2155,14 +2159,24 @@
           <a:lstStyle/>
           <a:p>
             <a:r>
-              <a:t>A real-world struggle scenario, explicitly illustrative rather than a documented case study. The chart uses the same inputs and exact formula as slide 2. Funding is CNY 27,500 initially, CNY 30,375 after one month and CNY 33,250 after two. The tuition line remains CNY 40,000. Student expenses, a parent funding from Bangladesh and a fixed tuition deadline motivate the app modules. No invented prevalence or survey statistics are used. Sources: README.md; src/lib/money.ts; src/services/tuition.service.ts; src/services/remittance.service.ts; src/actions/parent.actions.ts.</a:t>
+              <a:t>Example is proportional to the tuition-gap unit test: available CNY 27,500 + two months of CNY 5,000 income - two months of CNY 2,125 living costs = CNY 33,250. Tuition CNY 40,000 leaves CNY 6,750 gap and CNY 3,375 per-month additional target. The readiness figure is 83.125%, displayed as 83%. Formula: src/lib/money.ts fundingGap; tests/finance.test.ts. No real-person outcome is claimed.</a:t>
             </a:r>
           </a:p>
           <a:p>
             <a:endParaRPr/>
           </a:p>
           <a:p>
+            <a:r>
+              <a:t>Frame the problem using the workflows implemented in this repository rather than unsourced market statistics. The project targets international students, parents and educational sponsors.</a:t>
+            </a:r>
+          </a:p>
+          <a:p>
             <a:endParaRPr/>
+          </a:p>
+          <a:p>
+            <a:r>
+              <a:t>Repository evidence: README.md; src/services/tuition.service.ts; src/services/remittance.service.ts; src/services/parent-controls.service.ts</a:t>
+            </a:r>
           </a:p>
           <a:p>
             <a:endParaRPr/>
@@ -2239,24 +2253,14 @@
           <a:lstStyle/>
           <a:p>
             <a:r>
-              <a:t>Provider comparison is computed with the actual repository formula, seeded provider fees and seeded rates CNY 5.21 / BDT 88.5. Target receipt is CNY 6,750. Principal = receipt / (targetRate/sourceRate * (1-spread)), rounded to cents; total = principal + principal*percentage_fee + fixed_fee. Providers and seed settings from scripts/generate-demo.mjs. These are sandbox seed values, not current market quotes. Bars show additional sender cost relative to the lowest demo quote; zero means no extra cost versus that baseline. Full exact values are in presentation/dark-assets/chart-data.json. Native workflow nodes show the product solution.</a:t>
+              <a:t>A real-world struggle scenario, explicitly illustrative rather than a documented case study. The chart uses the same inputs and exact formula as slide 2. Funding is CNY 27,500 initially, CNY 30,375 after one month and CNY 33,250 after two. The tuition line remains CNY 40,000. Student expenses, a parent funding from Bangladesh and a fixed tuition deadline motivate the app modules. No invented prevalence or survey statistics are used. Sources: README.md; src/lib/money.ts; src/services/tuition.service.ts; src/services/remittance.service.ts; src/actions/parent.actions.ts.</a:t>
             </a:r>
           </a:p>
           <a:p>
             <a:endParaRPr/>
           </a:p>
           <a:p>
-            <a:r>
-              <a:t>The same payment backend is reused by student, parent and AI workflows. Shared experience includes onboarding, preferred currency, language, time zone, notifications, theme, search, subscriptions, saved demo cards and personal model settings. The platform is a sandbox with manual external settlement.</a:t>
-            </a:r>
-          </a:p>
-          <a:p>
             <a:endParaRPr/>
-          </a:p>
-          <a:p>
-            <a:r>
-              <a:t>Repository evidence: src/actions/dashboard.actions.ts; src/components/layout/shell.tsx; src/actions/preferences.actions.ts; src/services/payment.service.ts; IMPLEMENTATION_STATUS.md</a:t>
-            </a:r>
           </a:p>
           <a:p>
             <a:endParaRPr/>
@@ -2333,7 +2337,7 @@
           <a:lstStyle/>
           <a:p>
             <a:r>
-              <a:t>Combined implementation slide retains AI emphasis while making room for the real-world-struggles slide. The animated tool run is an illustrative reproduction of implemented tool and review behavior, not a recording of a live provider call. Exact tool names appear in src/ai/tools/index.ts and src/ai/action-catalog.ts. Confirmed non-financial proposals dispatch through src/actions/agent-workflow.actions.ts; money requests reuse src/services/payment.service.ts. Stack: Next.js/React/TypeScript, Zod, MySQL, Decimal.js. Chat can read authorized application context, compare providers, propose budgets and funding plans, draft payments, navigate and ask follow-ups. Financial execution requires confirmation. Tool logs and action state persist.</a:t>
+              <a:t>Provider comparison is computed with the actual repository formula, seeded provider fees and seeded rates CNY 5.21 / BDT 88.5. Target receipt is CNY 6,750. Principal = receipt / (targetRate/sourceRate * (1-spread)), rounded to cents; total = principal + principal*percentage_fee + fixed_fee. Providers and seed settings from scripts/generate-demo.mjs. These are sandbox seed values, not current market quotes. Bars show additional sender cost relative to the lowest demo quote; zero means no extra cost versus that baseline. Full exact values are in presentation/dark-assets/chart-data.json. Native workflow nodes show the product solution.</a:t>
             </a:r>
           </a:p>
           <a:p>
@@ -2341,7 +2345,7 @@
           </a:p>
           <a:p>
             <a:r>
-              <a:t>Primary AI capabilities: getStudentProfile, getAccounts, analyseTransactions, calculateTuitionGap, compareRemittance, getFxRates, generateBudgetSuggestion, analyseFinancialHealth, getCreditGuidance, getWorkspaceData, assessPaymentRisk, draftPayment, beneficiary tools, requestAction and respond. The role-checked catalog also supports account, transaction, budget, tuition, alert, credit, family, preference, report and subscription tasks. Financial execution requires explicit UI confirmation. Some approved low-impact tools may create drafts, beneficiaries or alerts; do not claim the model is universally read-only. The chart is a deliberately simplified illustrative plan, not a live account or measured result.</a:t>
+              <a:t>The same payment backend is reused by student, parent and AI workflows. Shared experience includes onboarding, preferred currency, language, time zone, notifications, theme, search, subscriptions, saved demo cards and personal model settings. The platform is a sandbox with manual external settlement.</a:t>
             </a:r>
           </a:p>
           <a:p>
@@ -2349,7 +2353,7 @@
           </a:p>
           <a:p>
             <a:r>
-              <a:t>Repository evidence: src/ai/tools/index.ts; src/ai/action-catalog.ts; src/ai/mock-provider.ts; src/ai/gemini-provider.ts; src/ai/openai-provider.ts</a:t>
+              <a:t>Repository evidence: src/actions/dashboard.actions.ts; src/components/layout/shell.tsx; src/actions/preferences.actions.ts; src/services/payment.service.ts; IMPLEMENTATION_STATUS.md</a:t>
             </a:r>
           </a:p>
           <a:p>
@@ -2427,7 +2431,7 @@
           <a:lstStyle/>
           <a:p>
             <a:r>
-              <a:t>The native chart is illustrative, using monthly expenses CNY 1,500 housing + 450 food + 175 transport = 2,125. The shopping card is an actual screenshot from the local demo, separate from the illustrative scenario; its amounts are not part of the story dataset. Shared account preferences include language, theme, country, currency, timezone and notification choices. Monthly/annual sandbox subscriptions, cancellation/history, CSV limits/preview/atomic rollback, photo/password settings, data export and closure remain implemented. All original capability detail is retained below.</a:t>
+              <a:t>Combined implementation slide retains AI emphasis while making room for the real-world-struggles slide. The animated tool run is an illustrative reproduction of implemented tool and review behavior, not a recording of a live provider call. Exact tool names appear in src/ai/tools/index.ts and src/ai/action-catalog.ts. Confirmed non-financial proposals dispatch through src/actions/agent-workflow.actions.ts; money requests reuse src/services/payment.service.ts. Stack: Next.js/React/TypeScript, Zod, MySQL, Decimal.js. Chat can read authorized application context, compare providers, propose budgets and funding plans, draft payments, navigate and ask follow-ups. Financial execution requires confirmation. Tool logs and action state persist.</a:t>
             </a:r>
           </a:p>
           <a:p>
@@ -2435,7 +2439,7 @@
           </a:p>
           <a:p>
             <a:r>
-              <a:t>Student feature inventory: account creation/rename/archive; separate cash and payment wallet semantics; manual categorized transactions and confidence display; pagination/filtering; CSV file and row limits, mapping and preview; budget creation/edit, mixed-currency normalization and AI suggestions; tuition paid and scholarship tracking, monthly funding plans and readiness; educational credit profile and country-specific checklist; FX charts/provider comparisons, locked quotes and reviewed legacy sandbox execution; unified internal/card/manual/external payment requests and beneficiary approvals; saved card management; payment statuses, cancellation, receipts, ledger and audit activity; AI providers, personal keys, selection and tests; family invitation acceptance; automatic alerts and user reminders; subscription quotas, monthly/annual sandbox checkout, change history and cancellation; support reports; profile photo/name/email, password reset/change, locale/country/currency/time zone/theme/notifications; data export and account closure. The mini bars are illustrative visual cues.</a:t>
+              <a:t>Primary AI capabilities: getStudentProfile, getAccounts, analyseTransactions, calculateTuitionGap, compareRemittance, getFxRates, generateBudgetSuggestion, analyseFinancialHealth, getCreditGuidance, getWorkspaceData, assessPaymentRisk, draftPayment, beneficiary tools, requestAction and respond. The role-checked catalog also supports account, transaction, budget, tuition, alert, credit, family, preference, report and subscription tasks. Financial execution requires explicit UI confirmation. Some approved low-impact tools may create drafts, beneficiaries or alerts; do not claim the model is universally read-only. The chart is a deliberately simplified illustrative plan, not a live account or measured result.</a:t>
             </a:r>
           </a:p>
           <a:p>
@@ -2443,7 +2447,7 @@
           </a:p>
           <a:p>
             <a:r>
-              <a:t>Repository evidence: src/actions/; src/components/accounts/; src/components/tuition/; src/components/budget/; src/components/payments/; src/components/layout/utility-pages.tsx; src/components/settings/platform-panels.tsx</a:t>
+              <a:t>Repository evidence: src/ai/tools/index.ts; src/ai/action-catalog.ts; src/ai/mock-provider.ts; src/ai/gemini-provider.ts; src/ai/openai-provider.ts</a:t>
             </a:r>
           </a:p>
           <a:p>
@@ -2521,7 +2525,7 @@
           <a:lstStyle/>
           <a:p>
             <a:r>
-              <a:t>Illustrative threshold CNY 5,000, request CNY 6,750 and per-transfer cap CNY 10,000. The request exceeds the approval threshold but stays below the hard cap, so it needs parent review rather than automatic rejection (other policy checks still apply). The animation is a state demonstration, not a real transfer. Parent authorization is explicit; the model cannot approve by itself. The strongest applicable parent policy wins, and parents cannot relax platform risk limits.</a:t>
+              <a:t>The native chart is illustrative, using monthly expenses CNY 1,500 housing + 450 food + 175 transport = 2,125. The shopping card is an actual screenshot from the local demo, separate from the illustrative scenario; its amounts are not part of the story dataset. Shared account preferences include language, theme, country, currency, timezone and notification choices. Monthly/annual sandbox subscriptions, cancellation/history, CSV limits/preview/atomic rollback, photo/password settings, data export and closure remain implemented. All original capability detail is retained below.</a:t>
             </a:r>
           </a:p>
           <a:p>
@@ -2529,7 +2533,7 @@
           </a:p>
           <a:p>
             <a:r>
-              <a:t>Parent functions include linking and revocation, configurable visibility, parent-owned financial accounts and wallet transfers, transaction recording and CSV imports under role ownership, approval decisions and history, beneficiary decisions, controls for tuition/conversion, caps and thresholds, non-beneficiary policy and category limits. Strictest applicable parent policy wins and can only tighten administrator ceilings. Parent AI actions are restricted by the role catalog; the model does not approve by itself. Parent access to automatic alerts respects visibility. Parent subscriptions, cards, models and preferences share the customer workflow. Illustrative bars show nested policy constraints, not measured amounts.</a:t>
+              <a:t>Student feature inventory: account creation/rename/archive; separate cash and payment wallet semantics; manual categorized transactions and confidence display; pagination/filtering; CSV file and row limits, mapping and preview; budget creation/edit, mixed-currency normalization and AI suggestions; tuition paid and scholarship tracking, monthly funding plans and readiness; educational credit profile and country-specific checklist; FX charts/provider comparisons, locked quotes and reviewed legacy sandbox execution; unified internal/card/manual/external payment requests and beneficiary approvals; saved card management; payment statuses, cancellation, receipts, ledger and audit activity; AI providers, personal keys, selection and tests; family invitation acceptance; automatic alerts and user reminders; subscription quotas, monthly/annual sandbox checkout, change history and cancellation; support reports; profile photo/name/email, password reset/change, locale/country/currency/time zone/theme/notifications; data export and account closure. The mini bars are illustrative visual cues.</a:t>
             </a:r>
           </a:p>
           <a:p>
@@ -2537,7 +2541,7 @@
           </a:p>
           <a:p>
             <a:r>
-              <a:t>Repository evidence: src/actions/parent.actions.ts; src/services/parent-controls.service.ts; src/services/payment.service.ts; src/ai/action-catalog.ts; src/components/family/family-page.tsx; src/services/automatic-alerts.service.ts</a:t>
+              <a:t>Repository evidence: src/actions/; src/components/accounts/; src/components/tuition/; src/components/budget/; src/components/payments/; src/components/layout/utility-pages.tsx; src/components/settings/platform-panels.tsx</a:t>
             </a:r>
           </a:p>
           <a:p>
@@ -2615,7 +2619,7 @@
           <a:lstStyle/>
           <a:p>
             <a:r>
-              <a:t>Queue counts 6, 2 and 12 are illustrative snapshot values, not production metrics. Animated card shows manual queue progression with a reference and receipt, with no actual transfer execution. Admin uses role-restricted settlement service, provider/catalog/risk/plan controls and evidence inspection. Moderator delegations and team publishing remain in the feature list. Source code and original detailed inventory follow.</a:t>
+              <a:t>Illustrative threshold CNY 5,000, request CNY 6,750 and per-transfer cap CNY 10,000. The request exceeds the approval threshold but stays below the hard cap, so it needs parent review rather than automatic rejection (other policy checks still apply). The animation is a state demonstration, not a real transfer. Parent authorization is explicit; the model cannot approve by itself. The strongest applicable parent policy wins, and parents cannot relax platform risk limits.</a:t>
             </a:r>
           </a:p>
           <a:p>
@@ -2623,7 +2627,7 @@
           </a:p>
           <a:p>
             <a:r>
-              <a:t>Administrator features verified against admin.actions.ts, platform.actions.ts, payment.actions.ts, admin-page.tsx and financial-config.tsx. Moderator delegations cover reports, team, agent, models, users, finance and catalog; access is individually checked. Team editing includes publishing, designation and CEO designation, profile photo and limited moderator self-edit. Settlement actions are role restricted. Financial controls include risk caps, provider and route settings and country-specific credit education. Reporting and evidence are application artifacts, not independent compliance certification.</a:t>
+              <a:t>Parent functions include linking and revocation, configurable visibility, parent-owned financial accounts and wallet transfers, transaction recording and CSV imports under role ownership, approval decisions and history, beneficiary decisions, controls for tuition/conversion, caps and thresholds, non-beneficiary policy and category limits. Strictest applicable parent policy wins and can only tighten administrator ceilings. Parent AI actions are restricted by the role catalog; the model does not approve by itself. Parent access to automatic alerts respects visibility. Parent subscriptions, cards, models and preferences share the customer workflow. Illustrative bars show nested policy constraints, not measured amounts.</a:t>
             </a:r>
           </a:p>
           <a:p>
@@ -2631,7 +2635,7 @@
           </a:p>
           <a:p>
             <a:r>
-              <a:t>Repository evidence: src/actions/admin.actions.ts; src/actions/platform.actions.ts; src/actions/payment.actions.ts; src/components/admin/; src/lib/admin-permissions.ts; src/components/layout/evidence-page.tsx</a:t>
+              <a:t>Repository evidence: src/actions/parent.actions.ts; src/services/parent-controls.service.ts; src/services/payment.service.ts; src/ai/action-catalog.ts; src/components/family/family-page.tsx; src/services/automatic-alerts.service.ts</a:t>
             </a:r>
           </a:p>
           <a:p>
@@ -2709,7 +2713,7 @@
           <a:lstStyle/>
           <a:p>
             <a:r>
-              <a:t>The animation demonstrates the existing permission matrix: a parent may see balances and tuition while transaction descriptions remain hidden. It does not imply a specific demo account has these permissions. Encrypted-key handling is for AI API keys, not a claim that all financial data is encrypted. User closure revokes access but is not an erasure promise. Fields sent through AI tools may reach the configured provider. Controls are implemented; no independent certification is claimed.</a:t>
+              <a:t>Queue counts 6, 2 and 12 are illustrative snapshot values, not production metrics. Animated card shows manual queue progression with a reference and receipt, with no actual transfer execution. Admin uses role-restricted settlement service, provider/catalog/risk/plan controls and evidence inspection. Moderator delegations and team publishing remain in the feature list. Source code and original detailed inventory follow.</a:t>
             </a:r>
           </a:p>
           <a:p>
@@ -2717,7 +2721,7 @@
           </a:p>
           <a:p>
             <a:r>
-              <a:t>Security claims are code-level controls, not a certification. session.ts uses HS256, 8-hour JWT expiry, httpOnly, SameSite lax and production secure cookies; auth.ts verifies session_version. Passwords use bcrypt. secrets.ts encrypts AI keys using AES-256-GCM. Parent permissions govern disclosure. Avatar validation in current src/lib/avatar.ts accepts PNG/JPEG/WebP data URLs, checks signatures and enforces 300,000 bytes; README describes a different limit, so the slide deliberately makes no size claim. Profile export is capped per table and is not an exhaustive privacy portability certification. Account closure changes status and revokes sessions/links; it is not an erasure promise. AI adapters send selected conversational/tool context to the configured provider. No claim is made that all financial data is encrypted at rest. Legacy sandbox transfer uses locked quotes and single-use execution tokens. Unified payment path uses idempotency, transactional locking and policy checks. No fresh audit was run for this deck.</a:t>
+              <a:t>Administrator features verified against admin.actions.ts, platform.actions.ts, payment.actions.ts, admin-page.tsx and financial-config.tsx. Moderator delegations cover reports, team, agent, models, users, finance and catalog; access is individually checked. Team editing includes publishing, designation and CEO designation, profile photo and limited moderator self-edit. Settlement actions are role restricted. Financial controls include risk caps, provider and route settings and country-specific credit education. Reporting and evidence are application artifacts, not independent compliance certification.</a:t>
             </a:r>
           </a:p>
           <a:p>
@@ -2725,7 +2729,7 @@
           </a:p>
           <a:p>
             <a:r>
-              <a:t>Repository evidence: src/lib/session.ts; src/lib/auth.ts; src/lib/secrets.ts; src/lib/avatar.ts; src/lib/permissions.ts; src/lib/risk-engine.ts; src/actions/user.actions.ts; src/services/sandbox-payment.service.ts; src/services/payment.service.ts; src/ai/</a:t>
+              <a:t>Repository evidence: src/actions/admin.actions.ts; src/actions/platform.actions.ts; src/actions/payment.actions.ts; src/components/admin/; src/lib/admin-permissions.ts; src/components/layout/evidence-page.tsx</a:t>
             </a:r>
           </a:p>
           <a:p>
@@ -6104,7 +6108,7 @@
               </a:defRPr>
             </a:pPr>
             <a:r>
-              <a:t>DEVELOPER INTRODUCTION</a:t>
+              <a:t>SECURITY &amp; PRIVACY</a:t>
             </a:r>
           </a:p>
         </p:txBody>
@@ -6143,7 +6147,7 @@
               </a:defRPr>
             </a:pPr>
             <a:r>
-              <a:t>The team behind FinBridge AI</a:t>
+              <a:t>Security &amp; privacy</a:t>
             </a:r>
           </a:p>
         </p:txBody>
@@ -6151,6 +6155,45 @@
       <p:sp>
         <p:nvSpPr>
           <p:cNvPr id="4" name="TextBox 3"/>
+          <p:cNvSpPr txBox="1"/>
+          <p:nvPr/>
+        </p:nvSpPr>
+        <p:spPr>
+          <a:xfrm>
+            <a:off x="521207" y="1389888"/>
+            <a:ext cx="10972800" cy="411480"/>
+          </a:xfrm>
+          <a:prstGeom prst="rect">
+            <a:avLst/>
+          </a:prstGeom>
+          <a:noFill/>
+        </p:spPr>
+        <p:txBody>
+          <a:bodyPr wrap="square" lIns="0" tIns="0" rIns="0" bIns="0">
+            <a:spAutoFit/>
+          </a:bodyPr>
+          <a:lstStyle/>
+          <a:p>
+            <a:pPr>
+              <a:spcAft>
+                <a:spcPts val="300"/>
+              </a:spcAft>
+              <a:defRPr sz="1300" b="0">
+                <a:solidFill>
+                  <a:srgbClr val="A2B4CA"/>
+                </a:solidFill>
+                <a:latin typeface="Aptos"/>
+              </a:defRPr>
+            </a:pPr>
+            <a:r>
+              <a:t>Controls are applied to each action and each field of financial context.</a:t>
+            </a:r>
+          </a:p>
+        </p:txBody>
+      </p:sp>
+      <p:sp>
+        <p:nvSpPr>
+          <p:cNvPr id="5" name="TextBox 4"/>
           <p:cNvSpPr txBox="1"/>
           <p:nvPr/>
         </p:nvSpPr>
@@ -6189,7 +6232,7 @@
       </p:sp>
       <p:sp>
         <p:nvSpPr>
-          <p:cNvPr id="5" name="TextBox 4"/>
+          <p:cNvPr id="6" name="TextBox 5"/>
           <p:cNvSpPr txBox="1"/>
           <p:nvPr/>
         </p:nvSpPr>
@@ -6221,14 +6264,14 @@
               </a:defRPr>
             </a:pPr>
             <a:r>
-              <a:t>10 / 10</a:t>
+              <a:t>09 / 10</a:t>
             </a:r>
           </a:p>
         </p:txBody>
       </p:sp>
       <p:pic>
         <p:nvPicPr>
-          <p:cNvPr id="6" name="reveal_02" descr="demo-developer-1.png"/>
+          <p:cNvPr id="7" name="reveal_02" descr="privacy.gif"/>
           <p:cNvPicPr>
             <a:picLocks noChangeAspect="1"/>
           </p:cNvPicPr>
@@ -6242,8 +6285,8 @@
         </p:blipFill>
         <p:spPr>
           <a:xfrm>
-            <a:off x="1572768" y="1901952"/>
-            <a:ext cx="2011680" cy="2011680"/>
+            <a:off x="502920" y="1920240"/>
+            <a:ext cx="6583680" cy="3895344"/>
           </a:xfrm>
           <a:prstGeom prst="rect">
             <a:avLst/>
@@ -6252,14 +6295,60 @@
       </p:pic>
       <p:sp>
         <p:nvSpPr>
-          <p:cNvPr id="7" name="reveal_04"/>
+          <p:cNvPr id="8" name="Rounded Rectangle 7"/>
+          <p:cNvSpPr/>
+          <p:nvPr/>
+        </p:nvSpPr>
+        <p:spPr>
+          <a:xfrm>
+            <a:off x="7342631" y="2020824"/>
+            <a:ext cx="411480" cy="292608"/>
+          </a:xfrm>
+          <a:prstGeom prst="roundRect">
+            <a:avLst>
+              <a:gd name="adj" fmla="val 10000"/>
+            </a:avLst>
+          </a:prstGeom>
+          <a:solidFill>
+            <a:srgbClr val="6BB9FF"/>
+          </a:solidFill>
+          <a:ln>
+            <a:noFill/>
+          </a:ln>
+        </p:spPr>
+        <p:style>
+          <a:lnRef idx="1">
+            <a:schemeClr val="accent1"/>
+          </a:lnRef>
+          <a:fillRef idx="3">
+            <a:schemeClr val="accent1"/>
+          </a:fillRef>
+          <a:effectRef idx="2">
+            <a:schemeClr val="accent1"/>
+          </a:effectRef>
+          <a:fontRef idx="minor">
+            <a:schemeClr val="lt1"/>
+          </a:fontRef>
+        </p:style>
+        <p:txBody>
+          <a:bodyPr rtlCol="0" anchor="ctr"/>
+          <a:lstStyle/>
+          <a:p>
+            <a:pPr algn="ctr"/>
+            <a:endParaRPr/>
+          </a:p>
+        </p:txBody>
+      </p:sp>
+      <p:sp>
+        <p:nvSpPr>
+          <p:cNvPr id="9" name="TextBox 8"/>
           <p:cNvSpPr txBox="1"/>
           <p:nvPr/>
         </p:nvSpPr>
         <p:spPr>
           <a:xfrm>
-            <a:off x="932688" y="4187952"/>
-            <a:ext cx="3291840" cy="484632"/>
+            <a:off x="7415783" y="2061972"/>
+            <a:ext cx="265176" cy="210312"/>
           </a:xfrm>
           <a:prstGeom prst="rect">
             <a:avLst/>
@@ -6272,11 +6361,50 @@
           </a:bodyPr>
           <a:lstStyle/>
           <a:p>
-            <a:pPr algn="ctr">
+            <a:pPr>
               <a:spcAft>
                 <a:spcPts val="300"/>
               </a:spcAft>
-              <a:defRPr sz="2800" b="1">
+              <a:defRPr sz="1000" b="1">
+                <a:solidFill>
+                  <a:srgbClr val="080F1B"/>
+                </a:solidFill>
+                <a:latin typeface="Aptos"/>
+              </a:defRPr>
+            </a:pPr>
+            <a:r>
+              <a:t>01</a:t>
+            </a:r>
+          </a:p>
+        </p:txBody>
+      </p:sp>
+      <p:sp>
+        <p:nvSpPr>
+          <p:cNvPr id="10" name="reveal_03"/>
+          <p:cNvSpPr txBox="1"/>
+          <p:nvPr/>
+        </p:nvSpPr>
+        <p:spPr>
+          <a:xfrm>
+            <a:off x="7918704" y="2020824"/>
+            <a:ext cx="3749039" cy="274320"/>
+          </a:xfrm>
+          <a:prstGeom prst="rect">
+            <a:avLst/>
+          </a:prstGeom>
+          <a:noFill/>
+        </p:spPr>
+        <p:txBody>
+          <a:bodyPr wrap="square" lIns="0" tIns="0" rIns="0" bIns="0">
+            <a:spAutoFit/>
+          </a:bodyPr>
+          <a:lstStyle/>
+          <a:p>
+            <a:pPr>
+              <a:spcAft>
+                <a:spcPts val="300"/>
+              </a:spcAft>
+              <a:defRPr sz="1400" b="1">
                 <a:solidFill>
                   <a:srgbClr val="EDF5FF"/>
                 </a:solidFill>
@@ -6284,21 +6412,21 @@
               </a:defRPr>
             </a:pPr>
             <a:r>
-              <a:t>Developer 1</a:t>
-            </a:r>
-          </a:p>
-        </p:txBody>
-      </p:sp>
-      <p:sp>
-        <p:nvSpPr>
-          <p:cNvPr id="8" name="reveal_04"/>
+              <a:t>IDENTITY</a:t>
+            </a:r>
+          </a:p>
+        </p:txBody>
+      </p:sp>
+      <p:sp>
+        <p:nvSpPr>
+          <p:cNvPr id="11" name="reveal_03"/>
           <p:cNvSpPr txBox="1"/>
           <p:nvPr/>
         </p:nvSpPr>
         <p:spPr>
           <a:xfrm>
-            <a:off x="932688" y="4828032"/>
-            <a:ext cx="3291840" cy="329184"/>
+            <a:off x="7918704" y="2414016"/>
+            <a:ext cx="3657600" cy="457200"/>
           </a:xfrm>
           <a:prstGeom prst="rect">
             <a:avLst/>
@@ -6311,57 +6439,79 @@
           </a:bodyPr>
           <a:lstStyle/>
           <a:p>
-            <a:pPr algn="ctr">
+            <a:pPr>
               <a:spcAft>
                 <a:spcPts val="300"/>
               </a:spcAft>
-              <a:defRPr sz="1700" b="0">
+              <a:defRPr sz="1300" b="0">
                 <a:solidFill>
-                  <a:srgbClr val="63E6BE"/>
+                  <a:srgbClr val="A2B4CA"/>
                 </a:solidFill>
                 <a:latin typeface="Aptos"/>
               </a:defRPr>
             </a:pPr>
             <a:r>
-              <a:t>AI &amp; Backend</a:t>
-            </a:r>
-          </a:p>
-        </p:txBody>
-      </p:sp>
-      <p:pic>
-        <p:nvPicPr>
-          <p:cNvPr id="9" name="reveal_03" descr="demo-developer-2.png"/>
-          <p:cNvPicPr>
-            <a:picLocks noChangeAspect="1"/>
-          </p:cNvPicPr>
-          <p:nvPr/>
-        </p:nvPicPr>
-        <p:blipFill>
-          <a:blip r:embed="rId4"/>
-          <a:stretch>
-            <a:fillRect/>
-          </a:stretch>
-        </p:blipFill>
-        <p:spPr>
-          <a:xfrm>
-            <a:off x="8156448" y="1901952"/>
-            <a:ext cx="2011680" cy="2011680"/>
-          </a:xfrm>
-          <a:prstGeom prst="rect">
-            <a:avLst/>
-          </a:prstGeom>
-        </p:spPr>
-      </p:pic>
-      <p:sp>
-        <p:nvSpPr>
-          <p:cNvPr id="10" name="reveal_05"/>
+              <a:t>bcrypt hashes; signed sessions; revocation.</a:t>
+            </a:r>
+          </a:p>
+        </p:txBody>
+      </p:sp>
+      <p:sp>
+        <p:nvSpPr>
+          <p:cNvPr id="12" name="Rounded Rectangle 11"/>
+          <p:cNvSpPr/>
+          <p:nvPr/>
+        </p:nvSpPr>
+        <p:spPr>
+          <a:xfrm>
+            <a:off x="7342631" y="2953512"/>
+            <a:ext cx="411480" cy="292608"/>
+          </a:xfrm>
+          <a:prstGeom prst="roundRect">
+            <a:avLst>
+              <a:gd name="adj" fmla="val 10000"/>
+            </a:avLst>
+          </a:prstGeom>
+          <a:solidFill>
+            <a:srgbClr val="63E6BE"/>
+          </a:solidFill>
+          <a:ln>
+            <a:noFill/>
+          </a:ln>
+        </p:spPr>
+        <p:style>
+          <a:lnRef idx="1">
+            <a:schemeClr val="accent1"/>
+          </a:lnRef>
+          <a:fillRef idx="3">
+            <a:schemeClr val="accent1"/>
+          </a:fillRef>
+          <a:effectRef idx="2">
+            <a:schemeClr val="accent1"/>
+          </a:effectRef>
+          <a:fontRef idx="minor">
+            <a:schemeClr val="lt1"/>
+          </a:fontRef>
+        </p:style>
+        <p:txBody>
+          <a:bodyPr rtlCol="0" anchor="ctr"/>
+          <a:lstStyle/>
+          <a:p>
+            <a:pPr algn="ctr"/>
+            <a:endParaRPr/>
+          </a:p>
+        </p:txBody>
+      </p:sp>
+      <p:sp>
+        <p:nvSpPr>
+          <p:cNvPr id="13" name="TextBox 12"/>
           <p:cNvSpPr txBox="1"/>
           <p:nvPr/>
         </p:nvSpPr>
         <p:spPr>
           <a:xfrm>
-            <a:off x="7516368" y="4187952"/>
-            <a:ext cx="3291840" cy="484632"/>
+            <a:off x="7415783" y="2994660"/>
+            <a:ext cx="265176" cy="210312"/>
           </a:xfrm>
           <a:prstGeom prst="rect">
             <a:avLst/>
@@ -6374,11 +6524,50 @@
           </a:bodyPr>
           <a:lstStyle/>
           <a:p>
-            <a:pPr algn="ctr">
+            <a:pPr>
               <a:spcAft>
                 <a:spcPts val="300"/>
               </a:spcAft>
-              <a:defRPr sz="2800" b="1">
+              <a:defRPr sz="1000" b="1">
+                <a:solidFill>
+                  <a:srgbClr val="080F1B"/>
+                </a:solidFill>
+                <a:latin typeface="Aptos"/>
+              </a:defRPr>
+            </a:pPr>
+            <a:r>
+              <a:t>02</a:t>
+            </a:r>
+          </a:p>
+        </p:txBody>
+      </p:sp>
+      <p:sp>
+        <p:nvSpPr>
+          <p:cNvPr id="14" name="reveal_04"/>
+          <p:cNvSpPr txBox="1"/>
+          <p:nvPr/>
+        </p:nvSpPr>
+        <p:spPr>
+          <a:xfrm>
+            <a:off x="7918704" y="2953512"/>
+            <a:ext cx="3749039" cy="274320"/>
+          </a:xfrm>
+          <a:prstGeom prst="rect">
+            <a:avLst/>
+          </a:prstGeom>
+          <a:noFill/>
+        </p:spPr>
+        <p:txBody>
+          <a:bodyPr wrap="square" lIns="0" tIns="0" rIns="0" bIns="0">
+            <a:spAutoFit/>
+          </a:bodyPr>
+          <a:lstStyle/>
+          <a:p>
+            <a:pPr>
+              <a:spcAft>
+                <a:spcPts val="300"/>
+              </a:spcAft>
+              <a:defRPr sz="1400" b="1">
                 <a:solidFill>
                   <a:srgbClr val="EDF5FF"/>
                 </a:solidFill>
@@ -6386,21 +6575,21 @@
               </a:defRPr>
             </a:pPr>
             <a:r>
-              <a:t>Developer 2</a:t>
-            </a:r>
-          </a:p>
-        </p:txBody>
-      </p:sp>
-      <p:sp>
-        <p:nvSpPr>
-          <p:cNvPr id="11" name="reveal_05"/>
+              <a:t>ACCESS</a:t>
+            </a:r>
+          </a:p>
+        </p:txBody>
+      </p:sp>
+      <p:sp>
+        <p:nvSpPr>
+          <p:cNvPr id="15" name="reveal_04"/>
           <p:cNvSpPr txBox="1"/>
           <p:nvPr/>
         </p:nvSpPr>
         <p:spPr>
           <a:xfrm>
-            <a:off x="7516368" y="4828032"/>
-            <a:ext cx="3291840" cy="329184"/>
+            <a:off x="7918704" y="3346704"/>
+            <a:ext cx="3657600" cy="457200"/>
           </a:xfrm>
           <a:prstGeom prst="rect">
             <a:avLst/>
@@ -6413,74 +6602,11 @@
           </a:bodyPr>
           <a:lstStyle/>
           <a:p>
-            <a:pPr algn="ctr">
+            <a:pPr>
               <a:spcAft>
                 <a:spcPts val="300"/>
               </a:spcAft>
-              <a:defRPr sz="1700" b="0">
-                <a:solidFill>
-                  <a:srgbClr val="63E6BE"/>
-                </a:solidFill>
-                <a:latin typeface="Aptos"/>
-              </a:defRPr>
-            </a:pPr>
-            <a:r>
-              <a:t>Frontend &amp; UX</a:t>
-            </a:r>
-          </a:p>
-        </p:txBody>
-      </p:sp>
-      <p:pic>
-        <p:nvPicPr>
-          <p:cNvPr id="12" name="reveal_05" descr="team.gif"/>
-          <p:cNvPicPr>
-            <a:picLocks noChangeAspect="1"/>
-          </p:cNvPicPr>
-          <p:nvPr/>
-        </p:nvPicPr>
-        <p:blipFill>
-          <a:blip r:embed="rId5"/>
-          <a:stretch>
-            <a:fillRect/>
-          </a:stretch>
-        </p:blipFill>
-        <p:spPr>
-          <a:xfrm>
-            <a:off x="4553712" y="2761488"/>
-            <a:ext cx="3044952" cy="1801368"/>
-          </a:xfrm>
-          <a:prstGeom prst="rect">
-            <a:avLst/>
-          </a:prstGeom>
-        </p:spPr>
-      </p:pic>
-      <p:sp>
-        <p:nvSpPr>
-          <p:cNvPr id="13" name="TextBox 12"/>
-          <p:cNvSpPr txBox="1"/>
-          <p:nvPr/>
-        </p:nvSpPr>
-        <p:spPr>
-          <a:xfrm>
-            <a:off x="658368" y="5980176"/>
-            <a:ext cx="10881360" cy="274320"/>
-          </a:xfrm>
-          <a:prstGeom prst="rect">
-            <a:avLst/>
-          </a:prstGeom>
-          <a:noFill/>
-        </p:spPr>
-        <p:txBody>
-          <a:bodyPr wrap="square" lIns="0" tIns="0" rIns="0" bIns="0">
-            <a:spAutoFit/>
-          </a:bodyPr>
-          <a:lstStyle/>
-          <a:p>
-            <a:pPr algn="ctr">
-              <a:spcAft>
-                <a:spcPts val="300"/>
-              </a:spcAft>
-              <a:defRPr sz="1200" b="0">
+              <a:defRPr sz="1300" b="0">
                 <a:solidFill>
                   <a:srgbClr val="A2B4CA"/>
                 </a:solidFill>
@@ -6488,7 +6614,418 @@
               </a:defRPr>
             </a:pPr>
             <a:r>
-              <a:t>Demo portraits, names and roles — replace with your team.</a:t>
+              <a:t>Role + ownership checks; parent permissions.</a:t>
+            </a:r>
+          </a:p>
+        </p:txBody>
+      </p:sp>
+      <p:sp>
+        <p:nvSpPr>
+          <p:cNvPr id="16" name="Rounded Rectangle 15"/>
+          <p:cNvSpPr/>
+          <p:nvPr/>
+        </p:nvSpPr>
+        <p:spPr>
+          <a:xfrm>
+            <a:off x="7342631" y="3886200"/>
+            <a:ext cx="411480" cy="292608"/>
+          </a:xfrm>
+          <a:prstGeom prst="roundRect">
+            <a:avLst>
+              <a:gd name="adj" fmla="val 10000"/>
+            </a:avLst>
+          </a:prstGeom>
+          <a:solidFill>
+            <a:srgbClr val="B4A3FF"/>
+          </a:solidFill>
+          <a:ln>
+            <a:noFill/>
+          </a:ln>
+        </p:spPr>
+        <p:style>
+          <a:lnRef idx="1">
+            <a:schemeClr val="accent1"/>
+          </a:lnRef>
+          <a:fillRef idx="3">
+            <a:schemeClr val="accent1"/>
+          </a:fillRef>
+          <a:effectRef idx="2">
+            <a:schemeClr val="accent1"/>
+          </a:effectRef>
+          <a:fontRef idx="minor">
+            <a:schemeClr val="lt1"/>
+          </a:fontRef>
+        </p:style>
+        <p:txBody>
+          <a:bodyPr rtlCol="0" anchor="ctr"/>
+          <a:lstStyle/>
+          <a:p>
+            <a:pPr algn="ctr"/>
+            <a:endParaRPr/>
+          </a:p>
+        </p:txBody>
+      </p:sp>
+      <p:sp>
+        <p:nvSpPr>
+          <p:cNvPr id="17" name="TextBox 16"/>
+          <p:cNvSpPr txBox="1"/>
+          <p:nvPr/>
+        </p:nvSpPr>
+        <p:spPr>
+          <a:xfrm>
+            <a:off x="7415783" y="3927348"/>
+            <a:ext cx="265176" cy="210312"/>
+          </a:xfrm>
+          <a:prstGeom prst="rect">
+            <a:avLst/>
+          </a:prstGeom>
+          <a:noFill/>
+        </p:spPr>
+        <p:txBody>
+          <a:bodyPr wrap="square" lIns="0" tIns="0" rIns="0" bIns="0">
+            <a:spAutoFit/>
+          </a:bodyPr>
+          <a:lstStyle/>
+          <a:p>
+            <a:pPr>
+              <a:spcAft>
+                <a:spcPts val="300"/>
+              </a:spcAft>
+              <a:defRPr sz="1000" b="1">
+                <a:solidFill>
+                  <a:srgbClr val="080F1B"/>
+                </a:solidFill>
+                <a:latin typeface="Aptos"/>
+              </a:defRPr>
+            </a:pPr>
+            <a:r>
+              <a:t>03</a:t>
+            </a:r>
+          </a:p>
+        </p:txBody>
+      </p:sp>
+      <p:sp>
+        <p:nvSpPr>
+          <p:cNvPr id="18" name="reveal_05"/>
+          <p:cNvSpPr txBox="1"/>
+          <p:nvPr/>
+        </p:nvSpPr>
+        <p:spPr>
+          <a:xfrm>
+            <a:off x="7918704" y="3886200"/>
+            <a:ext cx="3749039" cy="274320"/>
+          </a:xfrm>
+          <a:prstGeom prst="rect">
+            <a:avLst/>
+          </a:prstGeom>
+          <a:noFill/>
+        </p:spPr>
+        <p:txBody>
+          <a:bodyPr wrap="square" lIns="0" tIns="0" rIns="0" bIns="0">
+            <a:spAutoFit/>
+          </a:bodyPr>
+          <a:lstStyle/>
+          <a:p>
+            <a:pPr>
+              <a:spcAft>
+                <a:spcPts val="300"/>
+              </a:spcAft>
+              <a:defRPr sz="1400" b="1">
+                <a:solidFill>
+                  <a:srgbClr val="EDF5FF"/>
+                </a:solidFill>
+                <a:latin typeface="Aptos"/>
+              </a:defRPr>
+            </a:pPr>
+            <a:r>
+              <a:t>AI &amp; SECRETS</a:t>
+            </a:r>
+          </a:p>
+        </p:txBody>
+      </p:sp>
+      <p:sp>
+        <p:nvSpPr>
+          <p:cNvPr id="19" name="reveal_05"/>
+          <p:cNvSpPr txBox="1"/>
+          <p:nvPr/>
+        </p:nvSpPr>
+        <p:spPr>
+          <a:xfrm>
+            <a:off x="7918704" y="4279392"/>
+            <a:ext cx="3657600" cy="457200"/>
+          </a:xfrm>
+          <a:prstGeom prst="rect">
+            <a:avLst/>
+          </a:prstGeom>
+          <a:noFill/>
+        </p:spPr>
+        <p:txBody>
+          <a:bodyPr wrap="square" lIns="0" tIns="0" rIns="0" bIns="0">
+            <a:spAutoFit/>
+          </a:bodyPr>
+          <a:lstStyle/>
+          <a:p>
+            <a:pPr>
+              <a:spcAft>
+                <a:spcPts val="300"/>
+              </a:spcAft>
+              <a:defRPr sz="1300" b="0">
+                <a:solidFill>
+                  <a:srgbClr val="A2B4CA"/>
+                </a:solidFill>
+                <a:latin typeface="Aptos"/>
+              </a:defRPr>
+            </a:pPr>
+            <a:r>
+              <a:t>AES-256-GCM model keys; validated tools.</a:t>
+            </a:r>
+          </a:p>
+        </p:txBody>
+      </p:sp>
+      <p:sp>
+        <p:nvSpPr>
+          <p:cNvPr id="20" name="Rounded Rectangle 19"/>
+          <p:cNvSpPr/>
+          <p:nvPr/>
+        </p:nvSpPr>
+        <p:spPr>
+          <a:xfrm>
+            <a:off x="7342631" y="4818888"/>
+            <a:ext cx="411480" cy="292608"/>
+          </a:xfrm>
+          <a:prstGeom prst="roundRect">
+            <a:avLst>
+              <a:gd name="adj" fmla="val 10000"/>
+            </a:avLst>
+          </a:prstGeom>
+          <a:solidFill>
+            <a:srgbClr val="F3C969"/>
+          </a:solidFill>
+          <a:ln>
+            <a:noFill/>
+          </a:ln>
+        </p:spPr>
+        <p:style>
+          <a:lnRef idx="1">
+            <a:schemeClr val="accent1"/>
+          </a:lnRef>
+          <a:fillRef idx="3">
+            <a:schemeClr val="accent1"/>
+          </a:fillRef>
+          <a:effectRef idx="2">
+            <a:schemeClr val="accent1"/>
+          </a:effectRef>
+          <a:fontRef idx="minor">
+            <a:schemeClr val="lt1"/>
+          </a:fontRef>
+        </p:style>
+        <p:txBody>
+          <a:bodyPr rtlCol="0" anchor="ctr"/>
+          <a:lstStyle/>
+          <a:p>
+            <a:pPr algn="ctr"/>
+            <a:endParaRPr/>
+          </a:p>
+        </p:txBody>
+      </p:sp>
+      <p:sp>
+        <p:nvSpPr>
+          <p:cNvPr id="21" name="TextBox 20"/>
+          <p:cNvSpPr txBox="1"/>
+          <p:nvPr/>
+        </p:nvSpPr>
+        <p:spPr>
+          <a:xfrm>
+            <a:off x="7415783" y="4860036"/>
+            <a:ext cx="265176" cy="210312"/>
+          </a:xfrm>
+          <a:prstGeom prst="rect">
+            <a:avLst/>
+          </a:prstGeom>
+          <a:noFill/>
+        </p:spPr>
+        <p:txBody>
+          <a:bodyPr wrap="square" lIns="0" tIns="0" rIns="0" bIns="0">
+            <a:spAutoFit/>
+          </a:bodyPr>
+          <a:lstStyle/>
+          <a:p>
+            <a:pPr>
+              <a:spcAft>
+                <a:spcPts val="300"/>
+              </a:spcAft>
+              <a:defRPr sz="1000" b="1">
+                <a:solidFill>
+                  <a:srgbClr val="080F1B"/>
+                </a:solidFill>
+                <a:latin typeface="Aptos"/>
+              </a:defRPr>
+            </a:pPr>
+            <a:r>
+              <a:t>04</a:t>
+            </a:r>
+          </a:p>
+        </p:txBody>
+      </p:sp>
+      <p:sp>
+        <p:nvSpPr>
+          <p:cNvPr id="22" name="reveal_06"/>
+          <p:cNvSpPr txBox="1"/>
+          <p:nvPr/>
+        </p:nvSpPr>
+        <p:spPr>
+          <a:xfrm>
+            <a:off x="7918704" y="4818888"/>
+            <a:ext cx="3749039" cy="274320"/>
+          </a:xfrm>
+          <a:prstGeom prst="rect">
+            <a:avLst/>
+          </a:prstGeom>
+          <a:noFill/>
+        </p:spPr>
+        <p:txBody>
+          <a:bodyPr wrap="square" lIns="0" tIns="0" rIns="0" bIns="0">
+            <a:spAutoFit/>
+          </a:bodyPr>
+          <a:lstStyle/>
+          <a:p>
+            <a:pPr>
+              <a:spcAft>
+                <a:spcPts val="300"/>
+              </a:spcAft>
+              <a:defRPr sz="1400" b="1">
+                <a:solidFill>
+                  <a:srgbClr val="EDF5FF"/>
+                </a:solidFill>
+                <a:latin typeface="Aptos"/>
+              </a:defRPr>
+            </a:pPr>
+            <a:r>
+              <a:t>MONEY INTEGRITY</a:t>
+            </a:r>
+          </a:p>
+        </p:txBody>
+      </p:sp>
+      <p:sp>
+        <p:nvSpPr>
+          <p:cNvPr id="23" name="reveal_06"/>
+          <p:cNvSpPr txBox="1"/>
+          <p:nvPr/>
+        </p:nvSpPr>
+        <p:spPr>
+          <a:xfrm>
+            <a:off x="7918704" y="5212079"/>
+            <a:ext cx="3657600" cy="457200"/>
+          </a:xfrm>
+          <a:prstGeom prst="rect">
+            <a:avLst/>
+          </a:prstGeom>
+          <a:noFill/>
+        </p:spPr>
+        <p:txBody>
+          <a:bodyPr wrap="square" lIns="0" tIns="0" rIns="0" bIns="0">
+            <a:spAutoFit/>
+          </a:bodyPr>
+          <a:lstStyle/>
+          <a:p>
+            <a:pPr>
+              <a:spcAft>
+                <a:spcPts val="300"/>
+              </a:spcAft>
+              <a:defRPr sz="1300" b="0">
+                <a:solidFill>
+                  <a:srgbClr val="A2B4CA"/>
+                </a:solidFill>
+                <a:latin typeface="Aptos"/>
+              </a:defRPr>
+            </a:pPr>
+            <a:r>
+              <a:t>Confirmation, locks, tokens, balanced ledger.</a:t>
+            </a:r>
+          </a:p>
+        </p:txBody>
+      </p:sp>
+      <p:sp>
+        <p:nvSpPr>
+          <p:cNvPr id="24" name="Rounded Rectangle 23"/>
+          <p:cNvSpPr/>
+          <p:nvPr/>
+        </p:nvSpPr>
+        <p:spPr>
+          <a:xfrm>
+            <a:off x="502920" y="6007608"/>
+            <a:ext cx="11183112" cy="402336"/>
+          </a:xfrm>
+          <a:prstGeom prst="roundRect">
+            <a:avLst>
+              <a:gd name="adj" fmla="val 10000"/>
+            </a:avLst>
+          </a:prstGeom>
+          <a:solidFill>
+            <a:srgbClr val="172A40"/>
+          </a:solidFill>
+          <a:ln>
+            <a:noFill/>
+          </a:ln>
+        </p:spPr>
+        <p:style>
+          <a:lnRef idx="1">
+            <a:schemeClr val="accent1"/>
+          </a:lnRef>
+          <a:fillRef idx="3">
+            <a:schemeClr val="accent1"/>
+          </a:fillRef>
+          <a:effectRef idx="2">
+            <a:schemeClr val="accent1"/>
+          </a:effectRef>
+          <a:fontRef idx="minor">
+            <a:schemeClr val="lt1"/>
+          </a:fontRef>
+        </p:style>
+        <p:txBody>
+          <a:bodyPr rtlCol="0" anchor="ctr"/>
+          <a:lstStyle/>
+          <a:p>
+            <a:pPr algn="ctr"/>
+            <a:endParaRPr/>
+          </a:p>
+        </p:txBody>
+      </p:sp>
+      <p:sp>
+        <p:nvSpPr>
+          <p:cNvPr id="25" name="TextBox 24"/>
+          <p:cNvSpPr txBox="1"/>
+          <p:nvPr/>
+        </p:nvSpPr>
+        <p:spPr>
+          <a:xfrm>
+            <a:off x="704088" y="6117336"/>
+            <a:ext cx="10789920" cy="210312"/>
+          </a:xfrm>
+          <a:prstGeom prst="rect">
+            <a:avLst/>
+          </a:prstGeom>
+          <a:noFill/>
+        </p:spPr>
+        <p:txBody>
+          <a:bodyPr wrap="square" lIns="0" tIns="0" rIns="0" bIns="0">
+            <a:spAutoFit/>
+          </a:bodyPr>
+          <a:lstStyle/>
+          <a:p>
+            <a:pPr>
+              <a:spcAft>
+                <a:spcPts val="300"/>
+              </a:spcAft>
+              <a:defRPr sz="1100" b="0">
+                <a:solidFill>
+                  <a:srgbClr val="A2B4CA"/>
+                </a:solidFill>
+                <a:latin typeface="Aptos"/>
+              </a:defRPr>
+            </a:pPr>
+            <a:r>
+              <a:t>Data export  ·  Account closure  ·  No stored full PAN/CVV  ·  Selected AI context may reach the configured provider</a:t>
             </a:r>
           </a:p>
         </p:txBody>
@@ -6582,7 +7119,7 @@
                                           </p:stCondLst>
                                         </p:cTn>
                                         <p:tgtEl>
-                                          <p:spTgt spid="6"/>
+                                          <p:spTgt spid="7"/>
                                         </p:tgtEl>
                                         <p:attrNameLst>
                                           <p:attrName>style.visibility</p:attrName>
@@ -6596,7 +7133,7 @@
                                       <p:cBhvr>
                                         <p:cTn id="11" dur="600"/>
                                         <p:tgtEl>
-                                          <p:spTgt spid="6"/>
+                                          <p:spTgt spid="7"/>
                                         </p:tgtEl>
                                       </p:cBhvr>
                                     </p:animEffect>
@@ -6613,7 +7150,7 @@
                             </p:stCondLst>
                             <p:childTnLst>
                               <p:par>
-                                <p:cTn id="13" presetID="10" presetClass="entr" presetSubtype="0" fill="hold" nodeType="afterEffect">
+                                <p:cTn id="13" presetID="10" presetClass="entr" presetSubtype="0" fill="hold" grpId="0" nodeType="afterEffect">
                                   <p:stCondLst>
                                     <p:cond delay="0"/>
                                   </p:stCondLst>
@@ -6626,7 +7163,7 @@
                                           </p:stCondLst>
                                         </p:cTn>
                                         <p:tgtEl>
-                                          <p:spTgt spid="9"/>
+                                          <p:spTgt spid="11"/>
                                         </p:tgtEl>
                                         <p:attrNameLst>
                                           <p:attrName>style.visibility</p:attrName>
@@ -6640,7 +7177,42 @@
                                       <p:cBhvr>
                                         <p:cTn id="15" dur="600"/>
                                         <p:tgtEl>
-                                          <p:spTgt spid="9"/>
+                                          <p:spTgt spid="11"/>
+                                        </p:tgtEl>
+                                      </p:cBhvr>
+                                    </p:animEffect>
+                                  </p:childTnLst>
+                                </p:cTn>
+                              </p:par>
+                              <p:par>
+                                <p:cTn id="16" presetID="10" presetClass="entr" presetSubtype="0" fill="hold" grpId="0" nodeType="withEffect">
+                                  <p:stCondLst>
+                                    <p:cond delay="0"/>
+                                  </p:stCondLst>
+                                  <p:childTnLst>
+                                    <p:set>
+                                      <p:cBhvr>
+                                        <p:cTn id="17" dur="1" fill="hold">
+                                          <p:stCondLst>
+                                            <p:cond delay="0"/>
+                                          </p:stCondLst>
+                                        </p:cTn>
+                                        <p:tgtEl>
+                                          <p:spTgt spid="10"/>
+                                        </p:tgtEl>
+                                        <p:attrNameLst>
+                                          <p:attrName>style.visibility</p:attrName>
+                                        </p:attrNameLst>
+                                      </p:cBhvr>
+                                      <p:to>
+                                        <p:strVal val="visible"/>
+                                      </p:to>
+                                    </p:set>
+                                    <p:animEffect transition="in" filter="fade">
+                                      <p:cBhvr>
+                                        <p:cTn id="18" dur="600"/>
+                                        <p:tgtEl>
+                                          <p:spTgt spid="10"/>
                                         </p:tgtEl>
                                       </p:cBhvr>
                                     </p:animEffect>
@@ -6651,26 +7223,26 @@
                           </p:cTn>
                         </p:par>
                         <p:par>
-                          <p:cTn id="16" fill="hold">
+                          <p:cTn id="19" fill="hold">
                             <p:stCondLst>
                               <p:cond delay="1800"/>
                             </p:stCondLst>
                             <p:childTnLst>
                               <p:par>
-                                <p:cTn id="17" presetID="10" presetClass="entr" presetSubtype="0" fill="hold" grpId="0" nodeType="afterEffect">
+                                <p:cTn id="20" presetID="10" presetClass="entr" presetSubtype="0" fill="hold" grpId="0" nodeType="afterEffect">
                                   <p:stCondLst>
                                     <p:cond delay="0"/>
                                   </p:stCondLst>
                                   <p:childTnLst>
                                     <p:set>
                                       <p:cBhvr>
-                                        <p:cTn id="18" dur="1" fill="hold">
+                                        <p:cTn id="21" dur="1" fill="hold">
                                           <p:stCondLst>
                                             <p:cond delay="0"/>
                                           </p:stCondLst>
                                         </p:cTn>
                                         <p:tgtEl>
-                                          <p:spTgt spid="8"/>
+                                          <p:spTgt spid="15"/>
                                         </p:tgtEl>
                                         <p:attrNameLst>
                                           <p:attrName>style.visibility</p:attrName>
@@ -6682,9 +7254,9 @@
                                     </p:set>
                                     <p:animEffect transition="in" filter="fade">
                                       <p:cBhvr>
-                                        <p:cTn id="19" dur="600"/>
-                                        <p:tgtEl>
-                                          <p:spTgt spid="8"/>
+                                        <p:cTn id="22" dur="600"/>
+                                        <p:tgtEl>
+                                          <p:spTgt spid="15"/>
                                         </p:tgtEl>
                                       </p:cBhvr>
                                     </p:animEffect>
@@ -6692,20 +7264,20 @@
                                 </p:cTn>
                               </p:par>
                               <p:par>
-                                <p:cTn id="20" presetID="10" presetClass="entr" presetSubtype="0" fill="hold" grpId="0" nodeType="withEffect">
+                                <p:cTn id="23" presetID="10" presetClass="entr" presetSubtype="0" fill="hold" grpId="0" nodeType="withEffect">
                                   <p:stCondLst>
                                     <p:cond delay="0"/>
                                   </p:stCondLst>
                                   <p:childTnLst>
                                     <p:set>
                                       <p:cBhvr>
-                                        <p:cTn id="21" dur="1" fill="hold">
+                                        <p:cTn id="24" dur="1" fill="hold">
                                           <p:stCondLst>
                                             <p:cond delay="0"/>
                                           </p:stCondLst>
                                         </p:cTn>
                                         <p:tgtEl>
-                                          <p:spTgt spid="7"/>
+                                          <p:spTgt spid="14"/>
                                         </p:tgtEl>
                                         <p:attrNameLst>
                                           <p:attrName>style.visibility</p:attrName>
@@ -6717,9 +7289,9 @@
                                     </p:set>
                                     <p:animEffect transition="in" filter="fade">
                                       <p:cBhvr>
-                                        <p:cTn id="22" dur="600"/>
-                                        <p:tgtEl>
-                                          <p:spTgt spid="7"/>
+                                        <p:cTn id="25" dur="600"/>
+                                        <p:tgtEl>
+                                          <p:spTgt spid="14"/>
                                         </p:tgtEl>
                                       </p:cBhvr>
                                     </p:animEffect>
@@ -6730,26 +7302,26 @@
                           </p:cTn>
                         </p:par>
                         <p:par>
-                          <p:cTn id="23" fill="hold">
+                          <p:cTn id="26" fill="hold">
                             <p:stCondLst>
                               <p:cond delay="2400"/>
                             </p:stCondLst>
                             <p:childTnLst>
                               <p:par>
-                                <p:cTn id="24" presetID="10" presetClass="entr" presetSubtype="0" fill="hold" nodeType="afterEffect">
+                                <p:cTn id="27" presetID="10" presetClass="entr" presetSubtype="0" fill="hold" grpId="0" nodeType="afterEffect">
                                   <p:stCondLst>
                                     <p:cond delay="0"/>
                                   </p:stCondLst>
                                   <p:childTnLst>
                                     <p:set>
                                       <p:cBhvr>
-                                        <p:cTn id="25" dur="1" fill="hold">
+                                        <p:cTn id="28" dur="1" fill="hold">
                                           <p:stCondLst>
                                             <p:cond delay="0"/>
                                           </p:stCondLst>
                                         </p:cTn>
                                         <p:tgtEl>
-                                          <p:spTgt spid="12"/>
+                                          <p:spTgt spid="19"/>
                                         </p:tgtEl>
                                         <p:attrNameLst>
                                           <p:attrName>style.visibility</p:attrName>
@@ -6761,44 +7333,9 @@
                                     </p:set>
                                     <p:animEffect transition="in" filter="fade">
                                       <p:cBhvr>
-                                        <p:cTn id="26" dur="600"/>
-                                        <p:tgtEl>
-                                          <p:spTgt spid="12"/>
-                                        </p:tgtEl>
-                                      </p:cBhvr>
-                                    </p:animEffect>
-                                  </p:childTnLst>
-                                </p:cTn>
-                              </p:par>
-                              <p:par>
-                                <p:cTn id="27" presetID="10" presetClass="entr" presetSubtype="0" fill="hold" grpId="0" nodeType="withEffect">
-                                  <p:stCondLst>
-                                    <p:cond delay="0"/>
-                                  </p:stCondLst>
-                                  <p:childTnLst>
-                                    <p:set>
-                                      <p:cBhvr>
-                                        <p:cTn id="28" dur="1" fill="hold">
-                                          <p:stCondLst>
-                                            <p:cond delay="0"/>
-                                          </p:stCondLst>
-                                        </p:cTn>
-                                        <p:tgtEl>
-                                          <p:spTgt spid="11"/>
-                                        </p:tgtEl>
-                                        <p:attrNameLst>
-                                          <p:attrName>style.visibility</p:attrName>
-                                        </p:attrNameLst>
-                                      </p:cBhvr>
-                                      <p:to>
-                                        <p:strVal val="visible"/>
-                                      </p:to>
-                                    </p:set>
-                                    <p:animEffect transition="in" filter="fade">
-                                      <p:cBhvr>
                                         <p:cTn id="29" dur="600"/>
                                         <p:tgtEl>
-                                          <p:spTgt spid="11"/>
+                                          <p:spTgt spid="19"/>
                                         </p:tgtEl>
                                       </p:cBhvr>
                                     </p:animEffect>
@@ -6819,7 +7356,7 @@
                                           </p:stCondLst>
                                         </p:cTn>
                                         <p:tgtEl>
-                                          <p:spTgt spid="10"/>
+                                          <p:spTgt spid="18"/>
                                         </p:tgtEl>
                                         <p:attrNameLst>
                                           <p:attrName>style.visibility</p:attrName>
@@ -6832,6 +7369,787 @@
                                     <p:animEffect transition="in" filter="fade">
                                       <p:cBhvr>
                                         <p:cTn id="32" dur="600"/>
+                                        <p:tgtEl>
+                                          <p:spTgt spid="18"/>
+                                        </p:tgtEl>
+                                      </p:cBhvr>
+                                    </p:animEffect>
+                                  </p:childTnLst>
+                                </p:cTn>
+                              </p:par>
+                            </p:childTnLst>
+                          </p:cTn>
+                        </p:par>
+                        <p:par>
+                          <p:cTn id="33" fill="hold">
+                            <p:stCondLst>
+                              <p:cond delay="3000"/>
+                            </p:stCondLst>
+                            <p:childTnLst>
+                              <p:par>
+                                <p:cTn id="34" presetID="10" presetClass="entr" presetSubtype="0" fill="hold" grpId="0" nodeType="afterEffect">
+                                  <p:stCondLst>
+                                    <p:cond delay="0"/>
+                                  </p:stCondLst>
+                                  <p:childTnLst>
+                                    <p:set>
+                                      <p:cBhvr>
+                                        <p:cTn id="35" dur="1" fill="hold">
+                                          <p:stCondLst>
+                                            <p:cond delay="0"/>
+                                          </p:stCondLst>
+                                        </p:cTn>
+                                        <p:tgtEl>
+                                          <p:spTgt spid="23"/>
+                                        </p:tgtEl>
+                                        <p:attrNameLst>
+                                          <p:attrName>style.visibility</p:attrName>
+                                        </p:attrNameLst>
+                                      </p:cBhvr>
+                                      <p:to>
+                                        <p:strVal val="visible"/>
+                                      </p:to>
+                                    </p:set>
+                                    <p:animEffect transition="in" filter="fade">
+                                      <p:cBhvr>
+                                        <p:cTn id="36" dur="600"/>
+                                        <p:tgtEl>
+                                          <p:spTgt spid="23"/>
+                                        </p:tgtEl>
+                                      </p:cBhvr>
+                                    </p:animEffect>
+                                  </p:childTnLst>
+                                </p:cTn>
+                              </p:par>
+                              <p:par>
+                                <p:cTn id="37" presetID="10" presetClass="entr" presetSubtype="0" fill="hold" grpId="0" nodeType="withEffect">
+                                  <p:stCondLst>
+                                    <p:cond delay="0"/>
+                                  </p:stCondLst>
+                                  <p:childTnLst>
+                                    <p:set>
+                                      <p:cBhvr>
+                                        <p:cTn id="38" dur="1" fill="hold">
+                                          <p:stCondLst>
+                                            <p:cond delay="0"/>
+                                          </p:stCondLst>
+                                        </p:cTn>
+                                        <p:tgtEl>
+                                          <p:spTgt spid="22"/>
+                                        </p:tgtEl>
+                                        <p:attrNameLst>
+                                          <p:attrName>style.visibility</p:attrName>
+                                        </p:attrNameLst>
+                                      </p:cBhvr>
+                                      <p:to>
+                                        <p:strVal val="visible"/>
+                                      </p:to>
+                                    </p:set>
+                                    <p:animEffect transition="in" filter="fade">
+                                      <p:cBhvr>
+                                        <p:cTn id="39" dur="600"/>
+                                        <p:tgtEl>
+                                          <p:spTgt spid="22"/>
+                                        </p:tgtEl>
+                                      </p:cBhvr>
+                                    </p:animEffect>
+                                  </p:childTnLst>
+                                </p:cTn>
+                              </p:par>
+                            </p:childTnLst>
+                          </p:cTn>
+                        </p:par>
+                      </p:childTnLst>
+                    </p:cTn>
+                  </p:par>
+                </p:childTnLst>
+              </p:cTn>
+              <p:prevCondLst>
+                <p:cond evt="onPrev" delay="0">
+                  <p:tgtEl>
+                    <p:sldTgt/>
+                  </p:tgtEl>
+                </p:cond>
+              </p:prevCondLst>
+              <p:nextCondLst>
+                <p:cond evt="onNext" delay="0">
+                  <p:tgtEl>
+                    <p:sldTgt/>
+                  </p:tgtEl>
+                </p:cond>
+              </p:nextCondLst>
+            </p:seq>
+          </p:childTnLst>
+        </p:cTn>
+      </p:par>
+    </p:tnLst>
+    <p:bldLst>
+      <p:bldP spid="3" grpId="0"/>
+      <p:bldP spid="10" grpId="0"/>
+      <p:bldP spid="11" grpId="0"/>
+      <p:bldP spid="14" grpId="0"/>
+      <p:bldP spid="15" grpId="0"/>
+      <p:bldP spid="18" grpId="0"/>
+      <p:bldP spid="19" grpId="0"/>
+      <p:bldP spid="22" grpId="0"/>
+      <p:bldP spid="23" grpId="0"/>
+    </p:bldLst>
+  </p:timing>
+</p:sld>
+</file>
+
+<file path=ppt/slides/slide2.xml><?xml version="1.0" encoding="utf-8"?>
+<p:sld xmlns:a="http://schemas.openxmlformats.org/drawingml/2006/main" xmlns:r="http://schemas.openxmlformats.org/officeDocument/2006/relationships" xmlns:p="http://schemas.openxmlformats.org/presentationml/2006/main">
+  <p:cSld>
+    <p:bg>
+      <p:bgPr>
+        <a:solidFill>
+          <a:srgbClr val="080F1B"/>
+        </a:solidFill>
+        <a:effectLst/>
+      </p:bgPr>
+    </p:bg>
+    <p:spTree>
+      <p:nvGrpSpPr>
+        <p:cNvPr id="1" name=""/>
+        <p:cNvGrpSpPr/>
+        <p:nvPr/>
+      </p:nvGrpSpPr>
+      <p:grpSpPr>
+        <a:xfrm>
+          <a:off x="0" y="0"/>
+          <a:ext cx="0" cy="0"/>
+          <a:chOff x="0" y="0"/>
+          <a:chExt cx="0" cy="0"/>
+        </a:xfrm>
+      </p:grpSpPr>
+      <p:sp>
+        <p:nvSpPr>
+          <p:cNvPr id="2" name="TextBox 1"/>
+          <p:cNvSpPr txBox="1"/>
+          <p:nvPr/>
+        </p:nvSpPr>
+        <p:spPr>
+          <a:xfrm>
+            <a:off x="502920" y="203200"/>
+            <a:ext cx="10058400" cy="228600"/>
+          </a:xfrm>
+          <a:prstGeom prst="rect">
+            <a:avLst/>
+          </a:prstGeom>
+          <a:noFill/>
+        </p:spPr>
+        <p:txBody>
+          <a:bodyPr wrap="square" lIns="0" tIns="0" rIns="0" bIns="0">
+            <a:spAutoFit/>
+          </a:bodyPr>
+          <a:lstStyle/>
+          <a:p>
+            <a:pPr>
+              <a:spcAft>
+                <a:spcPts val="300"/>
+              </a:spcAft>
+              <a:defRPr sz="1000" b="1">
+                <a:solidFill>
+                  <a:srgbClr val="63E6BE"/>
+                </a:solidFill>
+                <a:latin typeface="Aptos"/>
+              </a:defRPr>
+            </a:pPr>
+            <a:r>
+              <a:rPr dirty="0"/>
+              <a:t>DEVELOPER INTRODUCTION</a:t>
+            </a:r>
+          </a:p>
+        </p:txBody>
+      </p:sp>
+      <p:sp>
+        <p:nvSpPr>
+          <p:cNvPr id="3" name="reveal_01"/>
+          <p:cNvSpPr txBox="1"/>
+          <p:nvPr/>
+        </p:nvSpPr>
+        <p:spPr>
+          <a:xfrm>
+            <a:off x="502920" y="768096"/>
+            <a:ext cx="11155680" cy="612648"/>
+          </a:xfrm>
+          <a:prstGeom prst="rect">
+            <a:avLst/>
+          </a:prstGeom>
+          <a:noFill/>
+        </p:spPr>
+        <p:txBody>
+          <a:bodyPr wrap="square" lIns="0" tIns="0" rIns="0" bIns="0">
+            <a:spAutoFit/>
+          </a:bodyPr>
+          <a:lstStyle/>
+          <a:p>
+            <a:pPr>
+              <a:spcAft>
+                <a:spcPts val="300"/>
+              </a:spcAft>
+              <a:defRPr sz="3100" b="1">
+                <a:solidFill>
+                  <a:srgbClr val="EDF5FF"/>
+                </a:solidFill>
+                <a:latin typeface="Aptos"/>
+              </a:defRPr>
+            </a:pPr>
+            <a:r>
+              <a:t>The team behind FinBridge AI</a:t>
+            </a:r>
+          </a:p>
+        </p:txBody>
+      </p:sp>
+      <p:sp>
+        <p:nvSpPr>
+          <p:cNvPr id="4" name="TextBox 3"/>
+          <p:cNvSpPr txBox="1"/>
+          <p:nvPr/>
+        </p:nvSpPr>
+        <p:spPr>
+          <a:xfrm>
+            <a:off x="502920" y="6510528"/>
+            <a:ext cx="3657600" cy="182880"/>
+          </a:xfrm>
+          <a:prstGeom prst="rect">
+            <a:avLst/>
+          </a:prstGeom>
+          <a:noFill/>
+        </p:spPr>
+        <p:txBody>
+          <a:bodyPr wrap="square" lIns="0" tIns="0" rIns="0" bIns="0">
+            <a:spAutoFit/>
+          </a:bodyPr>
+          <a:lstStyle/>
+          <a:p>
+            <a:pPr>
+              <a:spcAft>
+                <a:spcPts val="300"/>
+              </a:spcAft>
+              <a:defRPr sz="900" b="0">
+                <a:solidFill>
+                  <a:srgbClr val="A2B4CA"/>
+                </a:solidFill>
+                <a:latin typeface="Aptos"/>
+              </a:defRPr>
+            </a:pPr>
+            <a:r>
+              <a:t>FINBRIDGE AI</a:t>
+            </a:r>
+          </a:p>
+        </p:txBody>
+      </p:sp>
+      <p:sp>
+        <p:nvSpPr>
+          <p:cNvPr id="5" name="TextBox 4"/>
+          <p:cNvSpPr txBox="1"/>
+          <p:nvPr/>
+        </p:nvSpPr>
+        <p:spPr>
+          <a:xfrm>
+            <a:off x="10607040" y="6473952"/>
+            <a:ext cx="1078992" cy="228600"/>
+          </a:xfrm>
+          <a:prstGeom prst="rect">
+            <a:avLst/>
+          </a:prstGeom>
+          <a:noFill/>
+        </p:spPr>
+        <p:txBody>
+          <a:bodyPr wrap="square" lIns="0" tIns="0" rIns="0" bIns="0">
+            <a:spAutoFit/>
+          </a:bodyPr>
+          <a:lstStyle/>
+          <a:p>
+            <a:pPr algn="r">
+              <a:spcAft>
+                <a:spcPts val="300"/>
+              </a:spcAft>
+              <a:defRPr sz="1000" b="0">
+                <a:solidFill>
+                  <a:srgbClr val="A2B4CA"/>
+                </a:solidFill>
+                <a:latin typeface="Aptos"/>
+              </a:defRPr>
+            </a:pPr>
+            <a:r>
+              <a:t>10 / 10</a:t>
+            </a:r>
+          </a:p>
+        </p:txBody>
+      </p:sp>
+      <p:sp>
+        <p:nvSpPr>
+          <p:cNvPr id="7" name="reveal_04"/>
+          <p:cNvSpPr txBox="1"/>
+          <p:nvPr/>
+        </p:nvSpPr>
+        <p:spPr>
+          <a:xfrm>
+            <a:off x="932688" y="4187952"/>
+            <a:ext cx="3291840" cy="484632"/>
+          </a:xfrm>
+          <a:prstGeom prst="rect">
+            <a:avLst/>
+          </a:prstGeom>
+          <a:noFill/>
+        </p:spPr>
+        <p:txBody>
+          <a:bodyPr wrap="square" lIns="0" tIns="0" rIns="0" bIns="0">
+            <a:spAutoFit/>
+          </a:bodyPr>
+          <a:lstStyle/>
+          <a:p>
+            <a:pPr algn="ctr">
+              <a:spcAft>
+                <a:spcPts val="300"/>
+              </a:spcAft>
+              <a:defRPr sz="2800" b="1">
+                <a:solidFill>
+                  <a:srgbClr val="EDF5FF"/>
+                </a:solidFill>
+                <a:latin typeface="Aptos"/>
+              </a:defRPr>
+            </a:pPr>
+            <a:r>
+              <a:t>Developer 1</a:t>
+            </a:r>
+          </a:p>
+        </p:txBody>
+      </p:sp>
+      <p:sp>
+        <p:nvSpPr>
+          <p:cNvPr id="8" name="reveal_04"/>
+          <p:cNvSpPr txBox="1"/>
+          <p:nvPr/>
+        </p:nvSpPr>
+        <p:spPr>
+          <a:xfrm>
+            <a:off x="932688" y="4828032"/>
+            <a:ext cx="3291840" cy="329184"/>
+          </a:xfrm>
+          <a:prstGeom prst="rect">
+            <a:avLst/>
+          </a:prstGeom>
+          <a:noFill/>
+        </p:spPr>
+        <p:txBody>
+          <a:bodyPr wrap="square" lIns="0" tIns="0" rIns="0" bIns="0">
+            <a:spAutoFit/>
+          </a:bodyPr>
+          <a:lstStyle/>
+          <a:p>
+            <a:pPr algn="ctr">
+              <a:spcAft>
+                <a:spcPts val="300"/>
+              </a:spcAft>
+              <a:defRPr sz="1700" b="0">
+                <a:solidFill>
+                  <a:srgbClr val="63E6BE"/>
+                </a:solidFill>
+                <a:latin typeface="Aptos"/>
+              </a:defRPr>
+            </a:pPr>
+            <a:r>
+              <a:t>AI &amp; Backend</a:t>
+            </a:r>
+          </a:p>
+        </p:txBody>
+      </p:sp>
+      <p:sp>
+        <p:nvSpPr>
+          <p:cNvPr id="10" name="reveal_05"/>
+          <p:cNvSpPr txBox="1"/>
+          <p:nvPr/>
+        </p:nvSpPr>
+        <p:spPr>
+          <a:xfrm>
+            <a:off x="7516368" y="4187952"/>
+            <a:ext cx="3291840" cy="484632"/>
+          </a:xfrm>
+          <a:prstGeom prst="rect">
+            <a:avLst/>
+          </a:prstGeom>
+          <a:noFill/>
+        </p:spPr>
+        <p:txBody>
+          <a:bodyPr wrap="square" lIns="0" tIns="0" rIns="0" bIns="0">
+            <a:spAutoFit/>
+          </a:bodyPr>
+          <a:lstStyle/>
+          <a:p>
+            <a:pPr algn="ctr">
+              <a:spcAft>
+                <a:spcPts val="300"/>
+              </a:spcAft>
+              <a:defRPr sz="2800" b="1">
+                <a:solidFill>
+                  <a:srgbClr val="EDF5FF"/>
+                </a:solidFill>
+                <a:latin typeface="Aptos"/>
+              </a:defRPr>
+            </a:pPr>
+            <a:r>
+              <a:t>Developer 2</a:t>
+            </a:r>
+          </a:p>
+        </p:txBody>
+      </p:sp>
+      <p:sp>
+        <p:nvSpPr>
+          <p:cNvPr id="11" name="reveal_05"/>
+          <p:cNvSpPr txBox="1"/>
+          <p:nvPr/>
+        </p:nvSpPr>
+        <p:spPr>
+          <a:xfrm>
+            <a:off x="7516368" y="4828032"/>
+            <a:ext cx="3291840" cy="329184"/>
+          </a:xfrm>
+          <a:prstGeom prst="rect">
+            <a:avLst/>
+          </a:prstGeom>
+          <a:noFill/>
+        </p:spPr>
+        <p:txBody>
+          <a:bodyPr wrap="square" lIns="0" tIns="0" rIns="0" bIns="0">
+            <a:spAutoFit/>
+          </a:bodyPr>
+          <a:lstStyle/>
+          <a:p>
+            <a:pPr algn="ctr">
+              <a:spcAft>
+                <a:spcPts val="300"/>
+              </a:spcAft>
+              <a:defRPr sz="1700" b="0">
+                <a:solidFill>
+                  <a:srgbClr val="63E6BE"/>
+                </a:solidFill>
+                <a:latin typeface="Aptos"/>
+              </a:defRPr>
+            </a:pPr>
+            <a:r>
+              <a:t>Frontend &amp; UX</a:t>
+            </a:r>
+          </a:p>
+        </p:txBody>
+      </p:sp>
+      <p:pic>
+        <p:nvPicPr>
+          <p:cNvPr id="12" name="reveal_05" descr="team.gif"/>
+          <p:cNvPicPr>
+            <a:picLocks noChangeAspect="1"/>
+          </p:cNvPicPr>
+          <p:nvPr/>
+        </p:nvPicPr>
+        <p:blipFill>
+          <a:blip r:embed="rId3"/>
+          <a:stretch>
+            <a:fillRect/>
+          </a:stretch>
+        </p:blipFill>
+        <p:spPr>
+          <a:xfrm>
+            <a:off x="4553712" y="2761488"/>
+            <a:ext cx="3044952" cy="1801368"/>
+          </a:xfrm>
+          <a:prstGeom prst="rect">
+            <a:avLst/>
+          </a:prstGeom>
+        </p:spPr>
+      </p:pic>
+      <p:sp>
+        <p:nvSpPr>
+          <p:cNvPr id="13" name="TextBox 12"/>
+          <p:cNvSpPr txBox="1"/>
+          <p:nvPr/>
+        </p:nvSpPr>
+        <p:spPr>
+          <a:xfrm>
+            <a:off x="658368" y="5980176"/>
+            <a:ext cx="10881360" cy="274320"/>
+          </a:xfrm>
+          <a:prstGeom prst="rect">
+            <a:avLst/>
+          </a:prstGeom>
+          <a:noFill/>
+        </p:spPr>
+        <p:txBody>
+          <a:bodyPr wrap="square" lIns="0" tIns="0" rIns="0" bIns="0">
+            <a:spAutoFit/>
+          </a:bodyPr>
+          <a:lstStyle/>
+          <a:p>
+            <a:pPr algn="ctr">
+              <a:spcAft>
+                <a:spcPts val="300"/>
+              </a:spcAft>
+              <a:defRPr sz="1200" b="0">
+                <a:solidFill>
+                  <a:srgbClr val="A2B4CA"/>
+                </a:solidFill>
+                <a:latin typeface="Aptos"/>
+              </a:defRPr>
+            </a:pPr>
+            <a:r>
+              <a:t>Demo portraits, names and roles — replace with your team.</a:t>
+            </a:r>
+          </a:p>
+        </p:txBody>
+      </p:sp>
+    </p:spTree>
+  </p:cSld>
+  <p:clrMapOvr>
+    <a:masterClrMapping/>
+  </p:clrMapOvr>
+  <p:transition spd="med">
+    <p:fade/>
+  </p:transition>
+  <p:timing>
+    <p:tnLst>
+      <p:par>
+        <p:cTn id="1" dur="indefinite" restart="never" nodeType="tmRoot">
+          <p:childTnLst>
+            <p:seq concurrent="1" nextAc="seek">
+              <p:cTn id="2" dur="indefinite" nodeType="mainSeq">
+                <p:childTnLst>
+                  <p:par>
+                    <p:cTn id="3" fill="hold">
+                      <p:stCondLst>
+                        <p:cond delay="indefinite"/>
+                        <p:cond evt="onBegin" delay="0">
+                          <p:tn val="2"/>
+                        </p:cond>
+                      </p:stCondLst>
+                      <p:childTnLst>
+                        <p:par>
+                          <p:cTn id="4" fill="hold">
+                            <p:stCondLst>
+                              <p:cond delay="0"/>
+                            </p:stCondLst>
+                            <p:childTnLst>
+                              <p:par>
+                                <p:cTn id="5" presetID="10" presetClass="entr" presetSubtype="0" fill="hold" grpId="0" nodeType="afterEffect">
+                                  <p:stCondLst>
+                                    <p:cond delay="0"/>
+                                  </p:stCondLst>
+                                  <p:childTnLst>
+                                    <p:set>
+                                      <p:cBhvr>
+                                        <p:cTn id="6" dur="1" fill="hold">
+                                          <p:stCondLst>
+                                            <p:cond delay="0"/>
+                                          </p:stCondLst>
+                                        </p:cTn>
+                                        <p:tgtEl>
+                                          <p:spTgt spid="3"/>
+                                        </p:tgtEl>
+                                        <p:attrNameLst>
+                                          <p:attrName>style.visibility</p:attrName>
+                                        </p:attrNameLst>
+                                      </p:cBhvr>
+                                      <p:to>
+                                        <p:strVal val="visible"/>
+                                      </p:to>
+                                    </p:set>
+                                    <p:animEffect transition="in" filter="fade">
+                                      <p:cBhvr>
+                                        <p:cTn id="7" dur="600"/>
+                                        <p:tgtEl>
+                                          <p:spTgt spid="3"/>
+                                        </p:tgtEl>
+                                      </p:cBhvr>
+                                    </p:animEffect>
+                                  </p:childTnLst>
+                                </p:cTn>
+                              </p:par>
+                            </p:childTnLst>
+                          </p:cTn>
+                        </p:par>
+                        <p:par>
+                          <p:cTn id="8" fill="hold">
+                            <p:stCondLst>
+                              <p:cond delay="600"/>
+                            </p:stCondLst>
+                            <p:childTnLst>
+                              <p:par>
+                                <p:cTn id="9" presetID="10" presetClass="entr" presetSubtype="0" fill="hold" grpId="0" nodeType="afterEffect">
+                                  <p:stCondLst>
+                                    <p:cond delay="0"/>
+                                  </p:stCondLst>
+                                  <p:childTnLst>
+                                    <p:set>
+                                      <p:cBhvr>
+                                        <p:cTn id="10" dur="1" fill="hold">
+                                          <p:stCondLst>
+                                            <p:cond delay="0"/>
+                                          </p:stCondLst>
+                                        </p:cTn>
+                                        <p:tgtEl>
+                                          <p:spTgt spid="8"/>
+                                        </p:tgtEl>
+                                        <p:attrNameLst>
+                                          <p:attrName>style.visibility</p:attrName>
+                                        </p:attrNameLst>
+                                      </p:cBhvr>
+                                      <p:to>
+                                        <p:strVal val="visible"/>
+                                      </p:to>
+                                    </p:set>
+                                    <p:animEffect transition="in" filter="fade">
+                                      <p:cBhvr>
+                                        <p:cTn id="11" dur="600"/>
+                                        <p:tgtEl>
+                                          <p:spTgt spid="8"/>
+                                        </p:tgtEl>
+                                      </p:cBhvr>
+                                    </p:animEffect>
+                                  </p:childTnLst>
+                                </p:cTn>
+                              </p:par>
+                              <p:par>
+                                <p:cTn id="12" presetID="10" presetClass="entr" presetSubtype="0" fill="hold" grpId="0" nodeType="withEffect">
+                                  <p:stCondLst>
+                                    <p:cond delay="0"/>
+                                  </p:stCondLst>
+                                  <p:childTnLst>
+                                    <p:set>
+                                      <p:cBhvr>
+                                        <p:cTn id="13" dur="1" fill="hold">
+                                          <p:stCondLst>
+                                            <p:cond delay="0"/>
+                                          </p:stCondLst>
+                                        </p:cTn>
+                                        <p:tgtEl>
+                                          <p:spTgt spid="7"/>
+                                        </p:tgtEl>
+                                        <p:attrNameLst>
+                                          <p:attrName>style.visibility</p:attrName>
+                                        </p:attrNameLst>
+                                      </p:cBhvr>
+                                      <p:to>
+                                        <p:strVal val="visible"/>
+                                      </p:to>
+                                    </p:set>
+                                    <p:animEffect transition="in" filter="fade">
+                                      <p:cBhvr>
+                                        <p:cTn id="14" dur="600"/>
+                                        <p:tgtEl>
+                                          <p:spTgt spid="7"/>
+                                        </p:tgtEl>
+                                      </p:cBhvr>
+                                    </p:animEffect>
+                                  </p:childTnLst>
+                                </p:cTn>
+                              </p:par>
+                            </p:childTnLst>
+                          </p:cTn>
+                        </p:par>
+                        <p:par>
+                          <p:cTn id="15" fill="hold">
+                            <p:stCondLst>
+                              <p:cond delay="1200"/>
+                            </p:stCondLst>
+                            <p:childTnLst>
+                              <p:par>
+                                <p:cTn id="16" presetID="10" presetClass="entr" presetSubtype="0" fill="hold" nodeType="afterEffect">
+                                  <p:stCondLst>
+                                    <p:cond delay="0"/>
+                                  </p:stCondLst>
+                                  <p:childTnLst>
+                                    <p:set>
+                                      <p:cBhvr>
+                                        <p:cTn id="17" dur="1" fill="hold">
+                                          <p:stCondLst>
+                                            <p:cond delay="0"/>
+                                          </p:stCondLst>
+                                        </p:cTn>
+                                        <p:tgtEl>
+                                          <p:spTgt spid="12"/>
+                                        </p:tgtEl>
+                                        <p:attrNameLst>
+                                          <p:attrName>style.visibility</p:attrName>
+                                        </p:attrNameLst>
+                                      </p:cBhvr>
+                                      <p:to>
+                                        <p:strVal val="visible"/>
+                                      </p:to>
+                                    </p:set>
+                                    <p:animEffect transition="in" filter="fade">
+                                      <p:cBhvr>
+                                        <p:cTn id="18" dur="600"/>
+                                        <p:tgtEl>
+                                          <p:spTgt spid="12"/>
+                                        </p:tgtEl>
+                                      </p:cBhvr>
+                                    </p:animEffect>
+                                  </p:childTnLst>
+                                </p:cTn>
+                              </p:par>
+                              <p:par>
+                                <p:cTn id="19" presetID="10" presetClass="entr" presetSubtype="0" fill="hold" grpId="0" nodeType="withEffect">
+                                  <p:stCondLst>
+                                    <p:cond delay="0"/>
+                                  </p:stCondLst>
+                                  <p:childTnLst>
+                                    <p:set>
+                                      <p:cBhvr>
+                                        <p:cTn id="20" dur="1" fill="hold">
+                                          <p:stCondLst>
+                                            <p:cond delay="0"/>
+                                          </p:stCondLst>
+                                        </p:cTn>
+                                        <p:tgtEl>
+                                          <p:spTgt spid="11"/>
+                                        </p:tgtEl>
+                                        <p:attrNameLst>
+                                          <p:attrName>style.visibility</p:attrName>
+                                        </p:attrNameLst>
+                                      </p:cBhvr>
+                                      <p:to>
+                                        <p:strVal val="visible"/>
+                                      </p:to>
+                                    </p:set>
+                                    <p:animEffect transition="in" filter="fade">
+                                      <p:cBhvr>
+                                        <p:cTn id="21" dur="600"/>
+                                        <p:tgtEl>
+                                          <p:spTgt spid="11"/>
+                                        </p:tgtEl>
+                                      </p:cBhvr>
+                                    </p:animEffect>
+                                  </p:childTnLst>
+                                </p:cTn>
+                              </p:par>
+                              <p:par>
+                                <p:cTn id="22" presetID="10" presetClass="entr" presetSubtype="0" fill="hold" grpId="0" nodeType="withEffect">
+                                  <p:stCondLst>
+                                    <p:cond delay="0"/>
+                                  </p:stCondLst>
+                                  <p:childTnLst>
+                                    <p:set>
+                                      <p:cBhvr>
+                                        <p:cTn id="23" dur="1" fill="hold">
+                                          <p:stCondLst>
+                                            <p:cond delay="0"/>
+                                          </p:stCondLst>
+                                        </p:cTn>
+                                        <p:tgtEl>
+                                          <p:spTgt spid="10"/>
+                                        </p:tgtEl>
+                                        <p:attrNameLst>
+                                          <p:attrName>style.visibility</p:attrName>
+                                        </p:attrNameLst>
+                                      </p:cBhvr>
+                                      <p:to>
+                                        <p:strVal val="visible"/>
+                                      </p:to>
+                                    </p:set>
+                                    <p:animEffect transition="in" filter="fade">
+                                      <p:cBhvr>
+                                        <p:cTn id="24" dur="600"/>
                                         <p:tgtEl>
                                           <p:spTgt spid="10"/>
                                         </p:tgtEl>
@@ -6878,7 +8196,7 @@
 </p:sld>
 </file>
 
-<file path=ppt/slides/slide2.xml><?xml version="1.0" encoding="utf-8"?>
+<file path=ppt/slides/slide3.xml><?xml version="1.0" encoding="utf-8"?>
 <p:sld xmlns:a="http://schemas.openxmlformats.org/drawingml/2006/main" xmlns:r="http://schemas.openxmlformats.org/officeDocument/2006/relationships" xmlns:p="http://schemas.openxmlformats.org/presentationml/2006/main">
   <p:cSld>
     <p:bg>
@@ -6905,45 +8223,6 @@
       </p:grpSpPr>
       <p:sp>
         <p:nvSpPr>
-          <p:cNvPr id="2" name="TextBox 1"/>
-          <p:cNvSpPr txBox="1"/>
-          <p:nvPr/>
-        </p:nvSpPr>
-        <p:spPr>
-          <a:xfrm>
-            <a:off x="502920" y="274320"/>
-            <a:ext cx="10058400" cy="228600"/>
-          </a:xfrm>
-          <a:prstGeom prst="rect">
-            <a:avLst/>
-          </a:prstGeom>
-          <a:noFill/>
-        </p:spPr>
-        <p:txBody>
-          <a:bodyPr wrap="square" lIns="0" tIns="0" rIns="0" bIns="0">
-            <a:spAutoFit/>
-          </a:bodyPr>
-          <a:lstStyle/>
-          <a:p>
-            <a:pPr>
-              <a:spcAft>
-                <a:spcPts val="300"/>
-              </a:spcAft>
-              <a:defRPr sz="1000" b="1">
-                <a:solidFill>
-                  <a:srgbClr val="63E6BE"/>
-                </a:solidFill>
-                <a:latin typeface="Aptos"/>
-              </a:defRPr>
-            </a:pPr>
-            <a:r>
-              <a:t>PROBLEM STATEMENT</a:t>
-            </a:r>
-          </a:p>
-        </p:txBody>
-      </p:sp>
-      <p:sp>
-        <p:nvSpPr>
           <p:cNvPr id="3" name="reveal_01"/>
           <p:cNvSpPr txBox="1"/>
           <p:nvPr/>
@@ -6951,7 +8230,7 @@
         <p:spPr>
           <a:xfrm>
             <a:off x="502920" y="768096"/>
-            <a:ext cx="11155680" cy="612648"/>
+            <a:ext cx="11155680" cy="884858"/>
           </a:xfrm>
           <a:prstGeom prst="rect">
             <a:avLst/>
@@ -6976,8 +8255,31 @@
               </a:defRPr>
             </a:pPr>
             <a:r>
+              <a:rPr lang="en-US" dirty="0"/>
+              <a:t>PROBLEM </a:t>
+            </a:r>
+            <a:r>
+              <a:rPr lang="en-US" dirty="0" smtClean="0"/>
+              <a:t>STATEMENT</a:t>
+            </a:r>
+          </a:p>
+          <a:p>
+            <a:pPr>
+              <a:spcAft>
+                <a:spcPts val="300"/>
+              </a:spcAft>
+              <a:defRPr sz="3100" b="1">
+                <a:solidFill>
+                  <a:srgbClr val="EDF5FF"/>
+                </a:solidFill>
+                <a:latin typeface="Aptos"/>
+              </a:defRPr>
+            </a:pPr>
+            <a:r>
+              <a:rPr sz="2400" dirty="0" smtClean="0"/>
               <a:t>A bank balance is not tuition readiness.</a:t>
             </a:r>
+            <a:endParaRPr sz="2400" dirty="0"/>
           </a:p>
         </p:txBody>
       </p:sp>
@@ -6989,7 +8291,7 @@
         </p:nvSpPr>
         <p:spPr>
           <a:xfrm>
-            <a:off x="521207" y="1389888"/>
+            <a:off x="530352" y="6313965"/>
             <a:ext cx="10972800" cy="411480"/>
           </a:xfrm>
           <a:prstGeom prst="rect">
@@ -7015,85 +8317,8 @@
               </a:defRPr>
             </a:pPr>
             <a:r>
+              <a:rPr dirty="0"/>
               <a:t>Living costs, future income and transfer fees all change what a student can actually afford.</a:t>
-            </a:r>
-          </a:p>
-        </p:txBody>
-      </p:sp>
-      <p:sp>
-        <p:nvSpPr>
-          <p:cNvPr id="5" name="TextBox 4"/>
-          <p:cNvSpPr txBox="1"/>
-          <p:nvPr/>
-        </p:nvSpPr>
-        <p:spPr>
-          <a:xfrm>
-            <a:off x="502920" y="6510528"/>
-            <a:ext cx="3657600" cy="182880"/>
-          </a:xfrm>
-          <a:prstGeom prst="rect">
-            <a:avLst/>
-          </a:prstGeom>
-          <a:noFill/>
-        </p:spPr>
-        <p:txBody>
-          <a:bodyPr wrap="square" lIns="0" tIns="0" rIns="0" bIns="0">
-            <a:spAutoFit/>
-          </a:bodyPr>
-          <a:lstStyle/>
-          <a:p>
-            <a:pPr>
-              <a:spcAft>
-                <a:spcPts val="300"/>
-              </a:spcAft>
-              <a:defRPr sz="900" b="0">
-                <a:solidFill>
-                  <a:srgbClr val="A2B4CA"/>
-                </a:solidFill>
-                <a:latin typeface="Aptos"/>
-              </a:defRPr>
-            </a:pPr>
-            <a:r>
-              <a:t>FINBRIDGE AI</a:t>
-            </a:r>
-          </a:p>
-        </p:txBody>
-      </p:sp>
-      <p:sp>
-        <p:nvSpPr>
-          <p:cNvPr id="6" name="TextBox 5"/>
-          <p:cNvSpPr txBox="1"/>
-          <p:nvPr/>
-        </p:nvSpPr>
-        <p:spPr>
-          <a:xfrm>
-            <a:off x="10607040" y="6473952"/>
-            <a:ext cx="1078992" cy="228600"/>
-          </a:xfrm>
-          <a:prstGeom prst="rect">
-            <a:avLst/>
-          </a:prstGeom>
-          <a:noFill/>
-        </p:spPr>
-        <p:txBody>
-          <a:bodyPr wrap="square" lIns="0" tIns="0" rIns="0" bIns="0">
-            <a:spAutoFit/>
-          </a:bodyPr>
-          <a:lstStyle/>
-          <a:p>
-            <a:pPr algn="r">
-              <a:spcAft>
-                <a:spcPts val="300"/>
-              </a:spcAft>
-              <a:defRPr sz="1000" b="0">
-                <a:solidFill>
-                  <a:srgbClr val="A2B4CA"/>
-                </a:solidFill>
-                <a:latin typeface="Aptos"/>
-              </a:defRPr>
-            </a:pPr>
-            <a:r>
-              <a:t>02 / 10</a:t>
             </a:r>
           </a:p>
         </p:txBody>
@@ -7553,24 +8778,760 @@
           </a:p>
         </p:txBody>
       </p:sp>
-      <p:sp>
-        <p:nvSpPr>
-          <p:cNvPr id="19" name="wipe_03"/>
+      <p:grpSp>
+        <p:nvGrpSpPr>
+          <p:cNvPr id="45" name="Group 44"/>
+          <p:cNvGrpSpPr/>
+          <p:nvPr/>
+        </p:nvGrpSpPr>
+        <p:grpSpPr>
+          <a:xfrm>
+            <a:off x="1335024" y="3374707"/>
+            <a:ext cx="1060704" cy="2065972"/>
+            <a:chOff x="1335024" y="3374707"/>
+            <a:chExt cx="1060704" cy="2065972"/>
+          </a:xfrm>
+        </p:grpSpPr>
+        <p:sp>
+          <p:nvSpPr>
+            <p:cNvPr id="19" name="wipe_03"/>
+            <p:cNvSpPr/>
+            <p:nvPr/>
+          </p:nvSpPr>
+          <p:spPr>
+            <a:xfrm>
+              <a:off x="1536192" y="3649027"/>
+              <a:ext cx="640080" cy="1791652"/>
+            </a:xfrm>
+            <a:prstGeom prst="roundRect">
+              <a:avLst>
+                <a:gd name="adj" fmla="val 2000"/>
+              </a:avLst>
+            </a:prstGeom>
+            <a:solidFill>
+              <a:srgbClr val="6BB9FF"/>
+            </a:solidFill>
+            <a:ln>
+              <a:noFill/>
+            </a:ln>
+          </p:spPr>
+          <p:style>
+            <a:lnRef idx="1">
+              <a:schemeClr val="accent1"/>
+            </a:lnRef>
+            <a:fillRef idx="3">
+              <a:schemeClr val="accent1"/>
+            </a:fillRef>
+            <a:effectRef idx="2">
+              <a:schemeClr val="accent1"/>
+            </a:effectRef>
+            <a:fontRef idx="minor">
+              <a:schemeClr val="lt1"/>
+            </a:fontRef>
+          </p:style>
+          <p:txBody>
+            <a:bodyPr rtlCol="0" anchor="ctr"/>
+            <a:lstStyle/>
+            <a:p>
+              <a:pPr algn="ctr"/>
+              <a:endParaRPr/>
+            </a:p>
+          </p:txBody>
+        </p:sp>
+        <p:sp>
+          <p:nvSpPr>
+            <p:cNvPr id="20" name="reveal_03"/>
+            <p:cNvSpPr txBox="1"/>
+            <p:nvPr/>
+          </p:nvSpPr>
+          <p:spPr>
+            <a:xfrm>
+              <a:off x="1335024" y="3374707"/>
+              <a:ext cx="1060704" cy="228600"/>
+            </a:xfrm>
+            <a:prstGeom prst="rect">
+              <a:avLst/>
+            </a:prstGeom>
+            <a:noFill/>
+          </p:spPr>
+          <p:txBody>
+            <a:bodyPr wrap="square" lIns="0" tIns="0" rIns="0" bIns="0">
+              <a:spAutoFit/>
+            </a:bodyPr>
+            <a:lstStyle/>
+            <a:p>
+              <a:pPr algn="ctr">
+                <a:spcAft>
+                  <a:spcPts val="300"/>
+                </a:spcAft>
+                <a:defRPr sz="1200" b="1">
+                  <a:solidFill>
+                    <a:srgbClr val="6BB9FF"/>
+                  </a:solidFill>
+                  <a:latin typeface="Aptos"/>
+                </a:defRPr>
+              </a:pPr>
+              <a:r>
+                <a:rPr dirty="0"/>
+                <a:t>27,500</a:t>
+              </a:r>
+            </a:p>
+          </p:txBody>
+        </p:sp>
+      </p:grpSp>
+      <p:sp>
+        <p:nvSpPr>
+          <p:cNvPr id="21" name="TextBox 20"/>
+          <p:cNvSpPr txBox="1"/>
+          <p:nvPr/>
+        </p:nvSpPr>
+        <p:spPr>
+          <a:xfrm>
+            <a:off x="1298448" y="5605272"/>
+            <a:ext cx="1143000" cy="265176"/>
+          </a:xfrm>
+          <a:prstGeom prst="rect">
+            <a:avLst/>
+          </a:prstGeom>
+          <a:noFill/>
+        </p:spPr>
+        <p:txBody>
+          <a:bodyPr wrap="square" lIns="0" tIns="0" rIns="0" bIns="0">
+            <a:spAutoFit/>
+          </a:bodyPr>
+          <a:lstStyle/>
+          <a:p>
+            <a:pPr algn="ctr">
+              <a:spcAft>
+                <a:spcPts val="300"/>
+              </a:spcAft>
+              <a:defRPr sz="1100" b="0">
+                <a:solidFill>
+                  <a:srgbClr val="A2B4CA"/>
+                </a:solidFill>
+                <a:latin typeface="Aptos"/>
+              </a:defRPr>
+            </a:pPr>
+            <a:r>
+              <a:t>Now</a:t>
+            </a:r>
+          </a:p>
+        </p:txBody>
+      </p:sp>
+      <p:grpSp>
+        <p:nvGrpSpPr>
+          <p:cNvPr id="41" name="Group 40"/>
+          <p:cNvGrpSpPr/>
+          <p:nvPr/>
+        </p:nvGrpSpPr>
+        <p:grpSpPr>
+          <a:xfrm>
+            <a:off x="2564892" y="4510151"/>
+            <a:ext cx="1060704" cy="925830"/>
+            <a:chOff x="2514599" y="2723197"/>
+            <a:chExt cx="1060704" cy="925830"/>
+          </a:xfrm>
+        </p:grpSpPr>
+        <p:sp>
+          <p:nvSpPr>
+            <p:cNvPr id="22" name="wipe_04"/>
+            <p:cNvSpPr/>
+            <p:nvPr/>
+          </p:nvSpPr>
+          <p:spPr>
+            <a:xfrm>
+              <a:off x="2715768" y="2997517"/>
+              <a:ext cx="640080" cy="651510"/>
+            </a:xfrm>
+            <a:prstGeom prst="roundRect">
+              <a:avLst>
+                <a:gd name="adj" fmla="val 2000"/>
+              </a:avLst>
+            </a:prstGeom>
+            <a:solidFill>
+              <a:srgbClr val="63E6BE"/>
+            </a:solidFill>
+            <a:ln>
+              <a:noFill/>
+            </a:ln>
+          </p:spPr>
+          <p:style>
+            <a:lnRef idx="1">
+              <a:schemeClr val="accent1"/>
+            </a:lnRef>
+            <a:fillRef idx="3">
+              <a:schemeClr val="accent1"/>
+            </a:fillRef>
+            <a:effectRef idx="2">
+              <a:schemeClr val="accent1"/>
+            </a:effectRef>
+            <a:fontRef idx="minor">
+              <a:schemeClr val="lt1"/>
+            </a:fontRef>
+          </p:style>
+          <p:txBody>
+            <a:bodyPr rtlCol="0" anchor="ctr"/>
+            <a:lstStyle/>
+            <a:p>
+              <a:pPr algn="ctr"/>
+              <a:endParaRPr/>
+            </a:p>
+          </p:txBody>
+        </p:sp>
+        <p:sp>
+          <p:nvSpPr>
+            <p:cNvPr id="23" name="reveal_04"/>
+            <p:cNvSpPr txBox="1"/>
+            <p:nvPr/>
+          </p:nvSpPr>
+          <p:spPr>
+            <a:xfrm>
+              <a:off x="2514599" y="2723197"/>
+              <a:ext cx="1060704" cy="228600"/>
+            </a:xfrm>
+            <a:prstGeom prst="rect">
+              <a:avLst/>
+            </a:prstGeom>
+            <a:noFill/>
+          </p:spPr>
+          <p:txBody>
+            <a:bodyPr wrap="square" lIns="0" tIns="0" rIns="0" bIns="0">
+              <a:spAutoFit/>
+            </a:bodyPr>
+            <a:lstStyle/>
+            <a:p>
+              <a:pPr algn="ctr">
+                <a:spcAft>
+                  <a:spcPts val="300"/>
+                </a:spcAft>
+                <a:defRPr sz="1200" b="1">
+                  <a:solidFill>
+                    <a:srgbClr val="63E6BE"/>
+                  </a:solidFill>
+                  <a:latin typeface="Aptos"/>
+                </a:defRPr>
+              </a:pPr>
+              <a:r>
+                <a:t>10,000</a:t>
+              </a:r>
+            </a:p>
+          </p:txBody>
+        </p:sp>
+      </p:grpSp>
+      <p:sp>
+        <p:nvSpPr>
+          <p:cNvPr id="24" name="TextBox 23"/>
+          <p:cNvSpPr txBox="1"/>
+          <p:nvPr/>
+        </p:nvSpPr>
+        <p:spPr>
+          <a:xfrm>
+            <a:off x="2478024" y="5605272"/>
+            <a:ext cx="1143000" cy="265176"/>
+          </a:xfrm>
+          <a:prstGeom prst="rect">
+            <a:avLst/>
+          </a:prstGeom>
+          <a:noFill/>
+        </p:spPr>
+        <p:txBody>
+          <a:bodyPr wrap="square" lIns="0" tIns="0" rIns="0" bIns="0">
+            <a:spAutoFit/>
+          </a:bodyPr>
+          <a:lstStyle/>
+          <a:p>
+            <a:pPr algn="ctr">
+              <a:spcAft>
+                <a:spcPts val="300"/>
+              </a:spcAft>
+              <a:defRPr sz="1100" b="0">
+                <a:solidFill>
+                  <a:srgbClr val="A2B4CA"/>
+                </a:solidFill>
+                <a:latin typeface="Aptos"/>
+              </a:defRPr>
+            </a:pPr>
+            <a:r>
+              <a:t>+ Income</a:t>
+            </a:r>
+          </a:p>
+        </p:txBody>
+      </p:sp>
+      <p:grpSp>
+        <p:nvGrpSpPr>
+          <p:cNvPr id="42" name="Group 41"/>
+          <p:cNvGrpSpPr/>
+          <p:nvPr/>
+        </p:nvGrpSpPr>
+        <p:grpSpPr>
+          <a:xfrm>
+            <a:off x="3734309" y="4879786"/>
+            <a:ext cx="1060704" cy="551211"/>
+            <a:chOff x="3694176" y="2723197"/>
+            <a:chExt cx="1060704" cy="551211"/>
+          </a:xfrm>
+        </p:grpSpPr>
+        <p:sp>
+          <p:nvSpPr>
+            <p:cNvPr id="25" name="wipe_05"/>
+            <p:cNvSpPr/>
+            <p:nvPr/>
+          </p:nvSpPr>
+          <p:spPr>
+            <a:xfrm>
+              <a:off x="3895344" y="2997517"/>
+              <a:ext cx="640080" cy="276891"/>
+            </a:xfrm>
+            <a:prstGeom prst="roundRect">
+              <a:avLst>
+                <a:gd name="adj" fmla="val 2000"/>
+              </a:avLst>
+            </a:prstGeom>
+            <a:solidFill>
+              <a:srgbClr val="FF8896"/>
+            </a:solidFill>
+            <a:ln>
+              <a:noFill/>
+            </a:ln>
+          </p:spPr>
+          <p:style>
+            <a:lnRef idx="1">
+              <a:schemeClr val="accent1"/>
+            </a:lnRef>
+            <a:fillRef idx="3">
+              <a:schemeClr val="accent1"/>
+            </a:fillRef>
+            <a:effectRef idx="2">
+              <a:schemeClr val="accent1"/>
+            </a:effectRef>
+            <a:fontRef idx="minor">
+              <a:schemeClr val="lt1"/>
+            </a:fontRef>
+          </p:style>
+          <p:txBody>
+            <a:bodyPr rtlCol="0" anchor="ctr"/>
+            <a:lstStyle/>
+            <a:p>
+              <a:pPr algn="ctr"/>
+              <a:endParaRPr/>
+            </a:p>
+          </p:txBody>
+        </p:sp>
+        <p:sp>
+          <p:nvSpPr>
+            <p:cNvPr id="26" name="reveal_05"/>
+            <p:cNvSpPr txBox="1"/>
+            <p:nvPr/>
+          </p:nvSpPr>
+          <p:spPr>
+            <a:xfrm>
+              <a:off x="3694176" y="2723197"/>
+              <a:ext cx="1060704" cy="228600"/>
+            </a:xfrm>
+            <a:prstGeom prst="rect">
+              <a:avLst/>
+            </a:prstGeom>
+            <a:noFill/>
+          </p:spPr>
+          <p:txBody>
+            <a:bodyPr wrap="square" lIns="0" tIns="0" rIns="0" bIns="0">
+              <a:spAutoFit/>
+            </a:bodyPr>
+            <a:lstStyle/>
+            <a:p>
+              <a:pPr algn="ctr">
+                <a:spcAft>
+                  <a:spcPts val="300"/>
+                </a:spcAft>
+                <a:defRPr sz="1200" b="1">
+                  <a:solidFill>
+                    <a:srgbClr val="FF8896"/>
+                  </a:solidFill>
+                  <a:latin typeface="Aptos"/>
+                </a:defRPr>
+              </a:pPr>
+              <a:r>
+                <a:t>4,250</a:t>
+              </a:r>
+            </a:p>
+          </p:txBody>
+        </p:sp>
+      </p:grpSp>
+      <p:sp>
+        <p:nvSpPr>
+          <p:cNvPr id="27" name="TextBox 26"/>
+          <p:cNvSpPr txBox="1"/>
+          <p:nvPr/>
+        </p:nvSpPr>
+        <p:spPr>
+          <a:xfrm>
+            <a:off x="3657600" y="5605272"/>
+            <a:ext cx="1143000" cy="265176"/>
+          </a:xfrm>
+          <a:prstGeom prst="rect">
+            <a:avLst/>
+          </a:prstGeom>
+          <a:noFill/>
+        </p:spPr>
+        <p:txBody>
+          <a:bodyPr wrap="square" lIns="0" tIns="0" rIns="0" bIns="0">
+            <a:spAutoFit/>
+          </a:bodyPr>
+          <a:lstStyle/>
+          <a:p>
+            <a:pPr algn="ctr">
+              <a:spcAft>
+                <a:spcPts val="300"/>
+              </a:spcAft>
+              <a:defRPr sz="1100" b="0">
+                <a:solidFill>
+                  <a:srgbClr val="A2B4CA"/>
+                </a:solidFill>
+                <a:latin typeface="Aptos"/>
+              </a:defRPr>
+            </a:pPr>
+            <a:r>
+              <a:t>− Living</a:t>
+            </a:r>
+          </a:p>
+        </p:txBody>
+      </p:sp>
+      <p:grpSp>
+        <p:nvGrpSpPr>
+          <p:cNvPr id="43" name="Group 42"/>
+          <p:cNvGrpSpPr/>
+          <p:nvPr/>
+        </p:nvGrpSpPr>
+        <p:grpSpPr>
+          <a:xfrm>
+            <a:off x="4873752" y="3000089"/>
+            <a:ext cx="1060704" cy="2440590"/>
+            <a:chOff x="4873752" y="3000089"/>
+            <a:chExt cx="1060704" cy="2440590"/>
+          </a:xfrm>
+        </p:grpSpPr>
+        <p:sp>
+          <p:nvSpPr>
+            <p:cNvPr id="28" name="wipe_06"/>
+            <p:cNvSpPr/>
+            <p:nvPr/>
+          </p:nvSpPr>
+          <p:spPr>
+            <a:xfrm>
+              <a:off x="5074920" y="3274409"/>
+              <a:ext cx="640080" cy="2166270"/>
+            </a:xfrm>
+            <a:prstGeom prst="roundRect">
+              <a:avLst>
+                <a:gd name="adj" fmla="val 2000"/>
+              </a:avLst>
+            </a:prstGeom>
+            <a:solidFill>
+              <a:srgbClr val="6BB9FF"/>
+            </a:solidFill>
+            <a:ln>
+              <a:noFill/>
+            </a:ln>
+          </p:spPr>
+          <p:style>
+            <a:lnRef idx="1">
+              <a:schemeClr val="accent1"/>
+            </a:lnRef>
+            <a:fillRef idx="3">
+              <a:schemeClr val="accent1"/>
+            </a:fillRef>
+            <a:effectRef idx="2">
+              <a:schemeClr val="accent1"/>
+            </a:effectRef>
+            <a:fontRef idx="minor">
+              <a:schemeClr val="lt1"/>
+            </a:fontRef>
+          </p:style>
+          <p:txBody>
+            <a:bodyPr rtlCol="0" anchor="ctr"/>
+            <a:lstStyle/>
+            <a:p>
+              <a:pPr algn="ctr"/>
+              <a:endParaRPr/>
+            </a:p>
+          </p:txBody>
+        </p:sp>
+        <p:sp>
+          <p:nvSpPr>
+            <p:cNvPr id="29" name="reveal_06"/>
+            <p:cNvSpPr txBox="1"/>
+            <p:nvPr/>
+          </p:nvSpPr>
+          <p:spPr>
+            <a:xfrm>
+              <a:off x="4873752" y="3000089"/>
+              <a:ext cx="1060704" cy="228600"/>
+            </a:xfrm>
+            <a:prstGeom prst="rect">
+              <a:avLst/>
+            </a:prstGeom>
+            <a:noFill/>
+          </p:spPr>
+          <p:txBody>
+            <a:bodyPr wrap="square" lIns="0" tIns="0" rIns="0" bIns="0">
+              <a:spAutoFit/>
+            </a:bodyPr>
+            <a:lstStyle/>
+            <a:p>
+              <a:pPr algn="ctr">
+                <a:spcAft>
+                  <a:spcPts val="300"/>
+                </a:spcAft>
+                <a:defRPr sz="1200" b="1">
+                  <a:solidFill>
+                    <a:srgbClr val="6BB9FF"/>
+                  </a:solidFill>
+                  <a:latin typeface="Aptos"/>
+                </a:defRPr>
+              </a:pPr>
+              <a:r>
+                <a:t>33,250</a:t>
+              </a:r>
+            </a:p>
+          </p:txBody>
+        </p:sp>
+      </p:grpSp>
+      <p:sp>
+        <p:nvSpPr>
+          <p:cNvPr id="30" name="TextBox 29"/>
+          <p:cNvSpPr txBox="1"/>
+          <p:nvPr/>
+        </p:nvSpPr>
+        <p:spPr>
+          <a:xfrm>
+            <a:off x="4837176" y="5605272"/>
+            <a:ext cx="1143000" cy="265176"/>
+          </a:xfrm>
+          <a:prstGeom prst="rect">
+            <a:avLst/>
+          </a:prstGeom>
+          <a:noFill/>
+        </p:spPr>
+        <p:txBody>
+          <a:bodyPr wrap="square" lIns="0" tIns="0" rIns="0" bIns="0">
+            <a:spAutoFit/>
+          </a:bodyPr>
+          <a:lstStyle/>
+          <a:p>
+            <a:pPr algn="ctr">
+              <a:spcAft>
+                <a:spcPts val="300"/>
+              </a:spcAft>
+              <a:defRPr sz="1100" b="0">
+                <a:solidFill>
+                  <a:srgbClr val="A2B4CA"/>
+                </a:solidFill>
+                <a:latin typeface="Aptos"/>
+              </a:defRPr>
+            </a:pPr>
+            <a:r>
+              <a:t>Projected</a:t>
+            </a:r>
+          </a:p>
+        </p:txBody>
+      </p:sp>
+      <p:grpSp>
+        <p:nvGrpSpPr>
+          <p:cNvPr id="44" name="Group 43"/>
+          <p:cNvGrpSpPr/>
+          <p:nvPr/>
+        </p:nvGrpSpPr>
+        <p:grpSpPr>
+          <a:xfrm>
+            <a:off x="6053328" y="2560320"/>
+            <a:ext cx="1060704" cy="2880360"/>
+            <a:chOff x="6053328" y="2560320"/>
+            <a:chExt cx="1060704" cy="2880360"/>
+          </a:xfrm>
+        </p:grpSpPr>
+        <p:sp>
+          <p:nvSpPr>
+            <p:cNvPr id="31" name="wipe_07"/>
+            <p:cNvSpPr/>
+            <p:nvPr/>
+          </p:nvSpPr>
+          <p:spPr>
+            <a:xfrm>
+              <a:off x="6254496" y="2834640"/>
+              <a:ext cx="640080" cy="2606040"/>
+            </a:xfrm>
+            <a:prstGeom prst="roundRect">
+              <a:avLst>
+                <a:gd name="adj" fmla="val 2000"/>
+              </a:avLst>
+            </a:prstGeom>
+            <a:solidFill>
+              <a:srgbClr val="F3C969"/>
+            </a:solidFill>
+            <a:ln>
+              <a:noFill/>
+            </a:ln>
+          </p:spPr>
+          <p:style>
+            <a:lnRef idx="1">
+              <a:schemeClr val="accent1"/>
+            </a:lnRef>
+            <a:fillRef idx="3">
+              <a:schemeClr val="accent1"/>
+            </a:fillRef>
+            <a:effectRef idx="2">
+              <a:schemeClr val="accent1"/>
+            </a:effectRef>
+            <a:fontRef idx="minor">
+              <a:schemeClr val="lt1"/>
+            </a:fontRef>
+          </p:style>
+          <p:txBody>
+            <a:bodyPr rtlCol="0" anchor="ctr"/>
+            <a:lstStyle/>
+            <a:p>
+              <a:pPr algn="ctr"/>
+              <a:endParaRPr/>
+            </a:p>
+          </p:txBody>
+        </p:sp>
+        <p:sp>
+          <p:nvSpPr>
+            <p:cNvPr id="32" name="reveal_07"/>
+            <p:cNvSpPr txBox="1"/>
+            <p:nvPr/>
+          </p:nvSpPr>
+          <p:spPr>
+            <a:xfrm>
+              <a:off x="6053328" y="2560320"/>
+              <a:ext cx="1060704" cy="228600"/>
+            </a:xfrm>
+            <a:prstGeom prst="rect">
+              <a:avLst/>
+            </a:prstGeom>
+            <a:noFill/>
+          </p:spPr>
+          <p:txBody>
+            <a:bodyPr wrap="square" lIns="0" tIns="0" rIns="0" bIns="0">
+              <a:spAutoFit/>
+            </a:bodyPr>
+            <a:lstStyle/>
+            <a:p>
+              <a:pPr algn="ctr">
+                <a:spcAft>
+                  <a:spcPts val="300"/>
+                </a:spcAft>
+                <a:defRPr sz="1200" b="1">
+                  <a:solidFill>
+                    <a:srgbClr val="F3C969"/>
+                  </a:solidFill>
+                  <a:latin typeface="Aptos"/>
+                </a:defRPr>
+              </a:pPr>
+              <a:r>
+                <a:rPr dirty="0"/>
+                <a:t>40,000</a:t>
+              </a:r>
+            </a:p>
+          </p:txBody>
+        </p:sp>
+      </p:grpSp>
+      <p:sp>
+        <p:nvSpPr>
+          <p:cNvPr id="33" name="TextBox 32"/>
+          <p:cNvSpPr txBox="1"/>
+          <p:nvPr/>
+        </p:nvSpPr>
+        <p:spPr>
+          <a:xfrm>
+            <a:off x="6016752" y="5605272"/>
+            <a:ext cx="1143000" cy="265176"/>
+          </a:xfrm>
+          <a:prstGeom prst="rect">
+            <a:avLst/>
+          </a:prstGeom>
+          <a:noFill/>
+        </p:spPr>
+        <p:txBody>
+          <a:bodyPr wrap="square" lIns="0" tIns="0" rIns="0" bIns="0">
+            <a:spAutoFit/>
+          </a:bodyPr>
+          <a:lstStyle/>
+          <a:p>
+            <a:pPr algn="ctr">
+              <a:spcAft>
+                <a:spcPts val="300"/>
+              </a:spcAft>
+              <a:defRPr sz="1100" b="0">
+                <a:solidFill>
+                  <a:srgbClr val="A2B4CA"/>
+                </a:solidFill>
+                <a:latin typeface="Aptos"/>
+              </a:defRPr>
+            </a:pPr>
+            <a:r>
+              <a:t>Tuition</a:t>
+            </a:r>
+          </a:p>
+        </p:txBody>
+      </p:sp>
+      <p:sp>
+        <p:nvSpPr>
+          <p:cNvPr id="34" name="TextBox 33"/>
+          <p:cNvSpPr txBox="1"/>
+          <p:nvPr/>
+        </p:nvSpPr>
+        <p:spPr>
+          <a:xfrm>
+            <a:off x="768096" y="5916168"/>
+            <a:ext cx="6675120" cy="201168"/>
+          </a:xfrm>
+          <a:prstGeom prst="rect">
+            <a:avLst/>
+          </a:prstGeom>
+          <a:noFill/>
+        </p:spPr>
+        <p:txBody>
+          <a:bodyPr wrap="square" lIns="0" tIns="0" rIns="0" bIns="0">
+            <a:spAutoFit/>
+          </a:bodyPr>
+          <a:lstStyle/>
+          <a:p>
+            <a:pPr>
+              <a:spcAft>
+                <a:spcPts val="300"/>
+              </a:spcAft>
+              <a:defRPr sz="1000" b="0">
+                <a:solidFill>
+                  <a:srgbClr val="A2B4CA"/>
+                </a:solidFill>
+                <a:latin typeface="Aptos"/>
+              </a:defRPr>
+            </a:pPr>
+            <a:r>
+              <a:t>CNY · two-month example · scholarship = 0</a:t>
+            </a:r>
+          </a:p>
+        </p:txBody>
+      </p:sp>
+      <p:sp>
+        <p:nvSpPr>
+          <p:cNvPr id="35" name="Rounded Rectangle 34"/>
           <p:cNvSpPr/>
           <p:nvPr/>
         </p:nvSpPr>
         <p:spPr>
           <a:xfrm>
-            <a:off x="1536192" y="3649027"/>
-            <a:ext cx="640080" cy="1791652"/>
+            <a:off x="8046720" y="1920240"/>
+            <a:ext cx="3639312" cy="4224528"/>
           </a:xfrm>
           <a:prstGeom prst="roundRect">
             <a:avLst>
-              <a:gd name="adj" fmla="val 2000"/>
+              <a:gd name="adj" fmla="val 10000"/>
             </a:avLst>
           </a:prstGeom>
           <a:solidFill>
-            <a:srgbClr val="6BB9FF"/>
+            <a:srgbClr val="101E30"/>
           </a:solidFill>
           <a:ln>
             <a:noFill/>
@@ -7599,665 +9560,6 @@
           </a:p>
         </p:txBody>
       </p:sp>
-      <p:sp>
-        <p:nvSpPr>
-          <p:cNvPr id="20" name="reveal_03"/>
-          <p:cNvSpPr txBox="1"/>
-          <p:nvPr/>
-        </p:nvSpPr>
-        <p:spPr>
-          <a:xfrm>
-            <a:off x="1335024" y="3374707"/>
-            <a:ext cx="1060704" cy="228600"/>
-          </a:xfrm>
-          <a:prstGeom prst="rect">
-            <a:avLst/>
-          </a:prstGeom>
-          <a:noFill/>
-        </p:spPr>
-        <p:txBody>
-          <a:bodyPr wrap="square" lIns="0" tIns="0" rIns="0" bIns="0">
-            <a:spAutoFit/>
-          </a:bodyPr>
-          <a:lstStyle/>
-          <a:p>
-            <a:pPr algn="ctr">
-              <a:spcAft>
-                <a:spcPts val="300"/>
-              </a:spcAft>
-              <a:defRPr sz="1200" b="1">
-                <a:solidFill>
-                  <a:srgbClr val="6BB9FF"/>
-                </a:solidFill>
-                <a:latin typeface="Aptos"/>
-              </a:defRPr>
-            </a:pPr>
-            <a:r>
-              <a:t>27,500</a:t>
-            </a:r>
-          </a:p>
-        </p:txBody>
-      </p:sp>
-      <p:sp>
-        <p:nvSpPr>
-          <p:cNvPr id="21" name="TextBox 20"/>
-          <p:cNvSpPr txBox="1"/>
-          <p:nvPr/>
-        </p:nvSpPr>
-        <p:spPr>
-          <a:xfrm>
-            <a:off x="1298448" y="5605272"/>
-            <a:ext cx="1143000" cy="265176"/>
-          </a:xfrm>
-          <a:prstGeom prst="rect">
-            <a:avLst/>
-          </a:prstGeom>
-          <a:noFill/>
-        </p:spPr>
-        <p:txBody>
-          <a:bodyPr wrap="square" lIns="0" tIns="0" rIns="0" bIns="0">
-            <a:spAutoFit/>
-          </a:bodyPr>
-          <a:lstStyle/>
-          <a:p>
-            <a:pPr algn="ctr">
-              <a:spcAft>
-                <a:spcPts val="300"/>
-              </a:spcAft>
-              <a:defRPr sz="1100" b="0">
-                <a:solidFill>
-                  <a:srgbClr val="A2B4CA"/>
-                </a:solidFill>
-                <a:latin typeface="Aptos"/>
-              </a:defRPr>
-            </a:pPr>
-            <a:r>
-              <a:t>Now</a:t>
-            </a:r>
-          </a:p>
-        </p:txBody>
-      </p:sp>
-      <p:sp>
-        <p:nvSpPr>
-          <p:cNvPr id="22" name="wipe_04"/>
-          <p:cNvSpPr/>
-          <p:nvPr/>
-        </p:nvSpPr>
-        <p:spPr>
-          <a:xfrm>
-            <a:off x="2715768" y="2997517"/>
-            <a:ext cx="640080" cy="651510"/>
-          </a:xfrm>
-          <a:prstGeom prst="roundRect">
-            <a:avLst>
-              <a:gd name="adj" fmla="val 2000"/>
-            </a:avLst>
-          </a:prstGeom>
-          <a:solidFill>
-            <a:srgbClr val="63E6BE"/>
-          </a:solidFill>
-          <a:ln>
-            <a:noFill/>
-          </a:ln>
-        </p:spPr>
-        <p:style>
-          <a:lnRef idx="1">
-            <a:schemeClr val="accent1"/>
-          </a:lnRef>
-          <a:fillRef idx="3">
-            <a:schemeClr val="accent1"/>
-          </a:fillRef>
-          <a:effectRef idx="2">
-            <a:schemeClr val="accent1"/>
-          </a:effectRef>
-          <a:fontRef idx="minor">
-            <a:schemeClr val="lt1"/>
-          </a:fontRef>
-        </p:style>
-        <p:txBody>
-          <a:bodyPr rtlCol="0" anchor="ctr"/>
-          <a:lstStyle/>
-          <a:p>
-            <a:pPr algn="ctr"/>
-            <a:endParaRPr/>
-          </a:p>
-        </p:txBody>
-      </p:sp>
-      <p:sp>
-        <p:nvSpPr>
-          <p:cNvPr id="23" name="reveal_04"/>
-          <p:cNvSpPr txBox="1"/>
-          <p:nvPr/>
-        </p:nvSpPr>
-        <p:spPr>
-          <a:xfrm>
-            <a:off x="2514599" y="2723197"/>
-            <a:ext cx="1060704" cy="228600"/>
-          </a:xfrm>
-          <a:prstGeom prst="rect">
-            <a:avLst/>
-          </a:prstGeom>
-          <a:noFill/>
-        </p:spPr>
-        <p:txBody>
-          <a:bodyPr wrap="square" lIns="0" tIns="0" rIns="0" bIns="0">
-            <a:spAutoFit/>
-          </a:bodyPr>
-          <a:lstStyle/>
-          <a:p>
-            <a:pPr algn="ctr">
-              <a:spcAft>
-                <a:spcPts val="300"/>
-              </a:spcAft>
-              <a:defRPr sz="1200" b="1">
-                <a:solidFill>
-                  <a:srgbClr val="63E6BE"/>
-                </a:solidFill>
-                <a:latin typeface="Aptos"/>
-              </a:defRPr>
-            </a:pPr>
-            <a:r>
-              <a:t>10,000</a:t>
-            </a:r>
-          </a:p>
-        </p:txBody>
-      </p:sp>
-      <p:sp>
-        <p:nvSpPr>
-          <p:cNvPr id="24" name="TextBox 23"/>
-          <p:cNvSpPr txBox="1"/>
-          <p:nvPr/>
-        </p:nvSpPr>
-        <p:spPr>
-          <a:xfrm>
-            <a:off x="2478024" y="5605272"/>
-            <a:ext cx="1143000" cy="265176"/>
-          </a:xfrm>
-          <a:prstGeom prst="rect">
-            <a:avLst/>
-          </a:prstGeom>
-          <a:noFill/>
-        </p:spPr>
-        <p:txBody>
-          <a:bodyPr wrap="square" lIns="0" tIns="0" rIns="0" bIns="0">
-            <a:spAutoFit/>
-          </a:bodyPr>
-          <a:lstStyle/>
-          <a:p>
-            <a:pPr algn="ctr">
-              <a:spcAft>
-                <a:spcPts val="300"/>
-              </a:spcAft>
-              <a:defRPr sz="1100" b="0">
-                <a:solidFill>
-                  <a:srgbClr val="A2B4CA"/>
-                </a:solidFill>
-                <a:latin typeface="Aptos"/>
-              </a:defRPr>
-            </a:pPr>
-            <a:r>
-              <a:t>+ Income</a:t>
-            </a:r>
-          </a:p>
-        </p:txBody>
-      </p:sp>
-      <p:sp>
-        <p:nvSpPr>
-          <p:cNvPr id="25" name="wipe_05"/>
-          <p:cNvSpPr/>
-          <p:nvPr/>
-        </p:nvSpPr>
-        <p:spPr>
-          <a:xfrm>
-            <a:off x="3895344" y="2997517"/>
-            <a:ext cx="640080" cy="276891"/>
-          </a:xfrm>
-          <a:prstGeom prst="roundRect">
-            <a:avLst>
-              <a:gd name="adj" fmla="val 2000"/>
-            </a:avLst>
-          </a:prstGeom>
-          <a:solidFill>
-            <a:srgbClr val="FF8896"/>
-          </a:solidFill>
-          <a:ln>
-            <a:noFill/>
-          </a:ln>
-        </p:spPr>
-        <p:style>
-          <a:lnRef idx="1">
-            <a:schemeClr val="accent1"/>
-          </a:lnRef>
-          <a:fillRef idx="3">
-            <a:schemeClr val="accent1"/>
-          </a:fillRef>
-          <a:effectRef idx="2">
-            <a:schemeClr val="accent1"/>
-          </a:effectRef>
-          <a:fontRef idx="minor">
-            <a:schemeClr val="lt1"/>
-          </a:fontRef>
-        </p:style>
-        <p:txBody>
-          <a:bodyPr rtlCol="0" anchor="ctr"/>
-          <a:lstStyle/>
-          <a:p>
-            <a:pPr algn="ctr"/>
-            <a:endParaRPr/>
-          </a:p>
-        </p:txBody>
-      </p:sp>
-      <p:sp>
-        <p:nvSpPr>
-          <p:cNvPr id="26" name="reveal_05"/>
-          <p:cNvSpPr txBox="1"/>
-          <p:nvPr/>
-        </p:nvSpPr>
-        <p:spPr>
-          <a:xfrm>
-            <a:off x="3694176" y="2723197"/>
-            <a:ext cx="1060704" cy="228600"/>
-          </a:xfrm>
-          <a:prstGeom prst="rect">
-            <a:avLst/>
-          </a:prstGeom>
-          <a:noFill/>
-        </p:spPr>
-        <p:txBody>
-          <a:bodyPr wrap="square" lIns="0" tIns="0" rIns="0" bIns="0">
-            <a:spAutoFit/>
-          </a:bodyPr>
-          <a:lstStyle/>
-          <a:p>
-            <a:pPr algn="ctr">
-              <a:spcAft>
-                <a:spcPts val="300"/>
-              </a:spcAft>
-              <a:defRPr sz="1200" b="1">
-                <a:solidFill>
-                  <a:srgbClr val="FF8896"/>
-                </a:solidFill>
-                <a:latin typeface="Aptos"/>
-              </a:defRPr>
-            </a:pPr>
-            <a:r>
-              <a:t>4,250</a:t>
-            </a:r>
-          </a:p>
-        </p:txBody>
-      </p:sp>
-      <p:sp>
-        <p:nvSpPr>
-          <p:cNvPr id="27" name="TextBox 26"/>
-          <p:cNvSpPr txBox="1"/>
-          <p:nvPr/>
-        </p:nvSpPr>
-        <p:spPr>
-          <a:xfrm>
-            <a:off x="3657600" y="5605272"/>
-            <a:ext cx="1143000" cy="265176"/>
-          </a:xfrm>
-          <a:prstGeom prst="rect">
-            <a:avLst/>
-          </a:prstGeom>
-          <a:noFill/>
-        </p:spPr>
-        <p:txBody>
-          <a:bodyPr wrap="square" lIns="0" tIns="0" rIns="0" bIns="0">
-            <a:spAutoFit/>
-          </a:bodyPr>
-          <a:lstStyle/>
-          <a:p>
-            <a:pPr algn="ctr">
-              <a:spcAft>
-                <a:spcPts val="300"/>
-              </a:spcAft>
-              <a:defRPr sz="1100" b="0">
-                <a:solidFill>
-                  <a:srgbClr val="A2B4CA"/>
-                </a:solidFill>
-                <a:latin typeface="Aptos"/>
-              </a:defRPr>
-            </a:pPr>
-            <a:r>
-              <a:t>− Living</a:t>
-            </a:r>
-          </a:p>
-        </p:txBody>
-      </p:sp>
-      <p:sp>
-        <p:nvSpPr>
-          <p:cNvPr id="28" name="wipe_06"/>
-          <p:cNvSpPr/>
-          <p:nvPr/>
-        </p:nvSpPr>
-        <p:spPr>
-          <a:xfrm>
-            <a:off x="5074920" y="3274409"/>
-            <a:ext cx="640080" cy="2166270"/>
-          </a:xfrm>
-          <a:prstGeom prst="roundRect">
-            <a:avLst>
-              <a:gd name="adj" fmla="val 2000"/>
-            </a:avLst>
-          </a:prstGeom>
-          <a:solidFill>
-            <a:srgbClr val="6BB9FF"/>
-          </a:solidFill>
-          <a:ln>
-            <a:noFill/>
-          </a:ln>
-        </p:spPr>
-        <p:style>
-          <a:lnRef idx="1">
-            <a:schemeClr val="accent1"/>
-          </a:lnRef>
-          <a:fillRef idx="3">
-            <a:schemeClr val="accent1"/>
-          </a:fillRef>
-          <a:effectRef idx="2">
-            <a:schemeClr val="accent1"/>
-          </a:effectRef>
-          <a:fontRef idx="minor">
-            <a:schemeClr val="lt1"/>
-          </a:fontRef>
-        </p:style>
-        <p:txBody>
-          <a:bodyPr rtlCol="0" anchor="ctr"/>
-          <a:lstStyle/>
-          <a:p>
-            <a:pPr algn="ctr"/>
-            <a:endParaRPr/>
-          </a:p>
-        </p:txBody>
-      </p:sp>
-      <p:sp>
-        <p:nvSpPr>
-          <p:cNvPr id="29" name="reveal_06"/>
-          <p:cNvSpPr txBox="1"/>
-          <p:nvPr/>
-        </p:nvSpPr>
-        <p:spPr>
-          <a:xfrm>
-            <a:off x="4873752" y="3000089"/>
-            <a:ext cx="1060704" cy="228600"/>
-          </a:xfrm>
-          <a:prstGeom prst="rect">
-            <a:avLst/>
-          </a:prstGeom>
-          <a:noFill/>
-        </p:spPr>
-        <p:txBody>
-          <a:bodyPr wrap="square" lIns="0" tIns="0" rIns="0" bIns="0">
-            <a:spAutoFit/>
-          </a:bodyPr>
-          <a:lstStyle/>
-          <a:p>
-            <a:pPr algn="ctr">
-              <a:spcAft>
-                <a:spcPts val="300"/>
-              </a:spcAft>
-              <a:defRPr sz="1200" b="1">
-                <a:solidFill>
-                  <a:srgbClr val="6BB9FF"/>
-                </a:solidFill>
-                <a:latin typeface="Aptos"/>
-              </a:defRPr>
-            </a:pPr>
-            <a:r>
-              <a:t>33,250</a:t>
-            </a:r>
-          </a:p>
-        </p:txBody>
-      </p:sp>
-      <p:sp>
-        <p:nvSpPr>
-          <p:cNvPr id="30" name="TextBox 29"/>
-          <p:cNvSpPr txBox="1"/>
-          <p:nvPr/>
-        </p:nvSpPr>
-        <p:spPr>
-          <a:xfrm>
-            <a:off x="4837176" y="5605272"/>
-            <a:ext cx="1143000" cy="265176"/>
-          </a:xfrm>
-          <a:prstGeom prst="rect">
-            <a:avLst/>
-          </a:prstGeom>
-          <a:noFill/>
-        </p:spPr>
-        <p:txBody>
-          <a:bodyPr wrap="square" lIns="0" tIns="0" rIns="0" bIns="0">
-            <a:spAutoFit/>
-          </a:bodyPr>
-          <a:lstStyle/>
-          <a:p>
-            <a:pPr algn="ctr">
-              <a:spcAft>
-                <a:spcPts val="300"/>
-              </a:spcAft>
-              <a:defRPr sz="1100" b="0">
-                <a:solidFill>
-                  <a:srgbClr val="A2B4CA"/>
-                </a:solidFill>
-                <a:latin typeface="Aptos"/>
-              </a:defRPr>
-            </a:pPr>
-            <a:r>
-              <a:t>Projected</a:t>
-            </a:r>
-          </a:p>
-        </p:txBody>
-      </p:sp>
-      <p:sp>
-        <p:nvSpPr>
-          <p:cNvPr id="31" name="wipe_07"/>
-          <p:cNvSpPr/>
-          <p:nvPr/>
-        </p:nvSpPr>
-        <p:spPr>
-          <a:xfrm>
-            <a:off x="6254496" y="2834640"/>
-            <a:ext cx="640080" cy="2606040"/>
-          </a:xfrm>
-          <a:prstGeom prst="roundRect">
-            <a:avLst>
-              <a:gd name="adj" fmla="val 2000"/>
-            </a:avLst>
-          </a:prstGeom>
-          <a:solidFill>
-            <a:srgbClr val="F3C969"/>
-          </a:solidFill>
-          <a:ln>
-            <a:noFill/>
-          </a:ln>
-        </p:spPr>
-        <p:style>
-          <a:lnRef idx="1">
-            <a:schemeClr val="accent1"/>
-          </a:lnRef>
-          <a:fillRef idx="3">
-            <a:schemeClr val="accent1"/>
-          </a:fillRef>
-          <a:effectRef idx="2">
-            <a:schemeClr val="accent1"/>
-          </a:effectRef>
-          <a:fontRef idx="minor">
-            <a:schemeClr val="lt1"/>
-          </a:fontRef>
-        </p:style>
-        <p:txBody>
-          <a:bodyPr rtlCol="0" anchor="ctr"/>
-          <a:lstStyle/>
-          <a:p>
-            <a:pPr algn="ctr"/>
-            <a:endParaRPr/>
-          </a:p>
-        </p:txBody>
-      </p:sp>
-      <p:sp>
-        <p:nvSpPr>
-          <p:cNvPr id="32" name="reveal_07"/>
-          <p:cNvSpPr txBox="1"/>
-          <p:nvPr/>
-        </p:nvSpPr>
-        <p:spPr>
-          <a:xfrm>
-            <a:off x="6053328" y="2560320"/>
-            <a:ext cx="1060704" cy="228600"/>
-          </a:xfrm>
-          <a:prstGeom prst="rect">
-            <a:avLst/>
-          </a:prstGeom>
-          <a:noFill/>
-        </p:spPr>
-        <p:txBody>
-          <a:bodyPr wrap="square" lIns="0" tIns="0" rIns="0" bIns="0">
-            <a:spAutoFit/>
-          </a:bodyPr>
-          <a:lstStyle/>
-          <a:p>
-            <a:pPr algn="ctr">
-              <a:spcAft>
-                <a:spcPts val="300"/>
-              </a:spcAft>
-              <a:defRPr sz="1200" b="1">
-                <a:solidFill>
-                  <a:srgbClr val="F3C969"/>
-                </a:solidFill>
-                <a:latin typeface="Aptos"/>
-              </a:defRPr>
-            </a:pPr>
-            <a:r>
-              <a:t>40,000</a:t>
-            </a:r>
-          </a:p>
-        </p:txBody>
-      </p:sp>
-      <p:sp>
-        <p:nvSpPr>
-          <p:cNvPr id="33" name="TextBox 32"/>
-          <p:cNvSpPr txBox="1"/>
-          <p:nvPr/>
-        </p:nvSpPr>
-        <p:spPr>
-          <a:xfrm>
-            <a:off x="6016752" y="5605272"/>
-            <a:ext cx="1143000" cy="265176"/>
-          </a:xfrm>
-          <a:prstGeom prst="rect">
-            <a:avLst/>
-          </a:prstGeom>
-          <a:noFill/>
-        </p:spPr>
-        <p:txBody>
-          <a:bodyPr wrap="square" lIns="0" tIns="0" rIns="0" bIns="0">
-            <a:spAutoFit/>
-          </a:bodyPr>
-          <a:lstStyle/>
-          <a:p>
-            <a:pPr algn="ctr">
-              <a:spcAft>
-                <a:spcPts val="300"/>
-              </a:spcAft>
-              <a:defRPr sz="1100" b="0">
-                <a:solidFill>
-                  <a:srgbClr val="A2B4CA"/>
-                </a:solidFill>
-                <a:latin typeface="Aptos"/>
-              </a:defRPr>
-            </a:pPr>
-            <a:r>
-              <a:t>Tuition</a:t>
-            </a:r>
-          </a:p>
-        </p:txBody>
-      </p:sp>
-      <p:sp>
-        <p:nvSpPr>
-          <p:cNvPr id="34" name="TextBox 33"/>
-          <p:cNvSpPr txBox="1"/>
-          <p:nvPr/>
-        </p:nvSpPr>
-        <p:spPr>
-          <a:xfrm>
-            <a:off x="768096" y="5916168"/>
-            <a:ext cx="6675120" cy="201168"/>
-          </a:xfrm>
-          <a:prstGeom prst="rect">
-            <a:avLst/>
-          </a:prstGeom>
-          <a:noFill/>
-        </p:spPr>
-        <p:txBody>
-          <a:bodyPr wrap="square" lIns="0" tIns="0" rIns="0" bIns="0">
-            <a:spAutoFit/>
-          </a:bodyPr>
-          <a:lstStyle/>
-          <a:p>
-            <a:pPr>
-              <a:spcAft>
-                <a:spcPts val="300"/>
-              </a:spcAft>
-              <a:defRPr sz="1000" b="0">
-                <a:solidFill>
-                  <a:srgbClr val="A2B4CA"/>
-                </a:solidFill>
-                <a:latin typeface="Aptos"/>
-              </a:defRPr>
-            </a:pPr>
-            <a:r>
-              <a:t>CNY · two-month example · scholarship = 0</a:t>
-            </a:r>
-          </a:p>
-        </p:txBody>
-      </p:sp>
-      <p:sp>
-        <p:nvSpPr>
-          <p:cNvPr id="35" name="Rounded Rectangle 34"/>
-          <p:cNvSpPr/>
-          <p:nvPr/>
-        </p:nvSpPr>
-        <p:spPr>
-          <a:xfrm>
-            <a:off x="8046720" y="1920240"/>
-            <a:ext cx="3639312" cy="4224528"/>
-          </a:xfrm>
-          <a:prstGeom prst="roundRect">
-            <a:avLst>
-              <a:gd name="adj" fmla="val 10000"/>
-            </a:avLst>
-          </a:prstGeom>
-          <a:solidFill>
-            <a:srgbClr val="101E30"/>
-          </a:solidFill>
-          <a:ln>
-            <a:noFill/>
-          </a:ln>
-        </p:spPr>
-        <p:style>
-          <a:lnRef idx="1">
-            <a:schemeClr val="accent1"/>
-          </a:lnRef>
-          <a:fillRef idx="3">
-            <a:schemeClr val="accent1"/>
-          </a:fillRef>
-          <a:effectRef idx="2">
-            <a:schemeClr val="accent1"/>
-          </a:effectRef>
-          <a:fontRef idx="minor">
-            <a:schemeClr val="lt1"/>
-          </a:fontRef>
-        </p:style>
-        <p:txBody>
-          <a:bodyPr rtlCol="0" anchor="ctr"/>
-          <a:lstStyle/>
-          <a:p>
-            <a:pPr algn="ctr"/>
-            <a:endParaRPr/>
-          </a:p>
-        </p:txBody>
-      </p:sp>
       <p:graphicFrame>
         <p:nvGraphicFramePr>
           <p:cNvPr id="36" name="chart_03"/>
@@ -8388,6 +9690,7 @@
               </a:defRPr>
             </a:pPr>
             <a:r>
+              <a:rPr dirty="0"/>
               <a:t>UNFUNDED TUITION</a:t>
             </a:r>
           </a:p>
@@ -8498,24 +9801,15 @@
                                   </p:childTnLst>
                                 </p:cTn>
                               </p:par>
-                            </p:childTnLst>
-                          </p:cTn>
-                        </p:par>
-                        <p:par>
-                          <p:cTn id="8" fill="hold">
-                            <p:stCondLst>
-                              <p:cond delay="600"/>
-                            </p:stCondLst>
-                            <p:childTnLst>
                               <p:par>
-                                <p:cTn id="9" presetID="22" presetClass="entr" presetSubtype="4" fill="hold" grpId="0" nodeType="afterEffect">
+                                <p:cTn id="8" presetID="21" presetClass="entr" presetSubtype="1" fill="hold" grpId="0" nodeType="withEffect">
                                   <p:stCondLst>
                                     <p:cond delay="0"/>
                                   </p:stCondLst>
                                   <p:childTnLst>
                                     <p:set>
                                       <p:cBhvr>
-                                        <p:cTn id="10" dur="1" fill="hold">
+                                        <p:cTn id="9" dur="1" fill="hold">
                                           <p:stCondLst>
                                             <p:cond delay="0"/>
                                           </p:stCondLst>
@@ -8531,81 +9825,11 @@
                                         <p:strVal val="visible"/>
                                       </p:to>
                                     </p:set>
-                                    <p:animEffect transition="in" filter="wipe(down)">
-                                      <p:cBhvr>
-                                        <p:cTn id="11" dur="600"/>
+                                    <p:animEffect transition="in" filter="wheel(1)">
+                                      <p:cBhvr>
+                                        <p:cTn id="10" dur="2000"/>
                                         <p:tgtEl>
                                           <p:spTgt spid="36"/>
-                                        </p:tgtEl>
-                                      </p:cBhvr>
-                                    </p:animEffect>
-                                  </p:childTnLst>
-                                </p:cTn>
-                              </p:par>
-                              <p:par>
-                                <p:cTn id="12" presetID="10" presetClass="entr" presetSubtype="0" fill="hold" grpId="0" nodeType="withEffect">
-                                  <p:stCondLst>
-                                    <p:cond delay="0"/>
-                                  </p:stCondLst>
-                                  <p:childTnLst>
-                                    <p:set>
-                                      <p:cBhvr>
-                                        <p:cTn id="13" dur="1" fill="hold">
-                                          <p:stCondLst>
-                                            <p:cond delay="0"/>
-                                          </p:stCondLst>
-                                        </p:cTn>
-                                        <p:tgtEl>
-                                          <p:spTgt spid="20"/>
-                                        </p:tgtEl>
-                                        <p:attrNameLst>
-                                          <p:attrName>style.visibility</p:attrName>
-                                        </p:attrNameLst>
-                                      </p:cBhvr>
-                                      <p:to>
-                                        <p:strVal val="visible"/>
-                                      </p:to>
-                                    </p:set>
-                                    <p:animEffect transition="in" filter="fade">
-                                      <p:cBhvr>
-                                        <p:cTn id="14" dur="600"/>
-                                        <p:tgtEl>
-                                          <p:spTgt spid="20"/>
-                                        </p:tgtEl>
-                                      </p:cBhvr>
-                                    </p:animEffect>
-                                  </p:childTnLst>
-                                </p:cTn>
-                              </p:par>
-                              <p:par>
-                                <p:cTn id="15" presetID="22" presetClass="entr" presetSubtype="4" fill="hold" grpId="0" nodeType="withEffect">
-                                  <p:stCondLst>
-                                    <p:cond delay="0"/>
-                                  </p:stCondLst>
-                                  <p:childTnLst>
-                                    <p:set>
-                                      <p:cBhvr>
-                                        <p:cTn id="16" dur="1" fill="hold">
-                                          <p:stCondLst>
-                                            <p:cond delay="0"/>
-                                          </p:stCondLst>
-                                        </p:cTn>
-                                        <p:tgtEl>
-                                          <p:spTgt spid="19"/>
-                                        </p:tgtEl>
-                                        <p:attrNameLst>
-                                          <p:attrName>style.visibility</p:attrName>
-                                        </p:attrNameLst>
-                                      </p:cBhvr>
-                                      <p:to>
-                                        <p:strVal val="visible"/>
-                                      </p:to>
-                                    </p:set>
-                                    <p:animEffect transition="in" filter="wipe(down)">
-                                      <p:cBhvr>
-                                        <p:cTn id="17" dur="600"/>
-                                        <p:tgtEl>
-                                          <p:spTgt spid="19"/>
                                         </p:tgtEl>
                                       </p:cBhvr>
                                     </p:animEffect>
@@ -8616,26 +9840,61 @@
                           </p:cTn>
                         </p:par>
                         <p:par>
-                          <p:cTn id="18" fill="hold">
+                          <p:cTn id="11" fill="hold">
                             <p:stCondLst>
-                              <p:cond delay="1200"/>
+                              <p:cond delay="2000"/>
                             </p:stCondLst>
                             <p:childTnLst>
                               <p:par>
-                                <p:cTn id="19" presetID="22" presetClass="entr" presetSubtype="4" fill="hold" grpId="0" nodeType="afterEffect">
+                                <p:cTn id="12" presetID="10" presetClass="entr" presetSubtype="0" fill="hold" grpId="0" nodeType="afterEffect">
                                   <p:stCondLst>
                                     <p:cond delay="0"/>
                                   </p:stCondLst>
                                   <p:childTnLst>
                                     <p:set>
                                       <p:cBhvr>
-                                        <p:cTn id="20" dur="1" fill="hold">
+                                        <p:cTn id="13" dur="1" fill="hold">
                                           <p:stCondLst>
                                             <p:cond delay="0"/>
                                           </p:stCondLst>
                                         </p:cTn>
                                         <p:tgtEl>
-                                          <p:spTgt spid="22"/>
+                                          <p:spTgt spid="40"/>
+                                        </p:tgtEl>
+                                        <p:attrNameLst>
+                                          <p:attrName>style.visibility</p:attrName>
+                                        </p:attrNameLst>
+                                      </p:cBhvr>
+                                      <p:to>
+                                        <p:strVal val="visible"/>
+                                      </p:to>
+                                    </p:set>
+                                    <p:animEffect transition="in" filter="fade">
+                                      <p:cBhvr>
+                                        <p:cTn id="14" dur="600"/>
+                                        <p:tgtEl>
+                                          <p:spTgt spid="40"/>
+                                        </p:tgtEl>
+                                      </p:cBhvr>
+                                    </p:animEffect>
+                                  </p:childTnLst>
+                                </p:cTn>
+                              </p:par>
+                              <p:par>
+                                <p:cTn id="15" presetID="22" presetClass="entr" presetSubtype="4" fill="hold" nodeType="withEffect">
+                                  <p:stCondLst>
+                                    <p:cond delay="0"/>
+                                  </p:stCondLst>
+                                  <p:childTnLst>
+                                    <p:set>
+                                      <p:cBhvr>
+                                        <p:cTn id="16" dur="1" fill="hold">
+                                          <p:stCondLst>
+                                            <p:cond delay="0"/>
+                                          </p:stCondLst>
+                                        </p:cTn>
+                                        <p:tgtEl>
+                                          <p:spTgt spid="45"/>
                                         </p:tgtEl>
                                         <p:attrNameLst>
                                           <p:attrName>style.visibility</p:attrName>
@@ -8647,9 +9906,9 @@
                                     </p:set>
                                     <p:animEffect transition="in" filter="wipe(down)">
                                       <p:cBhvr>
-                                        <p:cTn id="21" dur="600"/>
-                                        <p:tgtEl>
-                                          <p:spTgt spid="22"/>
+                                        <p:cTn id="17" dur="500"/>
+                                        <p:tgtEl>
+                                          <p:spTgt spid="45"/>
                                         </p:tgtEl>
                                       </p:cBhvr>
                                     </p:animEffect>
@@ -8657,20 +9916,20 @@
                                 </p:cTn>
                               </p:par>
                               <p:par>
-                                <p:cTn id="22" presetID="10" presetClass="entr" presetSubtype="0" fill="hold" grpId="0" nodeType="withEffect">
+                                <p:cTn id="18" presetID="22" presetClass="entr" presetSubtype="4" fill="hold" nodeType="withEffect">
                                   <p:stCondLst>
                                     <p:cond delay="0"/>
                                   </p:stCondLst>
                                   <p:childTnLst>
                                     <p:set>
                                       <p:cBhvr>
-                                        <p:cTn id="23" dur="1" fill="hold">
+                                        <p:cTn id="19" dur="1" fill="hold">
                                           <p:stCondLst>
                                             <p:cond delay="0"/>
                                           </p:stCondLst>
                                         </p:cTn>
                                         <p:tgtEl>
-                                          <p:spTgt spid="23"/>
+                                          <p:spTgt spid="43"/>
                                         </p:tgtEl>
                                         <p:attrNameLst>
                                           <p:attrName>style.visibility</p:attrName>
@@ -8680,41 +9939,32 @@
                                         <p:strVal val="visible"/>
                                       </p:to>
                                     </p:set>
-                                    <p:animEffect transition="in" filter="fade">
-                                      <p:cBhvr>
-                                        <p:cTn id="24" dur="600"/>
-                                        <p:tgtEl>
-                                          <p:spTgt spid="23"/>
+                                    <p:animEffect transition="in" filter="wipe(down)">
+                                      <p:cBhvr>
+                                        <p:cTn id="20" dur="500"/>
+                                        <p:tgtEl>
+                                          <p:spTgt spid="43"/>
                                         </p:tgtEl>
                                       </p:cBhvr>
                                     </p:animEffect>
                                   </p:childTnLst>
                                 </p:cTn>
                               </p:par>
-                            </p:childTnLst>
-                          </p:cTn>
-                        </p:par>
-                        <p:par>
-                          <p:cTn id="25" fill="hold">
-                            <p:stCondLst>
-                              <p:cond delay="1800"/>
-                            </p:stCondLst>
-                            <p:childTnLst>
                               <p:par>
-                                <p:cTn id="26" presetID="10" presetClass="entr" presetSubtype="0" fill="hold" grpId="0" nodeType="afterEffect">
+                                <p:cTn id="21" presetID="22" presetClass="entr" presetSubtype="4" fill="hold" nodeType="withEffect">
                                   <p:stCondLst>
                                     <p:cond delay="0"/>
                                   </p:stCondLst>
                                   <p:childTnLst>
                                     <p:set>
                                       <p:cBhvr>
-                                        <p:cTn id="27" dur="1" fill="hold">
+                                        <p:cTn id="22" dur="1" fill="hold">
                                           <p:stCondLst>
                                             <p:cond delay="0"/>
                                           </p:stCondLst>
                                         </p:cTn>
                                         <p:tgtEl>
-                                          <p:spTgt spid="26"/>
+                                          <p:spTgt spid="44"/>
                                         </p:tgtEl>
                                         <p:attrNameLst>
                                           <p:attrName>style.visibility</p:attrName>
@@ -8724,11 +9974,11 @@
                                         <p:strVal val="visible"/>
                                       </p:to>
                                     </p:set>
-                                    <p:animEffect transition="in" filter="fade">
-                                      <p:cBhvr>
-                                        <p:cTn id="28" dur="600"/>
-                                        <p:tgtEl>
-                                          <p:spTgt spid="26"/>
+                                    <p:animEffect transition="in" filter="wipe(down)">
+                                      <p:cBhvr>
+                                        <p:cTn id="23" dur="500"/>
+                                        <p:tgtEl>
+                                          <p:spTgt spid="44"/>
                                         </p:tgtEl>
                                       </p:cBhvr>
                                     </p:animEffect>
@@ -8736,20 +9986,20 @@
                                 </p:cTn>
                               </p:par>
                               <p:par>
-                                <p:cTn id="29" presetID="22" presetClass="entr" presetSubtype="4" fill="hold" grpId="0" nodeType="withEffect">
+                                <p:cTn id="24" presetID="22" presetClass="entr" presetSubtype="4" fill="hold" nodeType="withEffect">
                                   <p:stCondLst>
                                     <p:cond delay="0"/>
                                   </p:stCondLst>
                                   <p:childTnLst>
                                     <p:set>
                                       <p:cBhvr>
-                                        <p:cTn id="30" dur="1" fill="hold">
+                                        <p:cTn id="25" dur="1" fill="hold">
                                           <p:stCondLst>
                                             <p:cond delay="0"/>
                                           </p:stCondLst>
                                         </p:cTn>
                                         <p:tgtEl>
-                                          <p:spTgt spid="25"/>
+                                          <p:spTgt spid="41"/>
                                         </p:tgtEl>
                                         <p:attrNameLst>
                                           <p:attrName>style.visibility</p:attrName>
@@ -8761,74 +10011,30 @@
                                     </p:set>
                                     <p:animEffect transition="in" filter="wipe(down)">
                                       <p:cBhvr>
-                                        <p:cTn id="31" dur="600"/>
-                                        <p:tgtEl>
-                                          <p:spTgt spid="25"/>
+                                        <p:cTn id="26" dur="500"/>
+                                        <p:tgtEl>
+                                          <p:spTgt spid="41"/>
                                         </p:tgtEl>
                                       </p:cBhvr>
                                     </p:animEffect>
                                   </p:childTnLst>
                                 </p:cTn>
                               </p:par>
-                            </p:childTnLst>
-                          </p:cTn>
-                        </p:par>
-                        <p:par>
-                          <p:cTn id="32" fill="hold">
-                            <p:stCondLst>
-                              <p:cond delay="2400"/>
-                            </p:stCondLst>
-                            <p:childTnLst>
                               <p:par>
-                                <p:cTn id="33" presetID="10" presetClass="entr" presetSubtype="0" fill="hold" grpId="0" nodeType="afterEffect">
+                                <p:cTn id="27" presetID="22" presetClass="entr" presetSubtype="4" fill="hold" nodeType="withEffect">
                                   <p:stCondLst>
                                     <p:cond delay="0"/>
                                   </p:stCondLst>
                                   <p:childTnLst>
                                     <p:set>
                                       <p:cBhvr>
-                                        <p:cTn id="34" dur="1" fill="hold">
+                                        <p:cTn id="28" dur="1" fill="hold">
                                           <p:stCondLst>
                                             <p:cond delay="0"/>
                                           </p:stCondLst>
                                         </p:cTn>
                                         <p:tgtEl>
-                                          <p:spTgt spid="40"/>
-                                        </p:tgtEl>
-                                        <p:attrNameLst>
-                                          <p:attrName>style.visibility</p:attrName>
-                                        </p:attrNameLst>
-                                      </p:cBhvr>
-                                      <p:to>
-                                        <p:strVal val="visible"/>
-                                      </p:to>
-                                    </p:set>
-                                    <p:animEffect transition="in" filter="fade">
-                                      <p:cBhvr>
-                                        <p:cTn id="35" dur="600"/>
-                                        <p:tgtEl>
-                                          <p:spTgt spid="40"/>
-                                        </p:tgtEl>
-                                      </p:cBhvr>
-                                    </p:animEffect>
-                                  </p:childTnLst>
-                                </p:cTn>
-                              </p:par>
-                              <p:par>
-                                <p:cTn id="36" presetID="22" presetClass="entr" presetSubtype="4" fill="hold" grpId="0" nodeType="withEffect">
-                                  <p:stCondLst>
-                                    <p:cond delay="0"/>
-                                  </p:stCondLst>
-                                  <p:childTnLst>
-                                    <p:set>
-                                      <p:cBhvr>
-                                        <p:cTn id="37" dur="1" fill="hold">
-                                          <p:stCondLst>
-                                            <p:cond delay="0"/>
-                                          </p:stCondLst>
-                                        </p:cTn>
-                                        <p:tgtEl>
-                                          <p:spTgt spid="28"/>
+                                          <p:spTgt spid="42"/>
                                         </p:tgtEl>
                                         <p:attrNameLst>
                                           <p:attrName>style.visibility</p:attrName>
@@ -8840,123 +10046,9 @@
                                     </p:set>
                                     <p:animEffect transition="in" filter="wipe(down)">
                                       <p:cBhvr>
-                                        <p:cTn id="38" dur="600"/>
-                                        <p:tgtEl>
-                                          <p:spTgt spid="28"/>
-                                        </p:tgtEl>
-                                      </p:cBhvr>
-                                    </p:animEffect>
-                                  </p:childTnLst>
-                                </p:cTn>
-                              </p:par>
-                              <p:par>
-                                <p:cTn id="39" presetID="10" presetClass="entr" presetSubtype="0" fill="hold" grpId="0" nodeType="withEffect">
-                                  <p:stCondLst>
-                                    <p:cond delay="0"/>
-                                  </p:stCondLst>
-                                  <p:childTnLst>
-                                    <p:set>
-                                      <p:cBhvr>
-                                        <p:cTn id="40" dur="1" fill="hold">
-                                          <p:stCondLst>
-                                            <p:cond delay="0"/>
-                                          </p:stCondLst>
-                                        </p:cTn>
-                                        <p:tgtEl>
-                                          <p:spTgt spid="29"/>
-                                        </p:tgtEl>
-                                        <p:attrNameLst>
-                                          <p:attrName>style.visibility</p:attrName>
-                                        </p:attrNameLst>
-                                      </p:cBhvr>
-                                      <p:to>
-                                        <p:strVal val="visible"/>
-                                      </p:to>
-                                    </p:set>
-                                    <p:animEffect transition="in" filter="fade">
-                                      <p:cBhvr>
-                                        <p:cTn id="41" dur="600"/>
-                                        <p:tgtEl>
-                                          <p:spTgt spid="29"/>
-                                        </p:tgtEl>
-                                      </p:cBhvr>
-                                    </p:animEffect>
-                                  </p:childTnLst>
-                                </p:cTn>
-                              </p:par>
-                            </p:childTnLst>
-                          </p:cTn>
-                        </p:par>
-                        <p:par>
-                          <p:cTn id="42" fill="hold">
-                            <p:stCondLst>
-                              <p:cond delay="3000"/>
-                            </p:stCondLst>
-                            <p:childTnLst>
-                              <p:par>
-                                <p:cTn id="43" presetID="22" presetClass="entr" presetSubtype="4" fill="hold" grpId="0" nodeType="afterEffect">
-                                  <p:stCondLst>
-                                    <p:cond delay="0"/>
-                                  </p:stCondLst>
-                                  <p:childTnLst>
-                                    <p:set>
-                                      <p:cBhvr>
-                                        <p:cTn id="44" dur="1" fill="hold">
-                                          <p:stCondLst>
-                                            <p:cond delay="0"/>
-                                          </p:stCondLst>
-                                        </p:cTn>
-                                        <p:tgtEl>
-                                          <p:spTgt spid="31"/>
-                                        </p:tgtEl>
-                                        <p:attrNameLst>
-                                          <p:attrName>style.visibility</p:attrName>
-                                        </p:attrNameLst>
-                                      </p:cBhvr>
-                                      <p:to>
-                                        <p:strVal val="visible"/>
-                                      </p:to>
-                                    </p:set>
-                                    <p:animEffect transition="in" filter="wipe(down)">
-                                      <p:cBhvr>
-                                        <p:cTn id="45" dur="600"/>
-                                        <p:tgtEl>
-                                          <p:spTgt spid="31"/>
-                                        </p:tgtEl>
-                                      </p:cBhvr>
-                                    </p:animEffect>
-                                  </p:childTnLst>
-                                </p:cTn>
-                              </p:par>
-                              <p:par>
-                                <p:cTn id="46" presetID="10" presetClass="entr" presetSubtype="0" fill="hold" grpId="0" nodeType="withEffect">
-                                  <p:stCondLst>
-                                    <p:cond delay="0"/>
-                                  </p:stCondLst>
-                                  <p:childTnLst>
-                                    <p:set>
-                                      <p:cBhvr>
-                                        <p:cTn id="47" dur="1" fill="hold">
-                                          <p:stCondLst>
-                                            <p:cond delay="0"/>
-                                          </p:stCondLst>
-                                        </p:cTn>
-                                        <p:tgtEl>
-                                          <p:spTgt spid="32"/>
-                                        </p:tgtEl>
-                                        <p:attrNameLst>
-                                          <p:attrName>style.visibility</p:attrName>
-                                        </p:attrNameLst>
-                                      </p:cBhvr>
-                                      <p:to>
-                                        <p:strVal val="visible"/>
-                                      </p:to>
-                                    </p:set>
-                                    <p:animEffect transition="in" filter="fade">
-                                      <p:cBhvr>
-                                        <p:cTn id="48" dur="600"/>
-                                        <p:tgtEl>
-                                          <p:spTgt spid="32"/>
+                                        <p:cTn id="29" dur="500"/>
+                                        <p:tgtEl>
+                                          <p:spTgt spid="42"/>
                                         </p:tgtEl>
                                       </p:cBhvr>
                                     </p:animEffect>
@@ -8992,16 +10084,6 @@
     </p:tnLst>
     <p:bldLst>
       <p:bldP spid="3" grpId="0"/>
-      <p:bldP spid="19" grpId="0" animBg="1"/>
-      <p:bldP spid="20" grpId="0"/>
-      <p:bldP spid="22" grpId="0" animBg="1"/>
-      <p:bldP spid="23" grpId="0"/>
-      <p:bldP spid="25" grpId="0" animBg="1"/>
-      <p:bldP spid="26" grpId="0"/>
-      <p:bldP spid="28" grpId="0" animBg="1"/>
-      <p:bldP spid="29" grpId="0"/>
-      <p:bldP spid="31" grpId="0" animBg="1"/>
-      <p:bldP spid="32" grpId="0"/>
       <p:bldGraphic spid="36" grpId="0">
         <p:bldAsOne/>
       </p:bldGraphic>
@@ -9011,7 +10093,7 @@
 </p:sld>
 </file>
 
-<file path=ppt/slides/slide3.xml><?xml version="1.0" encoding="utf-8"?>
+<file path=ppt/slides/slide4.xml><?xml version="1.0" encoding="utf-8"?>
 <p:sld xmlns:a="http://schemas.openxmlformats.org/drawingml/2006/main" xmlns:r="http://schemas.openxmlformats.org/officeDocument/2006/relationships" xmlns:p="http://schemas.openxmlformats.org/presentationml/2006/main">
   <p:cSld>
     <p:bg>
@@ -10438,7 +11520,7 @@
 </p:sld>
 </file>
 
-<file path=ppt/slides/slide4.xml><?xml version="1.0" encoding="utf-8"?>
+<file path=ppt/slides/slide5.xml><?xml version="1.0" encoding="utf-8"?>
 <p:sld xmlns:a="http://schemas.openxmlformats.org/drawingml/2006/main" xmlns:r="http://schemas.openxmlformats.org/officeDocument/2006/relationships" xmlns:p="http://schemas.openxmlformats.org/presentationml/2006/main">
   <p:cSld>
     <p:bg>
@@ -10614,6 +11696,7 @@
               </a:defRPr>
             </a:pPr>
             <a:r>
+              <a:rPr dirty="0"/>
               <a:t>FINBRIDGE AI</a:t>
             </a:r>
           </a:p>
@@ -11851,7 +12934,7 @@
                                 </p:cTn>
                               </p:par>
                               <p:par>
-                                <p:cTn id="12" presetID="22" presetClass="entr" presetSubtype="2" fill="hold" grpId="0" nodeType="withEffect">
+                                <p:cTn id="12" presetID="22" presetClass="entr" presetSubtype="8" fill="hold" grpId="0" nodeType="withEffect">
                                   <p:stCondLst>
                                     <p:cond delay="0"/>
                                   </p:stCondLst>
@@ -11874,7 +12957,7 @@
                                         <p:strVal val="visible"/>
                                       </p:to>
                                     </p:set>
-                                    <p:animEffect transition="in" filter="wipe(right)">
+                                    <p:animEffect transition="in" filter="wipe(left)">
                                       <p:cBhvr>
                                         <p:cTn id="14" dur="600"/>
                                         <p:tgtEl>
@@ -12463,7 +13546,7 @@
 </p:sld>
 </file>
 
-<file path=ppt/slides/slide5.xml><?xml version="1.0" encoding="utf-8"?>
+<file path=ppt/slides/slide6.xml><?xml version="1.0" encoding="utf-8"?>
 <p:sld xmlns:a="http://schemas.openxmlformats.org/drawingml/2006/main" xmlns:r="http://schemas.openxmlformats.org/officeDocument/2006/relationships" xmlns:p="http://schemas.openxmlformats.org/presentationml/2006/main">
   <p:cSld>
     <p:bg>
@@ -14655,7 +15738,7 @@
 </p:sld>
 </file>
 
-<file path=ppt/slides/slide6.xml><?xml version="1.0" encoding="utf-8"?>
+<file path=ppt/slides/slide7.xml><?xml version="1.0" encoding="utf-8"?>
 <p:sld xmlns:a="http://schemas.openxmlformats.org/drawingml/2006/main" xmlns:r="http://schemas.openxmlformats.org/officeDocument/2006/relationships" xmlns:p="http://schemas.openxmlformats.org/presentationml/2006/main">
   <p:cSld>
     <p:bg>
@@ -16574,7 +17657,7 @@
 </p:sld>
 </file>
 
-<file path=ppt/slides/slide7.xml><?xml version="1.0" encoding="utf-8"?>
+<file path=ppt/slides/slide8.xml><?xml version="1.0" encoding="utf-8"?>
 <p:sld xmlns:a="http://schemas.openxmlformats.org/drawingml/2006/main" xmlns:r="http://schemas.openxmlformats.org/officeDocument/2006/relationships" xmlns:p="http://schemas.openxmlformats.org/presentationml/2006/main">
   <p:cSld>
     <p:bg>
@@ -18360,7 +19443,7 @@
 </p:sld>
 </file>
 
-<file path=ppt/slides/slide8.xml><?xml version="1.0" encoding="utf-8"?>
+<file path=ppt/slides/slide9.xml><?xml version="1.0" encoding="utf-8"?>
 <p:sld xmlns:a="http://schemas.openxmlformats.org/drawingml/2006/main" xmlns:r="http://schemas.openxmlformats.org/officeDocument/2006/relationships" xmlns:p="http://schemas.openxmlformats.org/presentationml/2006/main">
   <p:cSld>
     <p:bg>
@@ -20150,1455 +21233,6 @@
       <p:bldP spid="25" grpId="0"/>
       <p:bldP spid="27" grpId="0"/>
       <p:bldP spid="28" grpId="0"/>
-    </p:bldLst>
-  </p:timing>
-</p:sld>
-</file>
-
-<file path=ppt/slides/slide9.xml><?xml version="1.0" encoding="utf-8"?>
-<p:sld xmlns:a="http://schemas.openxmlformats.org/drawingml/2006/main" xmlns:r="http://schemas.openxmlformats.org/officeDocument/2006/relationships" xmlns:p="http://schemas.openxmlformats.org/presentationml/2006/main">
-  <p:cSld>
-    <p:bg>
-      <p:bgPr>
-        <a:solidFill>
-          <a:srgbClr val="080F1B"/>
-        </a:solidFill>
-        <a:effectLst/>
-      </p:bgPr>
-    </p:bg>
-    <p:spTree>
-      <p:nvGrpSpPr>
-        <p:cNvPr id="1" name=""/>
-        <p:cNvGrpSpPr/>
-        <p:nvPr/>
-      </p:nvGrpSpPr>
-      <p:grpSpPr>
-        <a:xfrm>
-          <a:off x="0" y="0"/>
-          <a:ext cx="0" cy="0"/>
-          <a:chOff x="0" y="0"/>
-          <a:chExt cx="0" cy="0"/>
-        </a:xfrm>
-      </p:grpSpPr>
-      <p:sp>
-        <p:nvSpPr>
-          <p:cNvPr id="2" name="TextBox 1"/>
-          <p:cNvSpPr txBox="1"/>
-          <p:nvPr/>
-        </p:nvSpPr>
-        <p:spPr>
-          <a:xfrm>
-            <a:off x="502920" y="274320"/>
-            <a:ext cx="10058400" cy="228600"/>
-          </a:xfrm>
-          <a:prstGeom prst="rect">
-            <a:avLst/>
-          </a:prstGeom>
-          <a:noFill/>
-        </p:spPr>
-        <p:txBody>
-          <a:bodyPr wrap="square" lIns="0" tIns="0" rIns="0" bIns="0">
-            <a:spAutoFit/>
-          </a:bodyPr>
-          <a:lstStyle/>
-          <a:p>
-            <a:pPr>
-              <a:spcAft>
-                <a:spcPts val="300"/>
-              </a:spcAft>
-              <a:defRPr sz="1000" b="1">
-                <a:solidFill>
-                  <a:srgbClr val="63E6BE"/>
-                </a:solidFill>
-                <a:latin typeface="Aptos"/>
-              </a:defRPr>
-            </a:pPr>
-            <a:r>
-              <a:t>SECURITY &amp; PRIVACY</a:t>
-            </a:r>
-          </a:p>
-        </p:txBody>
-      </p:sp>
-      <p:sp>
-        <p:nvSpPr>
-          <p:cNvPr id="3" name="reveal_01"/>
-          <p:cNvSpPr txBox="1"/>
-          <p:nvPr/>
-        </p:nvSpPr>
-        <p:spPr>
-          <a:xfrm>
-            <a:off x="502920" y="768096"/>
-            <a:ext cx="11155680" cy="612648"/>
-          </a:xfrm>
-          <a:prstGeom prst="rect">
-            <a:avLst/>
-          </a:prstGeom>
-          <a:noFill/>
-        </p:spPr>
-        <p:txBody>
-          <a:bodyPr wrap="square" lIns="0" tIns="0" rIns="0" bIns="0">
-            <a:spAutoFit/>
-          </a:bodyPr>
-          <a:lstStyle/>
-          <a:p>
-            <a:pPr>
-              <a:spcAft>
-                <a:spcPts val="300"/>
-              </a:spcAft>
-              <a:defRPr sz="3100" b="1">
-                <a:solidFill>
-                  <a:srgbClr val="EDF5FF"/>
-                </a:solidFill>
-                <a:latin typeface="Aptos"/>
-              </a:defRPr>
-            </a:pPr>
-            <a:r>
-              <a:t>Security &amp; privacy</a:t>
-            </a:r>
-          </a:p>
-        </p:txBody>
-      </p:sp>
-      <p:sp>
-        <p:nvSpPr>
-          <p:cNvPr id="4" name="TextBox 3"/>
-          <p:cNvSpPr txBox="1"/>
-          <p:nvPr/>
-        </p:nvSpPr>
-        <p:spPr>
-          <a:xfrm>
-            <a:off x="521207" y="1389888"/>
-            <a:ext cx="10972800" cy="411480"/>
-          </a:xfrm>
-          <a:prstGeom prst="rect">
-            <a:avLst/>
-          </a:prstGeom>
-          <a:noFill/>
-        </p:spPr>
-        <p:txBody>
-          <a:bodyPr wrap="square" lIns="0" tIns="0" rIns="0" bIns="0">
-            <a:spAutoFit/>
-          </a:bodyPr>
-          <a:lstStyle/>
-          <a:p>
-            <a:pPr>
-              <a:spcAft>
-                <a:spcPts val="300"/>
-              </a:spcAft>
-              <a:defRPr sz="1300" b="0">
-                <a:solidFill>
-                  <a:srgbClr val="A2B4CA"/>
-                </a:solidFill>
-                <a:latin typeface="Aptos"/>
-              </a:defRPr>
-            </a:pPr>
-            <a:r>
-              <a:t>Controls are applied to each action and each field of financial context.</a:t>
-            </a:r>
-          </a:p>
-        </p:txBody>
-      </p:sp>
-      <p:sp>
-        <p:nvSpPr>
-          <p:cNvPr id="5" name="TextBox 4"/>
-          <p:cNvSpPr txBox="1"/>
-          <p:nvPr/>
-        </p:nvSpPr>
-        <p:spPr>
-          <a:xfrm>
-            <a:off x="502920" y="6510528"/>
-            <a:ext cx="3657600" cy="182880"/>
-          </a:xfrm>
-          <a:prstGeom prst="rect">
-            <a:avLst/>
-          </a:prstGeom>
-          <a:noFill/>
-        </p:spPr>
-        <p:txBody>
-          <a:bodyPr wrap="square" lIns="0" tIns="0" rIns="0" bIns="0">
-            <a:spAutoFit/>
-          </a:bodyPr>
-          <a:lstStyle/>
-          <a:p>
-            <a:pPr>
-              <a:spcAft>
-                <a:spcPts val="300"/>
-              </a:spcAft>
-              <a:defRPr sz="900" b="0">
-                <a:solidFill>
-                  <a:srgbClr val="A2B4CA"/>
-                </a:solidFill>
-                <a:latin typeface="Aptos"/>
-              </a:defRPr>
-            </a:pPr>
-            <a:r>
-              <a:t>FINBRIDGE AI</a:t>
-            </a:r>
-          </a:p>
-        </p:txBody>
-      </p:sp>
-      <p:sp>
-        <p:nvSpPr>
-          <p:cNvPr id="6" name="TextBox 5"/>
-          <p:cNvSpPr txBox="1"/>
-          <p:nvPr/>
-        </p:nvSpPr>
-        <p:spPr>
-          <a:xfrm>
-            <a:off x="10607040" y="6473952"/>
-            <a:ext cx="1078992" cy="228600"/>
-          </a:xfrm>
-          <a:prstGeom prst="rect">
-            <a:avLst/>
-          </a:prstGeom>
-          <a:noFill/>
-        </p:spPr>
-        <p:txBody>
-          <a:bodyPr wrap="square" lIns="0" tIns="0" rIns="0" bIns="0">
-            <a:spAutoFit/>
-          </a:bodyPr>
-          <a:lstStyle/>
-          <a:p>
-            <a:pPr algn="r">
-              <a:spcAft>
-                <a:spcPts val="300"/>
-              </a:spcAft>
-              <a:defRPr sz="1000" b="0">
-                <a:solidFill>
-                  <a:srgbClr val="A2B4CA"/>
-                </a:solidFill>
-                <a:latin typeface="Aptos"/>
-              </a:defRPr>
-            </a:pPr>
-            <a:r>
-              <a:t>09 / 10</a:t>
-            </a:r>
-          </a:p>
-        </p:txBody>
-      </p:sp>
-      <p:pic>
-        <p:nvPicPr>
-          <p:cNvPr id="7" name="reveal_02" descr="privacy.gif"/>
-          <p:cNvPicPr>
-            <a:picLocks noChangeAspect="1"/>
-          </p:cNvPicPr>
-          <p:nvPr/>
-        </p:nvPicPr>
-        <p:blipFill>
-          <a:blip r:embed="rId3"/>
-          <a:stretch>
-            <a:fillRect/>
-          </a:stretch>
-        </p:blipFill>
-        <p:spPr>
-          <a:xfrm>
-            <a:off x="502920" y="1920240"/>
-            <a:ext cx="6583680" cy="3895344"/>
-          </a:xfrm>
-          <a:prstGeom prst="rect">
-            <a:avLst/>
-          </a:prstGeom>
-        </p:spPr>
-      </p:pic>
-      <p:sp>
-        <p:nvSpPr>
-          <p:cNvPr id="8" name="Rounded Rectangle 7"/>
-          <p:cNvSpPr/>
-          <p:nvPr/>
-        </p:nvSpPr>
-        <p:spPr>
-          <a:xfrm>
-            <a:off x="7342631" y="2020824"/>
-            <a:ext cx="411480" cy="292608"/>
-          </a:xfrm>
-          <a:prstGeom prst="roundRect">
-            <a:avLst>
-              <a:gd name="adj" fmla="val 10000"/>
-            </a:avLst>
-          </a:prstGeom>
-          <a:solidFill>
-            <a:srgbClr val="6BB9FF"/>
-          </a:solidFill>
-          <a:ln>
-            <a:noFill/>
-          </a:ln>
-        </p:spPr>
-        <p:style>
-          <a:lnRef idx="1">
-            <a:schemeClr val="accent1"/>
-          </a:lnRef>
-          <a:fillRef idx="3">
-            <a:schemeClr val="accent1"/>
-          </a:fillRef>
-          <a:effectRef idx="2">
-            <a:schemeClr val="accent1"/>
-          </a:effectRef>
-          <a:fontRef idx="minor">
-            <a:schemeClr val="lt1"/>
-          </a:fontRef>
-        </p:style>
-        <p:txBody>
-          <a:bodyPr rtlCol="0" anchor="ctr"/>
-          <a:lstStyle/>
-          <a:p>
-            <a:pPr algn="ctr"/>
-            <a:endParaRPr/>
-          </a:p>
-        </p:txBody>
-      </p:sp>
-      <p:sp>
-        <p:nvSpPr>
-          <p:cNvPr id="9" name="TextBox 8"/>
-          <p:cNvSpPr txBox="1"/>
-          <p:nvPr/>
-        </p:nvSpPr>
-        <p:spPr>
-          <a:xfrm>
-            <a:off x="7415783" y="2061972"/>
-            <a:ext cx="265176" cy="210312"/>
-          </a:xfrm>
-          <a:prstGeom prst="rect">
-            <a:avLst/>
-          </a:prstGeom>
-          <a:noFill/>
-        </p:spPr>
-        <p:txBody>
-          <a:bodyPr wrap="square" lIns="0" tIns="0" rIns="0" bIns="0">
-            <a:spAutoFit/>
-          </a:bodyPr>
-          <a:lstStyle/>
-          <a:p>
-            <a:pPr>
-              <a:spcAft>
-                <a:spcPts val="300"/>
-              </a:spcAft>
-              <a:defRPr sz="1000" b="1">
-                <a:solidFill>
-                  <a:srgbClr val="080F1B"/>
-                </a:solidFill>
-                <a:latin typeface="Aptos"/>
-              </a:defRPr>
-            </a:pPr>
-            <a:r>
-              <a:t>01</a:t>
-            </a:r>
-          </a:p>
-        </p:txBody>
-      </p:sp>
-      <p:sp>
-        <p:nvSpPr>
-          <p:cNvPr id="10" name="reveal_03"/>
-          <p:cNvSpPr txBox="1"/>
-          <p:nvPr/>
-        </p:nvSpPr>
-        <p:spPr>
-          <a:xfrm>
-            <a:off x="7918704" y="2020824"/>
-            <a:ext cx="3749039" cy="274320"/>
-          </a:xfrm>
-          <a:prstGeom prst="rect">
-            <a:avLst/>
-          </a:prstGeom>
-          <a:noFill/>
-        </p:spPr>
-        <p:txBody>
-          <a:bodyPr wrap="square" lIns="0" tIns="0" rIns="0" bIns="0">
-            <a:spAutoFit/>
-          </a:bodyPr>
-          <a:lstStyle/>
-          <a:p>
-            <a:pPr>
-              <a:spcAft>
-                <a:spcPts val="300"/>
-              </a:spcAft>
-              <a:defRPr sz="1400" b="1">
-                <a:solidFill>
-                  <a:srgbClr val="EDF5FF"/>
-                </a:solidFill>
-                <a:latin typeface="Aptos"/>
-              </a:defRPr>
-            </a:pPr>
-            <a:r>
-              <a:t>IDENTITY</a:t>
-            </a:r>
-          </a:p>
-        </p:txBody>
-      </p:sp>
-      <p:sp>
-        <p:nvSpPr>
-          <p:cNvPr id="11" name="reveal_03"/>
-          <p:cNvSpPr txBox="1"/>
-          <p:nvPr/>
-        </p:nvSpPr>
-        <p:spPr>
-          <a:xfrm>
-            <a:off x="7918704" y="2414016"/>
-            <a:ext cx="3657600" cy="457200"/>
-          </a:xfrm>
-          <a:prstGeom prst="rect">
-            <a:avLst/>
-          </a:prstGeom>
-          <a:noFill/>
-        </p:spPr>
-        <p:txBody>
-          <a:bodyPr wrap="square" lIns="0" tIns="0" rIns="0" bIns="0">
-            <a:spAutoFit/>
-          </a:bodyPr>
-          <a:lstStyle/>
-          <a:p>
-            <a:pPr>
-              <a:spcAft>
-                <a:spcPts val="300"/>
-              </a:spcAft>
-              <a:defRPr sz="1300" b="0">
-                <a:solidFill>
-                  <a:srgbClr val="A2B4CA"/>
-                </a:solidFill>
-                <a:latin typeface="Aptos"/>
-              </a:defRPr>
-            </a:pPr>
-            <a:r>
-              <a:t>bcrypt hashes; signed sessions; revocation.</a:t>
-            </a:r>
-          </a:p>
-        </p:txBody>
-      </p:sp>
-      <p:sp>
-        <p:nvSpPr>
-          <p:cNvPr id="12" name="Rounded Rectangle 11"/>
-          <p:cNvSpPr/>
-          <p:nvPr/>
-        </p:nvSpPr>
-        <p:spPr>
-          <a:xfrm>
-            <a:off x="7342631" y="2953512"/>
-            <a:ext cx="411480" cy="292608"/>
-          </a:xfrm>
-          <a:prstGeom prst="roundRect">
-            <a:avLst>
-              <a:gd name="adj" fmla="val 10000"/>
-            </a:avLst>
-          </a:prstGeom>
-          <a:solidFill>
-            <a:srgbClr val="63E6BE"/>
-          </a:solidFill>
-          <a:ln>
-            <a:noFill/>
-          </a:ln>
-        </p:spPr>
-        <p:style>
-          <a:lnRef idx="1">
-            <a:schemeClr val="accent1"/>
-          </a:lnRef>
-          <a:fillRef idx="3">
-            <a:schemeClr val="accent1"/>
-          </a:fillRef>
-          <a:effectRef idx="2">
-            <a:schemeClr val="accent1"/>
-          </a:effectRef>
-          <a:fontRef idx="minor">
-            <a:schemeClr val="lt1"/>
-          </a:fontRef>
-        </p:style>
-        <p:txBody>
-          <a:bodyPr rtlCol="0" anchor="ctr"/>
-          <a:lstStyle/>
-          <a:p>
-            <a:pPr algn="ctr"/>
-            <a:endParaRPr/>
-          </a:p>
-        </p:txBody>
-      </p:sp>
-      <p:sp>
-        <p:nvSpPr>
-          <p:cNvPr id="13" name="TextBox 12"/>
-          <p:cNvSpPr txBox="1"/>
-          <p:nvPr/>
-        </p:nvSpPr>
-        <p:spPr>
-          <a:xfrm>
-            <a:off x="7415783" y="2994660"/>
-            <a:ext cx="265176" cy="210312"/>
-          </a:xfrm>
-          <a:prstGeom prst="rect">
-            <a:avLst/>
-          </a:prstGeom>
-          <a:noFill/>
-        </p:spPr>
-        <p:txBody>
-          <a:bodyPr wrap="square" lIns="0" tIns="0" rIns="0" bIns="0">
-            <a:spAutoFit/>
-          </a:bodyPr>
-          <a:lstStyle/>
-          <a:p>
-            <a:pPr>
-              <a:spcAft>
-                <a:spcPts val="300"/>
-              </a:spcAft>
-              <a:defRPr sz="1000" b="1">
-                <a:solidFill>
-                  <a:srgbClr val="080F1B"/>
-                </a:solidFill>
-                <a:latin typeface="Aptos"/>
-              </a:defRPr>
-            </a:pPr>
-            <a:r>
-              <a:t>02</a:t>
-            </a:r>
-          </a:p>
-        </p:txBody>
-      </p:sp>
-      <p:sp>
-        <p:nvSpPr>
-          <p:cNvPr id="14" name="reveal_04"/>
-          <p:cNvSpPr txBox="1"/>
-          <p:nvPr/>
-        </p:nvSpPr>
-        <p:spPr>
-          <a:xfrm>
-            <a:off x="7918704" y="2953512"/>
-            <a:ext cx="3749039" cy="274320"/>
-          </a:xfrm>
-          <a:prstGeom prst="rect">
-            <a:avLst/>
-          </a:prstGeom>
-          <a:noFill/>
-        </p:spPr>
-        <p:txBody>
-          <a:bodyPr wrap="square" lIns="0" tIns="0" rIns="0" bIns="0">
-            <a:spAutoFit/>
-          </a:bodyPr>
-          <a:lstStyle/>
-          <a:p>
-            <a:pPr>
-              <a:spcAft>
-                <a:spcPts val="300"/>
-              </a:spcAft>
-              <a:defRPr sz="1400" b="1">
-                <a:solidFill>
-                  <a:srgbClr val="EDF5FF"/>
-                </a:solidFill>
-                <a:latin typeface="Aptos"/>
-              </a:defRPr>
-            </a:pPr>
-            <a:r>
-              <a:t>ACCESS</a:t>
-            </a:r>
-          </a:p>
-        </p:txBody>
-      </p:sp>
-      <p:sp>
-        <p:nvSpPr>
-          <p:cNvPr id="15" name="reveal_04"/>
-          <p:cNvSpPr txBox="1"/>
-          <p:nvPr/>
-        </p:nvSpPr>
-        <p:spPr>
-          <a:xfrm>
-            <a:off x="7918704" y="3346704"/>
-            <a:ext cx="3657600" cy="457200"/>
-          </a:xfrm>
-          <a:prstGeom prst="rect">
-            <a:avLst/>
-          </a:prstGeom>
-          <a:noFill/>
-        </p:spPr>
-        <p:txBody>
-          <a:bodyPr wrap="square" lIns="0" tIns="0" rIns="0" bIns="0">
-            <a:spAutoFit/>
-          </a:bodyPr>
-          <a:lstStyle/>
-          <a:p>
-            <a:pPr>
-              <a:spcAft>
-                <a:spcPts val="300"/>
-              </a:spcAft>
-              <a:defRPr sz="1300" b="0">
-                <a:solidFill>
-                  <a:srgbClr val="A2B4CA"/>
-                </a:solidFill>
-                <a:latin typeface="Aptos"/>
-              </a:defRPr>
-            </a:pPr>
-            <a:r>
-              <a:t>Role + ownership checks; parent permissions.</a:t>
-            </a:r>
-          </a:p>
-        </p:txBody>
-      </p:sp>
-      <p:sp>
-        <p:nvSpPr>
-          <p:cNvPr id="16" name="Rounded Rectangle 15"/>
-          <p:cNvSpPr/>
-          <p:nvPr/>
-        </p:nvSpPr>
-        <p:spPr>
-          <a:xfrm>
-            <a:off x="7342631" y="3886200"/>
-            <a:ext cx="411480" cy="292608"/>
-          </a:xfrm>
-          <a:prstGeom prst="roundRect">
-            <a:avLst>
-              <a:gd name="adj" fmla="val 10000"/>
-            </a:avLst>
-          </a:prstGeom>
-          <a:solidFill>
-            <a:srgbClr val="B4A3FF"/>
-          </a:solidFill>
-          <a:ln>
-            <a:noFill/>
-          </a:ln>
-        </p:spPr>
-        <p:style>
-          <a:lnRef idx="1">
-            <a:schemeClr val="accent1"/>
-          </a:lnRef>
-          <a:fillRef idx="3">
-            <a:schemeClr val="accent1"/>
-          </a:fillRef>
-          <a:effectRef idx="2">
-            <a:schemeClr val="accent1"/>
-          </a:effectRef>
-          <a:fontRef idx="minor">
-            <a:schemeClr val="lt1"/>
-          </a:fontRef>
-        </p:style>
-        <p:txBody>
-          <a:bodyPr rtlCol="0" anchor="ctr"/>
-          <a:lstStyle/>
-          <a:p>
-            <a:pPr algn="ctr"/>
-            <a:endParaRPr/>
-          </a:p>
-        </p:txBody>
-      </p:sp>
-      <p:sp>
-        <p:nvSpPr>
-          <p:cNvPr id="17" name="TextBox 16"/>
-          <p:cNvSpPr txBox="1"/>
-          <p:nvPr/>
-        </p:nvSpPr>
-        <p:spPr>
-          <a:xfrm>
-            <a:off x="7415783" y="3927348"/>
-            <a:ext cx="265176" cy="210312"/>
-          </a:xfrm>
-          <a:prstGeom prst="rect">
-            <a:avLst/>
-          </a:prstGeom>
-          <a:noFill/>
-        </p:spPr>
-        <p:txBody>
-          <a:bodyPr wrap="square" lIns="0" tIns="0" rIns="0" bIns="0">
-            <a:spAutoFit/>
-          </a:bodyPr>
-          <a:lstStyle/>
-          <a:p>
-            <a:pPr>
-              <a:spcAft>
-                <a:spcPts val="300"/>
-              </a:spcAft>
-              <a:defRPr sz="1000" b="1">
-                <a:solidFill>
-                  <a:srgbClr val="080F1B"/>
-                </a:solidFill>
-                <a:latin typeface="Aptos"/>
-              </a:defRPr>
-            </a:pPr>
-            <a:r>
-              <a:t>03</a:t>
-            </a:r>
-          </a:p>
-        </p:txBody>
-      </p:sp>
-      <p:sp>
-        <p:nvSpPr>
-          <p:cNvPr id="18" name="reveal_05"/>
-          <p:cNvSpPr txBox="1"/>
-          <p:nvPr/>
-        </p:nvSpPr>
-        <p:spPr>
-          <a:xfrm>
-            <a:off x="7918704" y="3886200"/>
-            <a:ext cx="3749039" cy="274320"/>
-          </a:xfrm>
-          <a:prstGeom prst="rect">
-            <a:avLst/>
-          </a:prstGeom>
-          <a:noFill/>
-        </p:spPr>
-        <p:txBody>
-          <a:bodyPr wrap="square" lIns="0" tIns="0" rIns="0" bIns="0">
-            <a:spAutoFit/>
-          </a:bodyPr>
-          <a:lstStyle/>
-          <a:p>
-            <a:pPr>
-              <a:spcAft>
-                <a:spcPts val="300"/>
-              </a:spcAft>
-              <a:defRPr sz="1400" b="1">
-                <a:solidFill>
-                  <a:srgbClr val="EDF5FF"/>
-                </a:solidFill>
-                <a:latin typeface="Aptos"/>
-              </a:defRPr>
-            </a:pPr>
-            <a:r>
-              <a:t>AI &amp; SECRETS</a:t>
-            </a:r>
-          </a:p>
-        </p:txBody>
-      </p:sp>
-      <p:sp>
-        <p:nvSpPr>
-          <p:cNvPr id="19" name="reveal_05"/>
-          <p:cNvSpPr txBox="1"/>
-          <p:nvPr/>
-        </p:nvSpPr>
-        <p:spPr>
-          <a:xfrm>
-            <a:off x="7918704" y="4279392"/>
-            <a:ext cx="3657600" cy="457200"/>
-          </a:xfrm>
-          <a:prstGeom prst="rect">
-            <a:avLst/>
-          </a:prstGeom>
-          <a:noFill/>
-        </p:spPr>
-        <p:txBody>
-          <a:bodyPr wrap="square" lIns="0" tIns="0" rIns="0" bIns="0">
-            <a:spAutoFit/>
-          </a:bodyPr>
-          <a:lstStyle/>
-          <a:p>
-            <a:pPr>
-              <a:spcAft>
-                <a:spcPts val="300"/>
-              </a:spcAft>
-              <a:defRPr sz="1300" b="0">
-                <a:solidFill>
-                  <a:srgbClr val="A2B4CA"/>
-                </a:solidFill>
-                <a:latin typeface="Aptos"/>
-              </a:defRPr>
-            </a:pPr>
-            <a:r>
-              <a:t>AES-256-GCM model keys; validated tools.</a:t>
-            </a:r>
-          </a:p>
-        </p:txBody>
-      </p:sp>
-      <p:sp>
-        <p:nvSpPr>
-          <p:cNvPr id="20" name="Rounded Rectangle 19"/>
-          <p:cNvSpPr/>
-          <p:nvPr/>
-        </p:nvSpPr>
-        <p:spPr>
-          <a:xfrm>
-            <a:off x="7342631" y="4818888"/>
-            <a:ext cx="411480" cy="292608"/>
-          </a:xfrm>
-          <a:prstGeom prst="roundRect">
-            <a:avLst>
-              <a:gd name="adj" fmla="val 10000"/>
-            </a:avLst>
-          </a:prstGeom>
-          <a:solidFill>
-            <a:srgbClr val="F3C969"/>
-          </a:solidFill>
-          <a:ln>
-            <a:noFill/>
-          </a:ln>
-        </p:spPr>
-        <p:style>
-          <a:lnRef idx="1">
-            <a:schemeClr val="accent1"/>
-          </a:lnRef>
-          <a:fillRef idx="3">
-            <a:schemeClr val="accent1"/>
-          </a:fillRef>
-          <a:effectRef idx="2">
-            <a:schemeClr val="accent1"/>
-          </a:effectRef>
-          <a:fontRef idx="minor">
-            <a:schemeClr val="lt1"/>
-          </a:fontRef>
-        </p:style>
-        <p:txBody>
-          <a:bodyPr rtlCol="0" anchor="ctr"/>
-          <a:lstStyle/>
-          <a:p>
-            <a:pPr algn="ctr"/>
-            <a:endParaRPr/>
-          </a:p>
-        </p:txBody>
-      </p:sp>
-      <p:sp>
-        <p:nvSpPr>
-          <p:cNvPr id="21" name="TextBox 20"/>
-          <p:cNvSpPr txBox="1"/>
-          <p:nvPr/>
-        </p:nvSpPr>
-        <p:spPr>
-          <a:xfrm>
-            <a:off x="7415783" y="4860036"/>
-            <a:ext cx="265176" cy="210312"/>
-          </a:xfrm>
-          <a:prstGeom prst="rect">
-            <a:avLst/>
-          </a:prstGeom>
-          <a:noFill/>
-        </p:spPr>
-        <p:txBody>
-          <a:bodyPr wrap="square" lIns="0" tIns="0" rIns="0" bIns="0">
-            <a:spAutoFit/>
-          </a:bodyPr>
-          <a:lstStyle/>
-          <a:p>
-            <a:pPr>
-              <a:spcAft>
-                <a:spcPts val="300"/>
-              </a:spcAft>
-              <a:defRPr sz="1000" b="1">
-                <a:solidFill>
-                  <a:srgbClr val="080F1B"/>
-                </a:solidFill>
-                <a:latin typeface="Aptos"/>
-              </a:defRPr>
-            </a:pPr>
-            <a:r>
-              <a:t>04</a:t>
-            </a:r>
-          </a:p>
-        </p:txBody>
-      </p:sp>
-      <p:sp>
-        <p:nvSpPr>
-          <p:cNvPr id="22" name="reveal_06"/>
-          <p:cNvSpPr txBox="1"/>
-          <p:nvPr/>
-        </p:nvSpPr>
-        <p:spPr>
-          <a:xfrm>
-            <a:off x="7918704" y="4818888"/>
-            <a:ext cx="3749039" cy="274320"/>
-          </a:xfrm>
-          <a:prstGeom prst="rect">
-            <a:avLst/>
-          </a:prstGeom>
-          <a:noFill/>
-        </p:spPr>
-        <p:txBody>
-          <a:bodyPr wrap="square" lIns="0" tIns="0" rIns="0" bIns="0">
-            <a:spAutoFit/>
-          </a:bodyPr>
-          <a:lstStyle/>
-          <a:p>
-            <a:pPr>
-              <a:spcAft>
-                <a:spcPts val="300"/>
-              </a:spcAft>
-              <a:defRPr sz="1400" b="1">
-                <a:solidFill>
-                  <a:srgbClr val="EDF5FF"/>
-                </a:solidFill>
-                <a:latin typeface="Aptos"/>
-              </a:defRPr>
-            </a:pPr>
-            <a:r>
-              <a:t>MONEY INTEGRITY</a:t>
-            </a:r>
-          </a:p>
-        </p:txBody>
-      </p:sp>
-      <p:sp>
-        <p:nvSpPr>
-          <p:cNvPr id="23" name="reveal_06"/>
-          <p:cNvSpPr txBox="1"/>
-          <p:nvPr/>
-        </p:nvSpPr>
-        <p:spPr>
-          <a:xfrm>
-            <a:off x="7918704" y="5212079"/>
-            <a:ext cx="3657600" cy="457200"/>
-          </a:xfrm>
-          <a:prstGeom prst="rect">
-            <a:avLst/>
-          </a:prstGeom>
-          <a:noFill/>
-        </p:spPr>
-        <p:txBody>
-          <a:bodyPr wrap="square" lIns="0" tIns="0" rIns="0" bIns="0">
-            <a:spAutoFit/>
-          </a:bodyPr>
-          <a:lstStyle/>
-          <a:p>
-            <a:pPr>
-              <a:spcAft>
-                <a:spcPts val="300"/>
-              </a:spcAft>
-              <a:defRPr sz="1300" b="0">
-                <a:solidFill>
-                  <a:srgbClr val="A2B4CA"/>
-                </a:solidFill>
-                <a:latin typeface="Aptos"/>
-              </a:defRPr>
-            </a:pPr>
-            <a:r>
-              <a:t>Confirmation, locks, tokens, balanced ledger.</a:t>
-            </a:r>
-          </a:p>
-        </p:txBody>
-      </p:sp>
-      <p:sp>
-        <p:nvSpPr>
-          <p:cNvPr id="24" name="Rounded Rectangle 23"/>
-          <p:cNvSpPr/>
-          <p:nvPr/>
-        </p:nvSpPr>
-        <p:spPr>
-          <a:xfrm>
-            <a:off x="502920" y="6007608"/>
-            <a:ext cx="11183112" cy="402336"/>
-          </a:xfrm>
-          <a:prstGeom prst="roundRect">
-            <a:avLst>
-              <a:gd name="adj" fmla="val 10000"/>
-            </a:avLst>
-          </a:prstGeom>
-          <a:solidFill>
-            <a:srgbClr val="172A40"/>
-          </a:solidFill>
-          <a:ln>
-            <a:noFill/>
-          </a:ln>
-        </p:spPr>
-        <p:style>
-          <a:lnRef idx="1">
-            <a:schemeClr val="accent1"/>
-          </a:lnRef>
-          <a:fillRef idx="3">
-            <a:schemeClr val="accent1"/>
-          </a:fillRef>
-          <a:effectRef idx="2">
-            <a:schemeClr val="accent1"/>
-          </a:effectRef>
-          <a:fontRef idx="minor">
-            <a:schemeClr val="lt1"/>
-          </a:fontRef>
-        </p:style>
-        <p:txBody>
-          <a:bodyPr rtlCol="0" anchor="ctr"/>
-          <a:lstStyle/>
-          <a:p>
-            <a:pPr algn="ctr"/>
-            <a:endParaRPr/>
-          </a:p>
-        </p:txBody>
-      </p:sp>
-      <p:sp>
-        <p:nvSpPr>
-          <p:cNvPr id="25" name="TextBox 24"/>
-          <p:cNvSpPr txBox="1"/>
-          <p:nvPr/>
-        </p:nvSpPr>
-        <p:spPr>
-          <a:xfrm>
-            <a:off x="704088" y="6117336"/>
-            <a:ext cx="10789920" cy="210312"/>
-          </a:xfrm>
-          <a:prstGeom prst="rect">
-            <a:avLst/>
-          </a:prstGeom>
-          <a:noFill/>
-        </p:spPr>
-        <p:txBody>
-          <a:bodyPr wrap="square" lIns="0" tIns="0" rIns="0" bIns="0">
-            <a:spAutoFit/>
-          </a:bodyPr>
-          <a:lstStyle/>
-          <a:p>
-            <a:pPr>
-              <a:spcAft>
-                <a:spcPts val="300"/>
-              </a:spcAft>
-              <a:defRPr sz="1100" b="0">
-                <a:solidFill>
-                  <a:srgbClr val="A2B4CA"/>
-                </a:solidFill>
-                <a:latin typeface="Aptos"/>
-              </a:defRPr>
-            </a:pPr>
-            <a:r>
-              <a:t>Data export  ·  Account closure  ·  No stored full PAN/CVV  ·  Selected AI context may reach the configured provider</a:t>
-            </a:r>
-          </a:p>
-        </p:txBody>
-      </p:sp>
-    </p:spTree>
-  </p:cSld>
-  <p:clrMapOvr>
-    <a:masterClrMapping/>
-  </p:clrMapOvr>
-  <p:transition spd="med">
-    <p:fade/>
-  </p:transition>
-  <p:timing>
-    <p:tnLst>
-      <p:par>
-        <p:cTn id="1" dur="indefinite" restart="never" nodeType="tmRoot">
-          <p:childTnLst>
-            <p:seq concurrent="1" nextAc="seek">
-              <p:cTn id="2" dur="indefinite" nodeType="mainSeq">
-                <p:childTnLst>
-                  <p:par>
-                    <p:cTn id="3" fill="hold">
-                      <p:stCondLst>
-                        <p:cond delay="indefinite"/>
-                        <p:cond evt="onBegin" delay="0">
-                          <p:tn val="2"/>
-                        </p:cond>
-                      </p:stCondLst>
-                      <p:childTnLst>
-                        <p:par>
-                          <p:cTn id="4" fill="hold">
-                            <p:stCondLst>
-                              <p:cond delay="0"/>
-                            </p:stCondLst>
-                            <p:childTnLst>
-                              <p:par>
-                                <p:cTn id="5" presetID="10" presetClass="entr" presetSubtype="0" fill="hold" grpId="0" nodeType="afterEffect">
-                                  <p:stCondLst>
-                                    <p:cond delay="0"/>
-                                  </p:stCondLst>
-                                  <p:childTnLst>
-                                    <p:set>
-                                      <p:cBhvr>
-                                        <p:cTn id="6" dur="1" fill="hold">
-                                          <p:stCondLst>
-                                            <p:cond delay="0"/>
-                                          </p:stCondLst>
-                                        </p:cTn>
-                                        <p:tgtEl>
-                                          <p:spTgt spid="3"/>
-                                        </p:tgtEl>
-                                        <p:attrNameLst>
-                                          <p:attrName>style.visibility</p:attrName>
-                                        </p:attrNameLst>
-                                      </p:cBhvr>
-                                      <p:to>
-                                        <p:strVal val="visible"/>
-                                      </p:to>
-                                    </p:set>
-                                    <p:animEffect transition="in" filter="fade">
-                                      <p:cBhvr>
-                                        <p:cTn id="7" dur="600"/>
-                                        <p:tgtEl>
-                                          <p:spTgt spid="3"/>
-                                        </p:tgtEl>
-                                      </p:cBhvr>
-                                    </p:animEffect>
-                                  </p:childTnLst>
-                                </p:cTn>
-                              </p:par>
-                            </p:childTnLst>
-                          </p:cTn>
-                        </p:par>
-                        <p:par>
-                          <p:cTn id="8" fill="hold">
-                            <p:stCondLst>
-                              <p:cond delay="600"/>
-                            </p:stCondLst>
-                            <p:childTnLst>
-                              <p:par>
-                                <p:cTn id="9" presetID="10" presetClass="entr" presetSubtype="0" fill="hold" nodeType="afterEffect">
-                                  <p:stCondLst>
-                                    <p:cond delay="0"/>
-                                  </p:stCondLst>
-                                  <p:childTnLst>
-                                    <p:set>
-                                      <p:cBhvr>
-                                        <p:cTn id="10" dur="1" fill="hold">
-                                          <p:stCondLst>
-                                            <p:cond delay="0"/>
-                                          </p:stCondLst>
-                                        </p:cTn>
-                                        <p:tgtEl>
-                                          <p:spTgt spid="7"/>
-                                        </p:tgtEl>
-                                        <p:attrNameLst>
-                                          <p:attrName>style.visibility</p:attrName>
-                                        </p:attrNameLst>
-                                      </p:cBhvr>
-                                      <p:to>
-                                        <p:strVal val="visible"/>
-                                      </p:to>
-                                    </p:set>
-                                    <p:animEffect transition="in" filter="fade">
-                                      <p:cBhvr>
-                                        <p:cTn id="11" dur="600"/>
-                                        <p:tgtEl>
-                                          <p:spTgt spid="7"/>
-                                        </p:tgtEl>
-                                      </p:cBhvr>
-                                    </p:animEffect>
-                                  </p:childTnLst>
-                                </p:cTn>
-                              </p:par>
-                            </p:childTnLst>
-                          </p:cTn>
-                        </p:par>
-                        <p:par>
-                          <p:cTn id="12" fill="hold">
-                            <p:stCondLst>
-                              <p:cond delay="1200"/>
-                            </p:stCondLst>
-                            <p:childTnLst>
-                              <p:par>
-                                <p:cTn id="13" presetID="10" presetClass="entr" presetSubtype="0" fill="hold" grpId="0" nodeType="afterEffect">
-                                  <p:stCondLst>
-                                    <p:cond delay="0"/>
-                                  </p:stCondLst>
-                                  <p:childTnLst>
-                                    <p:set>
-                                      <p:cBhvr>
-                                        <p:cTn id="14" dur="1" fill="hold">
-                                          <p:stCondLst>
-                                            <p:cond delay="0"/>
-                                          </p:stCondLst>
-                                        </p:cTn>
-                                        <p:tgtEl>
-                                          <p:spTgt spid="11"/>
-                                        </p:tgtEl>
-                                        <p:attrNameLst>
-                                          <p:attrName>style.visibility</p:attrName>
-                                        </p:attrNameLst>
-                                      </p:cBhvr>
-                                      <p:to>
-                                        <p:strVal val="visible"/>
-                                      </p:to>
-                                    </p:set>
-                                    <p:animEffect transition="in" filter="fade">
-                                      <p:cBhvr>
-                                        <p:cTn id="15" dur="600"/>
-                                        <p:tgtEl>
-                                          <p:spTgt spid="11"/>
-                                        </p:tgtEl>
-                                      </p:cBhvr>
-                                    </p:animEffect>
-                                  </p:childTnLst>
-                                </p:cTn>
-                              </p:par>
-                              <p:par>
-                                <p:cTn id="16" presetID="10" presetClass="entr" presetSubtype="0" fill="hold" grpId="0" nodeType="withEffect">
-                                  <p:stCondLst>
-                                    <p:cond delay="0"/>
-                                  </p:stCondLst>
-                                  <p:childTnLst>
-                                    <p:set>
-                                      <p:cBhvr>
-                                        <p:cTn id="17" dur="1" fill="hold">
-                                          <p:stCondLst>
-                                            <p:cond delay="0"/>
-                                          </p:stCondLst>
-                                        </p:cTn>
-                                        <p:tgtEl>
-                                          <p:spTgt spid="10"/>
-                                        </p:tgtEl>
-                                        <p:attrNameLst>
-                                          <p:attrName>style.visibility</p:attrName>
-                                        </p:attrNameLst>
-                                      </p:cBhvr>
-                                      <p:to>
-                                        <p:strVal val="visible"/>
-                                      </p:to>
-                                    </p:set>
-                                    <p:animEffect transition="in" filter="fade">
-                                      <p:cBhvr>
-                                        <p:cTn id="18" dur="600"/>
-                                        <p:tgtEl>
-                                          <p:spTgt spid="10"/>
-                                        </p:tgtEl>
-                                      </p:cBhvr>
-                                    </p:animEffect>
-                                  </p:childTnLst>
-                                </p:cTn>
-                              </p:par>
-                            </p:childTnLst>
-                          </p:cTn>
-                        </p:par>
-                        <p:par>
-                          <p:cTn id="19" fill="hold">
-                            <p:stCondLst>
-                              <p:cond delay="1800"/>
-                            </p:stCondLst>
-                            <p:childTnLst>
-                              <p:par>
-                                <p:cTn id="20" presetID="10" presetClass="entr" presetSubtype="0" fill="hold" grpId="0" nodeType="afterEffect">
-                                  <p:stCondLst>
-                                    <p:cond delay="0"/>
-                                  </p:stCondLst>
-                                  <p:childTnLst>
-                                    <p:set>
-                                      <p:cBhvr>
-                                        <p:cTn id="21" dur="1" fill="hold">
-                                          <p:stCondLst>
-                                            <p:cond delay="0"/>
-                                          </p:stCondLst>
-                                        </p:cTn>
-                                        <p:tgtEl>
-                                          <p:spTgt spid="15"/>
-                                        </p:tgtEl>
-                                        <p:attrNameLst>
-                                          <p:attrName>style.visibility</p:attrName>
-                                        </p:attrNameLst>
-                                      </p:cBhvr>
-                                      <p:to>
-                                        <p:strVal val="visible"/>
-                                      </p:to>
-                                    </p:set>
-                                    <p:animEffect transition="in" filter="fade">
-                                      <p:cBhvr>
-                                        <p:cTn id="22" dur="600"/>
-                                        <p:tgtEl>
-                                          <p:spTgt spid="15"/>
-                                        </p:tgtEl>
-                                      </p:cBhvr>
-                                    </p:animEffect>
-                                  </p:childTnLst>
-                                </p:cTn>
-                              </p:par>
-                              <p:par>
-                                <p:cTn id="23" presetID="10" presetClass="entr" presetSubtype="0" fill="hold" grpId="0" nodeType="withEffect">
-                                  <p:stCondLst>
-                                    <p:cond delay="0"/>
-                                  </p:stCondLst>
-                                  <p:childTnLst>
-                                    <p:set>
-                                      <p:cBhvr>
-                                        <p:cTn id="24" dur="1" fill="hold">
-                                          <p:stCondLst>
-                                            <p:cond delay="0"/>
-                                          </p:stCondLst>
-                                        </p:cTn>
-                                        <p:tgtEl>
-                                          <p:spTgt spid="14"/>
-                                        </p:tgtEl>
-                                        <p:attrNameLst>
-                                          <p:attrName>style.visibility</p:attrName>
-                                        </p:attrNameLst>
-                                      </p:cBhvr>
-                                      <p:to>
-                                        <p:strVal val="visible"/>
-                                      </p:to>
-                                    </p:set>
-                                    <p:animEffect transition="in" filter="fade">
-                                      <p:cBhvr>
-                                        <p:cTn id="25" dur="600"/>
-                                        <p:tgtEl>
-                                          <p:spTgt spid="14"/>
-                                        </p:tgtEl>
-                                      </p:cBhvr>
-                                    </p:animEffect>
-                                  </p:childTnLst>
-                                </p:cTn>
-                              </p:par>
-                            </p:childTnLst>
-                          </p:cTn>
-                        </p:par>
-                        <p:par>
-                          <p:cTn id="26" fill="hold">
-                            <p:stCondLst>
-                              <p:cond delay="2400"/>
-                            </p:stCondLst>
-                            <p:childTnLst>
-                              <p:par>
-                                <p:cTn id="27" presetID="10" presetClass="entr" presetSubtype="0" fill="hold" grpId="0" nodeType="afterEffect">
-                                  <p:stCondLst>
-                                    <p:cond delay="0"/>
-                                  </p:stCondLst>
-                                  <p:childTnLst>
-                                    <p:set>
-                                      <p:cBhvr>
-                                        <p:cTn id="28" dur="1" fill="hold">
-                                          <p:stCondLst>
-                                            <p:cond delay="0"/>
-                                          </p:stCondLst>
-                                        </p:cTn>
-                                        <p:tgtEl>
-                                          <p:spTgt spid="19"/>
-                                        </p:tgtEl>
-                                        <p:attrNameLst>
-                                          <p:attrName>style.visibility</p:attrName>
-                                        </p:attrNameLst>
-                                      </p:cBhvr>
-                                      <p:to>
-                                        <p:strVal val="visible"/>
-                                      </p:to>
-                                    </p:set>
-                                    <p:animEffect transition="in" filter="fade">
-                                      <p:cBhvr>
-                                        <p:cTn id="29" dur="600"/>
-                                        <p:tgtEl>
-                                          <p:spTgt spid="19"/>
-                                        </p:tgtEl>
-                                      </p:cBhvr>
-                                    </p:animEffect>
-                                  </p:childTnLst>
-                                </p:cTn>
-                              </p:par>
-                              <p:par>
-                                <p:cTn id="30" presetID="10" presetClass="entr" presetSubtype="0" fill="hold" grpId="0" nodeType="withEffect">
-                                  <p:stCondLst>
-                                    <p:cond delay="0"/>
-                                  </p:stCondLst>
-                                  <p:childTnLst>
-                                    <p:set>
-                                      <p:cBhvr>
-                                        <p:cTn id="31" dur="1" fill="hold">
-                                          <p:stCondLst>
-                                            <p:cond delay="0"/>
-                                          </p:stCondLst>
-                                        </p:cTn>
-                                        <p:tgtEl>
-                                          <p:spTgt spid="18"/>
-                                        </p:tgtEl>
-                                        <p:attrNameLst>
-                                          <p:attrName>style.visibility</p:attrName>
-                                        </p:attrNameLst>
-                                      </p:cBhvr>
-                                      <p:to>
-                                        <p:strVal val="visible"/>
-                                      </p:to>
-                                    </p:set>
-                                    <p:animEffect transition="in" filter="fade">
-                                      <p:cBhvr>
-                                        <p:cTn id="32" dur="600"/>
-                                        <p:tgtEl>
-                                          <p:spTgt spid="18"/>
-                                        </p:tgtEl>
-                                      </p:cBhvr>
-                                    </p:animEffect>
-                                  </p:childTnLst>
-                                </p:cTn>
-                              </p:par>
-                            </p:childTnLst>
-                          </p:cTn>
-                        </p:par>
-                        <p:par>
-                          <p:cTn id="33" fill="hold">
-                            <p:stCondLst>
-                              <p:cond delay="3000"/>
-                            </p:stCondLst>
-                            <p:childTnLst>
-                              <p:par>
-                                <p:cTn id="34" presetID="10" presetClass="entr" presetSubtype="0" fill="hold" grpId="0" nodeType="afterEffect">
-                                  <p:stCondLst>
-                                    <p:cond delay="0"/>
-                                  </p:stCondLst>
-                                  <p:childTnLst>
-                                    <p:set>
-                                      <p:cBhvr>
-                                        <p:cTn id="35" dur="1" fill="hold">
-                                          <p:stCondLst>
-                                            <p:cond delay="0"/>
-                                          </p:stCondLst>
-                                        </p:cTn>
-                                        <p:tgtEl>
-                                          <p:spTgt spid="23"/>
-                                        </p:tgtEl>
-                                        <p:attrNameLst>
-                                          <p:attrName>style.visibility</p:attrName>
-                                        </p:attrNameLst>
-                                      </p:cBhvr>
-                                      <p:to>
-                                        <p:strVal val="visible"/>
-                                      </p:to>
-                                    </p:set>
-                                    <p:animEffect transition="in" filter="fade">
-                                      <p:cBhvr>
-                                        <p:cTn id="36" dur="600"/>
-                                        <p:tgtEl>
-                                          <p:spTgt spid="23"/>
-                                        </p:tgtEl>
-                                      </p:cBhvr>
-                                    </p:animEffect>
-                                  </p:childTnLst>
-                                </p:cTn>
-                              </p:par>
-                              <p:par>
-                                <p:cTn id="37" presetID="10" presetClass="entr" presetSubtype="0" fill="hold" grpId="0" nodeType="withEffect">
-                                  <p:stCondLst>
-                                    <p:cond delay="0"/>
-                                  </p:stCondLst>
-                                  <p:childTnLst>
-                                    <p:set>
-                                      <p:cBhvr>
-                                        <p:cTn id="38" dur="1" fill="hold">
-                                          <p:stCondLst>
-                                            <p:cond delay="0"/>
-                                          </p:stCondLst>
-                                        </p:cTn>
-                                        <p:tgtEl>
-                                          <p:spTgt spid="22"/>
-                                        </p:tgtEl>
-                                        <p:attrNameLst>
-                                          <p:attrName>style.visibility</p:attrName>
-                                        </p:attrNameLst>
-                                      </p:cBhvr>
-                                      <p:to>
-                                        <p:strVal val="visible"/>
-                                      </p:to>
-                                    </p:set>
-                                    <p:animEffect transition="in" filter="fade">
-                                      <p:cBhvr>
-                                        <p:cTn id="39" dur="600"/>
-                                        <p:tgtEl>
-                                          <p:spTgt spid="22"/>
-                                        </p:tgtEl>
-                                      </p:cBhvr>
-                                    </p:animEffect>
-                                  </p:childTnLst>
-                                </p:cTn>
-                              </p:par>
-                            </p:childTnLst>
-                          </p:cTn>
-                        </p:par>
-                      </p:childTnLst>
-                    </p:cTn>
-                  </p:par>
-                </p:childTnLst>
-              </p:cTn>
-              <p:prevCondLst>
-                <p:cond evt="onPrev" delay="0">
-                  <p:tgtEl>
-                    <p:sldTgt/>
-                  </p:tgtEl>
-                </p:cond>
-              </p:prevCondLst>
-              <p:nextCondLst>
-                <p:cond evt="onNext" delay="0">
-                  <p:tgtEl>
-                    <p:sldTgt/>
-                  </p:tgtEl>
-                </p:cond>
-              </p:nextCondLst>
-            </p:seq>
-          </p:childTnLst>
-        </p:cTn>
-      </p:par>
-    </p:tnLst>
-    <p:bldLst>
-      <p:bldP spid="3" grpId="0"/>
-      <p:bldP spid="10" grpId="0"/>
-      <p:bldP spid="11" grpId="0"/>
-      <p:bldP spid="14" grpId="0"/>
-      <p:bldP spid="15" grpId="0"/>
-      <p:bldP spid="18" grpId="0"/>
-      <p:bldP spid="19" grpId="0"/>
-      <p:bldP spid="22" grpId="0"/>
-      <p:bldP spid="23" grpId="0"/>
     </p:bldLst>
   </p:timing>
 </p:sld>
